--- a/3-Master_Plan/re_entry/Model.pptx
+++ b/3-Master_Plan/re_entry/Model.pptx
@@ -259,7 +259,7 @@
           <a:p>
             <a:fld id="{1D57A141-5066-284B-8859-8D81B7CAB7AE}" type="datetimeFigureOut">
               <a:rPr lang="en-US" smtClean="0"/>
-              <a:t>7/27/26</a:t>
+              <a:t>7/31/26</a:t>
             </a:fld>
             <a:endParaRPr lang="en-US"/>
           </a:p>
@@ -457,7 +457,7 @@
           <a:p>
             <a:fld id="{1D57A141-5066-284B-8859-8D81B7CAB7AE}" type="datetimeFigureOut">
               <a:rPr lang="en-US" smtClean="0"/>
-              <a:t>7/27/26</a:t>
+              <a:t>7/31/26</a:t>
             </a:fld>
             <a:endParaRPr lang="en-US"/>
           </a:p>
@@ -665,7 +665,7 @@
           <a:p>
             <a:fld id="{1D57A141-5066-284B-8859-8D81B7CAB7AE}" type="datetimeFigureOut">
               <a:rPr lang="en-US" smtClean="0"/>
-              <a:t>7/27/26</a:t>
+              <a:t>7/31/26</a:t>
             </a:fld>
             <a:endParaRPr lang="en-US"/>
           </a:p>
@@ -863,7 +863,7 @@
           <a:p>
             <a:fld id="{1D57A141-5066-284B-8859-8D81B7CAB7AE}" type="datetimeFigureOut">
               <a:rPr lang="en-US" smtClean="0"/>
-              <a:t>7/27/26</a:t>
+              <a:t>7/31/26</a:t>
             </a:fld>
             <a:endParaRPr lang="en-US"/>
           </a:p>
@@ -1138,7 +1138,7 @@
           <a:p>
             <a:fld id="{1D57A141-5066-284B-8859-8D81B7CAB7AE}" type="datetimeFigureOut">
               <a:rPr lang="en-US" smtClean="0"/>
-              <a:t>7/27/26</a:t>
+              <a:t>7/31/26</a:t>
             </a:fld>
             <a:endParaRPr lang="en-US"/>
           </a:p>
@@ -1403,7 +1403,7 @@
           <a:p>
             <a:fld id="{1D57A141-5066-284B-8859-8D81B7CAB7AE}" type="datetimeFigureOut">
               <a:rPr lang="en-US" smtClean="0"/>
-              <a:t>7/27/26</a:t>
+              <a:t>7/31/26</a:t>
             </a:fld>
             <a:endParaRPr lang="en-US"/>
           </a:p>
@@ -1815,7 +1815,7 @@
           <a:p>
             <a:fld id="{1D57A141-5066-284B-8859-8D81B7CAB7AE}" type="datetimeFigureOut">
               <a:rPr lang="en-US" smtClean="0"/>
-              <a:t>7/27/26</a:t>
+              <a:t>7/31/26</a:t>
             </a:fld>
             <a:endParaRPr lang="en-US"/>
           </a:p>
@@ -1956,7 +1956,7 @@
           <a:p>
             <a:fld id="{1D57A141-5066-284B-8859-8D81B7CAB7AE}" type="datetimeFigureOut">
               <a:rPr lang="en-US" smtClean="0"/>
-              <a:t>7/27/26</a:t>
+              <a:t>7/31/26</a:t>
             </a:fld>
             <a:endParaRPr lang="en-US"/>
           </a:p>
@@ -2069,7 +2069,7 @@
           <a:p>
             <a:fld id="{1D57A141-5066-284B-8859-8D81B7CAB7AE}" type="datetimeFigureOut">
               <a:rPr lang="en-US" smtClean="0"/>
-              <a:t>7/27/26</a:t>
+              <a:t>7/31/26</a:t>
             </a:fld>
             <a:endParaRPr lang="en-US"/>
           </a:p>
@@ -2380,7 +2380,7 @@
           <a:p>
             <a:fld id="{1D57A141-5066-284B-8859-8D81B7CAB7AE}" type="datetimeFigureOut">
               <a:rPr lang="en-US" smtClean="0"/>
-              <a:t>7/27/26</a:t>
+              <a:t>7/31/26</a:t>
             </a:fld>
             <a:endParaRPr lang="en-US"/>
           </a:p>
@@ -2668,7 +2668,7 @@
           <a:p>
             <a:fld id="{1D57A141-5066-284B-8859-8D81B7CAB7AE}" type="datetimeFigureOut">
               <a:rPr lang="en-US" smtClean="0"/>
-              <a:t>7/27/26</a:t>
+              <a:t>7/31/26</a:t>
             </a:fld>
             <a:endParaRPr lang="en-US"/>
           </a:p>
@@ -2909,7 +2909,7 @@
           <a:p>
             <a:fld id="{1D57A141-5066-284B-8859-8D81B7CAB7AE}" type="datetimeFigureOut">
               <a:rPr lang="en-US" smtClean="0"/>
-              <a:t>7/27/26</a:t>
+              <a:t>7/31/26</a:t>
             </a:fld>
             <a:endParaRPr lang="en-US"/>
           </a:p>
@@ -3326,8 +3326,8 @@
           <a:chExt cx="0" cy="0"/>
         </a:xfrm>
       </p:grpSpPr>
-      <mc:AlternateContent xmlns:mc="http://schemas.openxmlformats.org/markup-compatibility/2006" xmlns:a14="http://schemas.microsoft.com/office/drawing/2010/main">
-        <mc:Choice Requires="a14">
+      <mc:AlternateContent xmlns:mc="http://schemas.openxmlformats.org/markup-compatibility/2006">
+        <mc:Choice xmlns:a14="http://schemas.microsoft.com/office/drawing/2010/main" Requires="a14">
           <p:sp>
             <p:nvSpPr>
               <p:cNvPr id="4" name="TextBox 3">
@@ -3342,8 +3342,8 @@
             </p:nvSpPr>
             <p:spPr>
               <a:xfrm>
-                <a:off x="451691" y="47989"/>
-                <a:ext cx="4516916" cy="1443472"/>
+                <a:off x="413399" y="828420"/>
+                <a:ext cx="5644309" cy="1062211"/>
               </a:xfrm>
               <a:prstGeom prst="rect">
                 <a:avLst/>
@@ -3351,27 +3351,10 @@
               <a:noFill/>
             </p:spPr>
             <p:txBody>
-              <a:bodyPr wrap="square" rtlCol="0">
-                <a:spAutoFit/>
+              <a:bodyPr wrap="square" numCol="2" rtlCol="0">
+                <a:noAutofit/>
               </a:bodyPr>
               <a:lstStyle/>
-              <a:p>
-                <a:pPr algn="ctr">
-                  <a:lnSpc>
-                    <a:spcPct val="200000"/>
-                  </a:lnSpc>
-                </a:pPr>
-                <a:r>
-                  <a:rPr lang="en-US" dirty="0">
-                    <a:solidFill>
-                      <a:srgbClr val="0432FF"/>
-                    </a:solidFill>
-                    <a:latin typeface="Futura Medium" panose="020B0602020204020303" pitchFamily="34" charset="-79"/>
-                    <a:cs typeface="Futura Medium" panose="020B0602020204020303" pitchFamily="34" charset="-79"/>
-                  </a:rPr>
-                  <a:t>MODEL TWO STEP PROCESS: </a:t>
-                </a:r>
-              </a:p>
               <a:p>
                 <a:pPr marL="342900" indent="-342900">
                   <a:lnSpc>
@@ -3395,13 +3378,10 @@
                       <m:t>(</m:t>
                     </m:r>
                     <m:r>
-                      <m:rPr>
-                        <m:sty m:val="p"/>
-                      </m:rPr>
-                      <a:rPr lang="en-US" sz="1400" b="0" i="0" smtClean="0">
+                      <a:rPr lang="en-US" sz="1400" b="0" i="1" smtClean="0">
                         <a:latin typeface="Cambria Math" panose="02040503050406030204" pitchFamily="18" charset="0"/>
                       </a:rPr>
-                      <m:t>τ</m:t>
+                      <m:t>𝜌</m:t>
                     </m:r>
                     <m:r>
                       <a:rPr lang="en-US" sz="1400" b="0" i="0" smtClean="0">
@@ -3468,7 +3448,7 @@
                     <a:latin typeface="Futura Medium" panose="020B0602020204020303" pitchFamily="34" charset="-79"/>
                     <a:cs typeface="Futura Medium" panose="020B0602020204020303" pitchFamily="34" charset="-79"/>
                   </a:rPr>
-                  <a:t>Selection Score </a:t>
+                  <a:t>Selection Scoring </a:t>
                 </a:r>
                 <a14:m>
                   <m:oMath xmlns:m="http://schemas.openxmlformats.org/officeDocument/2006/math">
@@ -3516,12 +3496,23 @@
                     </m:d>
                   </m:oMath>
                 </a14:m>
+                <a:endParaRPr lang="en-US" sz="1400" b="0" dirty="0">
+                  <a:latin typeface="Futura Medium" panose="020B0602020204020303" pitchFamily="34" charset="-79"/>
+                </a:endParaRPr>
+              </a:p>
+              <a:p>
+                <a:pPr marL="342900" indent="-342900">
+                  <a:lnSpc>
+                    <a:spcPct val="200000"/>
+                  </a:lnSpc>
+                  <a:buAutoNum type="arabicPeriod"/>
+                </a:pPr>
                 <a:r>
                   <a:rPr lang="en-US" sz="1400" dirty="0">
                     <a:latin typeface="Futura Medium" panose="020B0602020204020303" pitchFamily="34" charset="-79"/>
                     <a:cs typeface="Futura Medium" panose="020B0602020204020303" pitchFamily="34" charset="-79"/>
                   </a:rPr>
-                  <a:t>, then select top </a:t>
+                  <a:t>Selection - select top </a:t>
                 </a:r>
                 <a14:m>
                   <m:oMath xmlns:m="http://schemas.openxmlformats.org/officeDocument/2006/math">
@@ -3541,13 +3532,28 @@
                     <a:latin typeface="Futura Medium" panose="020B0602020204020303" pitchFamily="34" charset="-79"/>
                     <a:cs typeface="Futura Medium" panose="020B0602020204020303" pitchFamily="34" charset="-79"/>
                   </a:rPr>
-                  <a:t>. </a:t>
+                  <a:t>.</a:t>
+                </a:r>
+              </a:p>
+              <a:p>
+                <a:pPr marL="342900" indent="-342900">
+                  <a:lnSpc>
+                    <a:spcPct val="200000"/>
+                  </a:lnSpc>
+                  <a:buAutoNum type="arabicPeriod"/>
+                </a:pPr>
+                <a:r>
+                  <a:rPr lang="en-US" sz="1400" dirty="0">
+                    <a:latin typeface="Futura Medium" panose="020B0602020204020303" pitchFamily="34" charset="-79"/>
+                    <a:cs typeface="Futura Medium" panose="020B0602020204020303" pitchFamily="34" charset="-79"/>
+                  </a:rPr>
+                  <a:t>Visualize – bin and plot.</a:t>
                 </a:r>
               </a:p>
             </p:txBody>
           </p:sp>
         </mc:Choice>
-        <mc:Fallback xmlns="">
+        <mc:Fallback>
           <p:sp>
             <p:nvSpPr>
               <p:cNvPr id="4" name="TextBox 3">
@@ -3564,8 +3570,8 @@
             </p:nvSpPr>
             <p:spPr>
               <a:xfrm>
-                <a:off x="451691" y="47989"/>
-                <a:ext cx="4516916" cy="1443472"/>
+                <a:off x="413399" y="828420"/>
+                <a:ext cx="5644309" cy="1062211"/>
               </a:xfrm>
               <a:prstGeom prst="rect">
                 <a:avLst/>
@@ -3573,7 +3579,7 @@
               <a:blipFill>
                 <a:blip r:embed="rId2"/>
                 <a:stretch>
-                  <a:fillRect l="-560" b="-4348"/>
+                  <a:fillRect l="-448"/>
                 </a:stretch>
               </a:blipFill>
             </p:spPr>
@@ -3594,6 +3600,3068 @@
       </mc:AlternateContent>
       <p:grpSp>
         <p:nvGrpSpPr>
+          <p:cNvPr id="10" name="Group 9">
+            <a:extLst>
+              <a:ext uri="{FF2B5EF4-FFF2-40B4-BE49-F238E27FC236}">
+                <a16:creationId xmlns:a16="http://schemas.microsoft.com/office/drawing/2014/main" id="{37749C4F-EE9C-B1EA-1134-44EC02293BA7}"/>
+              </a:ext>
+            </a:extLst>
+          </p:cNvPr>
+          <p:cNvGrpSpPr/>
+          <p:nvPr/>
+        </p:nvGrpSpPr>
+        <p:grpSpPr>
+          <a:xfrm>
+            <a:off x="327226" y="5113691"/>
+            <a:ext cx="4516916" cy="1651969"/>
+            <a:chOff x="6222694" y="1896492"/>
+            <a:chExt cx="3261913" cy="1573964"/>
+          </a:xfrm>
+        </p:grpSpPr>
+        <p:sp>
+          <p:nvSpPr>
+            <p:cNvPr id="8" name="TextBox 7">
+              <a:extLst>
+                <a:ext uri="{FF2B5EF4-FFF2-40B4-BE49-F238E27FC236}">
+                  <a16:creationId xmlns:a16="http://schemas.microsoft.com/office/drawing/2014/main" id="{A7736192-DD40-FDF1-097C-DDB6E6B0FEC8}"/>
+                </a:ext>
+              </a:extLst>
+            </p:cNvPr>
+            <p:cNvSpPr txBox="1"/>
+            <p:nvPr/>
+          </p:nvSpPr>
+          <p:spPr>
+            <a:xfrm>
+              <a:off x="6222694" y="1896492"/>
+              <a:ext cx="3261912" cy="263919"/>
+            </a:xfrm>
+            <a:prstGeom prst="rect">
+              <a:avLst/>
+            </a:prstGeom>
+            <a:noFill/>
+          </p:spPr>
+          <p:txBody>
+            <a:bodyPr wrap="square" rtlCol="0">
+              <a:spAutoFit/>
+            </a:bodyPr>
+            <a:lstStyle/>
+            <a:p>
+              <a:pPr algn="ctr"/>
+              <a:r>
+                <a:rPr lang="en-US" sz="1200" dirty="0">
+                  <a:solidFill>
+                    <a:srgbClr val="0432FF"/>
+                  </a:solidFill>
+                  <a:latin typeface="Futura Medium" panose="020B0602020204020303" pitchFamily="34" charset="-79"/>
+                  <a:cs typeface="Futura Medium" panose="020B0602020204020303" pitchFamily="34" charset="-79"/>
+                </a:rPr>
+                <a:t>Congestion Equation v1</a:t>
+              </a:r>
+              <a:endParaRPr lang="en-US" sz="1200" dirty="0">
+                <a:solidFill>
+                  <a:srgbClr val="0432FF"/>
+                </a:solidFill>
+              </a:endParaRPr>
+            </a:p>
+          </p:txBody>
+        </p:sp>
+        <mc:AlternateContent xmlns:mc="http://schemas.openxmlformats.org/markup-compatibility/2006">
+          <mc:Choice xmlns:a14="http://schemas.microsoft.com/office/drawing/2010/main" Requires="a14">
+            <p:sp>
+              <p:nvSpPr>
+                <p:cNvPr id="9" name="TextBox 8">
+                  <a:extLst>
+                    <a:ext uri="{FF2B5EF4-FFF2-40B4-BE49-F238E27FC236}">
+                      <a16:creationId xmlns:a16="http://schemas.microsoft.com/office/drawing/2014/main" id="{6A98D608-4F63-807E-D1C7-797CA0D726D8}"/>
+                    </a:ext>
+                  </a:extLst>
+                </p:cNvPr>
+                <p:cNvSpPr txBox="1"/>
+                <p:nvPr/>
+              </p:nvSpPr>
+              <p:spPr>
+                <a:xfrm>
+                  <a:off x="6222695" y="2107914"/>
+                  <a:ext cx="3261912" cy="1362542"/>
+                </a:xfrm>
+                <a:prstGeom prst="rect">
+                  <a:avLst/>
+                </a:prstGeom>
+                <a:noFill/>
+              </p:spPr>
+              <p:txBody>
+                <a:bodyPr wrap="square" rtlCol="0">
+                  <a:spAutoFit/>
+                </a:bodyPr>
+                <a:lstStyle/>
+                <a:p>
+                  <a14:m>
+                    <m:oMath xmlns:m="http://schemas.openxmlformats.org/officeDocument/2006/math">
+                      <m:d>
+                        <m:dPr>
+                          <m:ctrlPr>
+                            <a:rPr lang="en-US" sz="1200" b="0" i="1" dirty="0" smtClean="0">
+                              <a:latin typeface="Cambria Math" panose="02040503050406030204" pitchFamily="18" charset="0"/>
+                            </a:rPr>
+                          </m:ctrlPr>
+                        </m:dPr>
+                        <m:e>
+                          <m:r>
+                            <a:rPr lang="en-US" sz="1200" b="0" i="1" dirty="0" smtClean="0">
+                              <a:latin typeface="Cambria Math" panose="02040503050406030204" pitchFamily="18" charset="0"/>
+                            </a:rPr>
+                            <m:t>𝐵</m:t>
+                          </m:r>
+                          <m:r>
+                            <a:rPr lang="en-US" sz="1200" b="0" i="1" dirty="0" smtClean="0">
+                              <a:latin typeface="Cambria Math" panose="02040503050406030204" pitchFamily="18" charset="0"/>
+                            </a:rPr>
+                            <m:t>−</m:t>
+                          </m:r>
+                          <m:r>
+                            <a:rPr lang="en-US" sz="1200" b="0" i="1" dirty="0" smtClean="0">
+                              <a:latin typeface="Cambria Math" panose="02040503050406030204" pitchFamily="18" charset="0"/>
+                            </a:rPr>
+                            <m:t>𝐷</m:t>
+                          </m:r>
+                        </m:e>
+                      </m:d>
+                      <m:r>
+                        <a:rPr lang="en-US" sz="1200" b="0" i="1" dirty="0" smtClean="0">
+                          <a:latin typeface="Cambria Math" panose="02040503050406030204" pitchFamily="18" charset="0"/>
+                        </a:rPr>
+                        <m:t>=−</m:t>
+                      </m:r>
+                      <m:sSub>
+                        <m:sSubPr>
+                          <m:ctrlPr>
+                            <a:rPr lang="en-US" sz="1200" b="0" i="1" dirty="0" smtClean="0">
+                              <a:latin typeface="Cambria Math" panose="02040503050406030204" pitchFamily="18" charset="0"/>
+                            </a:rPr>
+                          </m:ctrlPr>
+                        </m:sSubPr>
+                        <m:e>
+                          <m:r>
+                            <a:rPr lang="en-US" sz="1200" b="0" i="1" dirty="0" smtClean="0">
+                              <a:latin typeface="Cambria Math" panose="02040503050406030204" pitchFamily="18" charset="0"/>
+                            </a:rPr>
+                            <m:t>𝐿</m:t>
+                          </m:r>
+                        </m:e>
+                        <m:sub>
+                          <m:r>
+                            <a:rPr lang="en-US" sz="1200" b="0" i="1" dirty="0" smtClean="0">
+                              <a:latin typeface="Cambria Math" panose="02040503050406030204" pitchFamily="18" charset="0"/>
+                            </a:rPr>
+                            <m:t>𝐶</m:t>
+                          </m:r>
+                        </m:sub>
+                      </m:sSub>
+                    </m:oMath>
+                  </a14:m>
+                  <a:r>
+                    <a:rPr lang="en-US" sz="1200" b="0" dirty="0"/>
+                    <a:t>  (congestion)</a:t>
+                  </a:r>
+                </a:p>
+                <a:p>
+                  <a:pPr/>
+                  <a14:m>
+                    <m:oMathPara xmlns:m="http://schemas.openxmlformats.org/officeDocument/2006/math">
+                      <m:oMathParaPr>
+                        <m:jc m:val="centerGroup"/>
+                      </m:oMathParaPr>
+                      <m:oMath xmlns:m="http://schemas.openxmlformats.org/officeDocument/2006/math">
+                        <m:sSub>
+                          <m:sSubPr>
+                            <m:ctrlPr>
+                              <a:rPr lang="en-US" sz="2000" b="0" i="1" smtClean="0">
+                                <a:solidFill>
+                                  <a:srgbClr val="9437FF"/>
+                                </a:solidFill>
+                                <a:latin typeface="Cambria Math" panose="02040503050406030204" pitchFamily="18" charset="0"/>
+                              </a:rPr>
+                            </m:ctrlPr>
+                          </m:sSubPr>
+                          <m:e>
+                            <m:r>
+                              <a:rPr lang="en-US" sz="2000" b="0" i="1" smtClean="0">
+                                <a:solidFill>
+                                  <a:srgbClr val="9437FF"/>
+                                </a:solidFill>
+                                <a:latin typeface="Cambria Math" panose="02040503050406030204" pitchFamily="18" charset="0"/>
+                              </a:rPr>
+                              <m:t>𝑆</m:t>
+                            </m:r>
+                          </m:e>
+                          <m:sub>
+                            <m:r>
+                              <a:rPr lang="en-US" sz="2000" b="0" i="1" smtClean="0">
+                                <a:solidFill>
+                                  <a:srgbClr val="9437FF"/>
+                                </a:solidFill>
+                                <a:latin typeface="Cambria Math" panose="02040503050406030204" pitchFamily="18" charset="0"/>
+                              </a:rPr>
+                              <m:t>𝑖</m:t>
+                            </m:r>
+                          </m:sub>
+                        </m:sSub>
+                        <m:r>
+                          <a:rPr lang="en-US" sz="2000" b="0" i="1" smtClean="0">
+                            <a:solidFill>
+                              <a:srgbClr val="9437FF"/>
+                            </a:solidFill>
+                            <a:latin typeface="Cambria Math" panose="02040503050406030204" pitchFamily="18" charset="0"/>
+                          </a:rPr>
+                          <m:t>=</m:t>
+                        </m:r>
+                        <m:sSub>
+                          <m:sSubPr>
+                            <m:ctrlPr>
+                              <a:rPr lang="en-US" sz="2000" b="0" i="1" smtClean="0">
+                                <a:solidFill>
+                                  <a:srgbClr val="9437FF"/>
+                                </a:solidFill>
+                                <a:latin typeface="Cambria Math" panose="02040503050406030204" pitchFamily="18" charset="0"/>
+                              </a:rPr>
+                            </m:ctrlPr>
+                          </m:sSubPr>
+                          <m:e>
+                            <m:r>
+                              <a:rPr lang="en-US" sz="2000" b="0" i="1" smtClean="0">
+                                <a:solidFill>
+                                  <a:srgbClr val="9437FF"/>
+                                </a:solidFill>
+                                <a:latin typeface="Cambria Math" panose="02040503050406030204" pitchFamily="18" charset="0"/>
+                              </a:rPr>
+                              <m:t>𝐴</m:t>
+                            </m:r>
+                          </m:e>
+                          <m:sub>
+                            <m:r>
+                              <a:rPr lang="en-US" sz="2000" b="0" i="1" smtClean="0">
+                                <a:solidFill>
+                                  <a:srgbClr val="9437FF"/>
+                                </a:solidFill>
+                                <a:latin typeface="Cambria Math" panose="02040503050406030204" pitchFamily="18" charset="0"/>
+                              </a:rPr>
+                              <m:t>𝑖</m:t>
+                            </m:r>
+                          </m:sub>
+                        </m:sSub>
+                        <m:r>
+                          <a:rPr lang="en-US" sz="2000" b="0" i="1" smtClean="0">
+                            <a:solidFill>
+                              <a:srgbClr val="9437FF"/>
+                            </a:solidFill>
+                            <a:latin typeface="Cambria Math" panose="02040503050406030204" pitchFamily="18" charset="0"/>
+                          </a:rPr>
+                          <m:t>−</m:t>
+                        </m:r>
+                        <m:r>
+                          <a:rPr lang="en-US" sz="2000" b="0" i="1" smtClean="0">
+                            <a:solidFill>
+                              <a:srgbClr val="9437FF"/>
+                            </a:solidFill>
+                            <a:latin typeface="Cambria Math" panose="02040503050406030204" pitchFamily="18" charset="0"/>
+                          </a:rPr>
+                          <m:t>𝜆</m:t>
+                        </m:r>
+                        <m:r>
+                          <a:rPr lang="en-US" sz="2000" b="0" i="1" smtClean="0">
+                            <a:solidFill>
+                              <a:srgbClr val="9437FF"/>
+                            </a:solidFill>
+                            <a:latin typeface="Cambria Math" panose="02040503050406030204" pitchFamily="18" charset="0"/>
+                          </a:rPr>
+                          <m:t> </m:t>
+                        </m:r>
+                        <m:sSub>
+                          <m:sSubPr>
+                            <m:ctrlPr>
+                              <a:rPr lang="en-US" sz="2000" b="0" i="1" smtClean="0">
+                                <a:solidFill>
+                                  <a:srgbClr val="9437FF"/>
+                                </a:solidFill>
+                                <a:latin typeface="Cambria Math" panose="02040503050406030204" pitchFamily="18" charset="0"/>
+                              </a:rPr>
+                            </m:ctrlPr>
+                          </m:sSubPr>
+                          <m:e>
+                            <m:r>
+                              <a:rPr lang="en-US" sz="2000" b="0" i="1" smtClean="0">
+                                <a:solidFill>
+                                  <a:srgbClr val="9437FF"/>
+                                </a:solidFill>
+                                <a:latin typeface="Cambria Math" panose="02040503050406030204" pitchFamily="18" charset="0"/>
+                              </a:rPr>
+                              <m:t>𝐿</m:t>
+                            </m:r>
+                          </m:e>
+                          <m:sub>
+                            <m:r>
+                              <a:rPr lang="en-US" sz="2000" b="0" i="1" smtClean="0">
+                                <a:solidFill>
+                                  <a:srgbClr val="9437FF"/>
+                                </a:solidFill>
+                                <a:latin typeface="Cambria Math" panose="02040503050406030204" pitchFamily="18" charset="0"/>
+                              </a:rPr>
+                              <m:t>𝐶</m:t>
+                            </m:r>
+                          </m:sub>
+                        </m:sSub>
+                      </m:oMath>
+                    </m:oMathPara>
+                  </a14:m>
+                  <a:endParaRPr lang="en-US" sz="1200" dirty="0"/>
+                </a:p>
+                <a:p>
+                  <a:r>
+                    <a:rPr lang="en-US" sz="1200" dirty="0"/>
+                    <a:t>Knockout (sim): </a:t>
+                  </a:r>
+                  <a14:m>
+                    <m:oMath xmlns:m="http://schemas.openxmlformats.org/officeDocument/2006/math">
+                      <m:r>
+                        <a:rPr lang="el-GR" sz="1200" i="1" dirty="0" smtClean="0">
+                          <a:latin typeface="Cambria Math" panose="02040503050406030204" pitchFamily="18" charset="0"/>
+                        </a:rPr>
+                        <m:t>𝜆</m:t>
+                      </m:r>
+                      <m:r>
+                        <a:rPr lang="el-GR" sz="1200" i="1" dirty="0" smtClean="0">
+                          <a:latin typeface="Cambria Math" panose="02040503050406030204" pitchFamily="18" charset="0"/>
+                        </a:rPr>
+                        <m:t> = 0 ⇒</m:t>
+                      </m:r>
+                      <m:sSub>
+                        <m:sSubPr>
+                          <m:ctrlPr>
+                            <a:rPr lang="en-US" sz="1200" b="0" i="1" dirty="0" smtClean="0">
+                              <a:latin typeface="Cambria Math" panose="02040503050406030204" pitchFamily="18" charset="0"/>
+                            </a:rPr>
+                          </m:ctrlPr>
+                        </m:sSubPr>
+                        <m:e>
+                          <m:r>
+                            <a:rPr lang="en-US" sz="1200" b="0" i="1" dirty="0" smtClean="0">
+                              <a:latin typeface="Cambria Math" panose="02040503050406030204" pitchFamily="18" charset="0"/>
+                            </a:rPr>
+                            <m:t>𝑆</m:t>
+                          </m:r>
+                        </m:e>
+                        <m:sub>
+                          <m:r>
+                            <a:rPr lang="en-US" sz="1200" b="0" i="1" dirty="0" smtClean="0">
+                              <a:latin typeface="Cambria Math" panose="02040503050406030204" pitchFamily="18" charset="0"/>
+                            </a:rPr>
+                            <m:t>𝑖</m:t>
+                          </m:r>
+                        </m:sub>
+                      </m:sSub>
+                      <m:r>
+                        <a:rPr lang="en-US" sz="1200" i="1" dirty="0">
+                          <a:latin typeface="Cambria Math" panose="02040503050406030204" pitchFamily="18" charset="0"/>
+                        </a:rPr>
+                        <m:t>=</m:t>
+                      </m:r>
+                      <m:sSub>
+                        <m:sSubPr>
+                          <m:ctrlPr>
+                            <a:rPr lang="en-US" sz="1200" b="0" i="1" dirty="0" smtClean="0">
+                              <a:latin typeface="Cambria Math" panose="02040503050406030204" pitchFamily="18" charset="0"/>
+                            </a:rPr>
+                          </m:ctrlPr>
+                        </m:sSubPr>
+                        <m:e>
+                          <m:r>
+                            <a:rPr lang="en-US" sz="1200" b="0" i="1" dirty="0" smtClean="0">
+                              <a:latin typeface="Cambria Math" panose="02040503050406030204" pitchFamily="18" charset="0"/>
+                            </a:rPr>
+                            <m:t>𝐴</m:t>
+                          </m:r>
+                        </m:e>
+                        <m:sub>
+                          <m:r>
+                            <a:rPr lang="en-US" sz="1200" b="0" i="1" dirty="0" smtClean="0">
+                              <a:latin typeface="Cambria Math" panose="02040503050406030204" pitchFamily="18" charset="0"/>
+                            </a:rPr>
+                            <m:t>𝑖</m:t>
+                          </m:r>
+                        </m:sub>
+                      </m:sSub>
+                    </m:oMath>
+                  </a14:m>
+                  <a:r>
+                    <a:rPr lang="en-US" sz="1200" dirty="0"/>
+                    <a:t> (congestion out of selection)</a:t>
+                  </a:r>
+                </a:p>
+                <a:p>
+                  <a14:m>
+                    <m:oMath xmlns:m="http://schemas.openxmlformats.org/officeDocument/2006/math">
+                      <m:sSub>
+                        <m:sSubPr>
+                          <m:ctrlPr>
+                            <a:rPr lang="en-US" sz="1200" b="0" i="1" smtClean="0">
+                              <a:latin typeface="Cambria Math" panose="02040503050406030204" pitchFamily="18" charset="0"/>
+                            </a:rPr>
+                          </m:ctrlPr>
+                        </m:sSubPr>
+                        <m:e>
+                          <m:r>
+                            <a:rPr lang="en-US" sz="1200" b="0" i="1" smtClean="0">
+                              <a:latin typeface="Cambria Math" panose="02040503050406030204" pitchFamily="18" charset="0"/>
+                            </a:rPr>
+                            <m:t>𝐿</m:t>
+                          </m:r>
+                        </m:e>
+                        <m:sub>
+                          <m:r>
+                            <a:rPr lang="en-US" sz="1200" b="0" i="1" smtClean="0">
+                              <a:latin typeface="Cambria Math" panose="02040503050406030204" pitchFamily="18" charset="0"/>
+                            </a:rPr>
+                            <m:t>𝐶</m:t>
+                          </m:r>
+                        </m:sub>
+                      </m:sSub>
+                      <m:r>
+                        <a:rPr lang="en-US" sz="1200" b="0" i="1" smtClean="0">
+                          <a:latin typeface="Cambria Math" panose="02040503050406030204" pitchFamily="18" charset="0"/>
+                        </a:rPr>
+                        <m:t> </m:t>
+                      </m:r>
+                    </m:oMath>
+                  </a14:m>
+                  <a:r>
+                    <a:rPr lang="en-US" sz="1200" dirty="0"/>
+                    <a:t>(hard) </a:t>
+                  </a:r>
+                  <a14:m>
+                    <m:oMath xmlns:m="http://schemas.openxmlformats.org/officeDocument/2006/math">
+                      <m:r>
+                        <a:rPr lang="en-US" sz="1200" i="1" dirty="0" smtClean="0">
+                          <a:latin typeface="Cambria Math" panose="02040503050406030204" pitchFamily="18" charset="0"/>
+                        </a:rPr>
+                        <m:t>→</m:t>
+                      </m:r>
+                    </m:oMath>
+                  </a14:m>
+                  <a:r>
+                    <a:rPr lang="en-US" sz="1200" dirty="0"/>
+                    <a:t> count with </a:t>
+                  </a:r>
+                  <a14:m>
+                    <m:oMath xmlns:m="http://schemas.openxmlformats.org/officeDocument/2006/math">
+                      <m:sSub>
+                        <m:sSubPr>
+                          <m:ctrlPr>
+                            <a:rPr lang="en-US" sz="1200" i="1" dirty="0" smtClean="0">
+                              <a:latin typeface="Cambria Math" panose="02040503050406030204" pitchFamily="18" charset="0"/>
+                            </a:rPr>
+                          </m:ctrlPr>
+                        </m:sSubPr>
+                        <m:e>
+                          <m:r>
+                            <a:rPr lang="en-US" sz="1200" i="1" dirty="0" smtClean="0">
+                              <a:latin typeface="Cambria Math" panose="02040503050406030204" pitchFamily="18" charset="0"/>
+                            </a:rPr>
+                            <m:t>𝐴</m:t>
+                          </m:r>
+                        </m:e>
+                        <m:sub>
+                          <m:r>
+                            <a:rPr lang="en-US" sz="1200" i="1" dirty="0" smtClean="0">
+                              <a:latin typeface="Cambria Math" panose="02040503050406030204" pitchFamily="18" charset="0"/>
+                            </a:rPr>
+                            <m:t>𝑗</m:t>
+                          </m:r>
+                        </m:sub>
+                      </m:sSub>
+                      <m:r>
+                        <a:rPr lang="en-US" sz="1200" b="0" i="1" smtClean="0">
+                          <a:latin typeface="Cambria Math" panose="02040503050406030204" pitchFamily="18" charset="0"/>
+                        </a:rPr>
+                        <m:t>&gt;</m:t>
+                      </m:r>
+                      <m:r>
+                        <a:rPr lang="en-US" sz="1200" b="0" i="1" smtClean="0">
+                          <a:latin typeface="Cambria Math" panose="02040503050406030204" pitchFamily="18" charset="0"/>
+                        </a:rPr>
+                        <m:t>𝜃</m:t>
+                      </m:r>
+                    </m:oMath>
+                  </a14:m>
+                  <a:endParaRPr lang="en-US" sz="1200" dirty="0"/>
+                </a:p>
+                <a:p>
+                  <a:r>
+                    <a:rPr lang="en-US" sz="1200" dirty="0"/>
+                    <a:t> </a:t>
+                  </a:r>
+                  <a14:m>
+                    <m:oMath xmlns:m="http://schemas.openxmlformats.org/officeDocument/2006/math">
+                      <m:r>
+                        <a:rPr lang="en-US" sz="1200" i="1" dirty="0" smtClean="0">
+                          <a:latin typeface="Cambria Math" panose="02040503050406030204" pitchFamily="18" charset="0"/>
+                        </a:rPr>
+                        <m:t>𝜃</m:t>
+                      </m:r>
+                      <m:r>
+                        <a:rPr lang="en-US" sz="1200" i="1" dirty="0" smtClean="0">
+                          <a:latin typeface="Cambria Math" panose="02040503050406030204" pitchFamily="18" charset="0"/>
+                        </a:rPr>
+                        <m:t>=</m:t>
+                      </m:r>
+                      <m:func>
+                        <m:funcPr>
+                          <m:ctrlPr>
+                            <a:rPr lang="en-US" sz="1200" i="1" dirty="0" smtClean="0">
+                              <a:latin typeface="Cambria Math" panose="02040503050406030204" pitchFamily="18" charset="0"/>
+                            </a:rPr>
+                          </m:ctrlPr>
+                        </m:funcPr>
+                        <m:fName>
+                          <m:r>
+                            <m:rPr>
+                              <m:sty m:val="p"/>
+                            </m:rPr>
+                            <a:rPr lang="en-US" sz="1200" i="1" dirty="0" smtClean="0">
+                              <a:latin typeface="Cambria Math" panose="02040503050406030204" pitchFamily="18" charset="0"/>
+                            </a:rPr>
+                            <m:t>med</m:t>
+                          </m:r>
+                        </m:fName>
+                        <m:e>
+                          <m:d>
+                            <m:dPr>
+                              <m:ctrlPr>
+                                <a:rPr lang="en-US" sz="1200" i="1" dirty="0" smtClean="0">
+                                  <a:latin typeface="Cambria Math" panose="02040503050406030204" pitchFamily="18" charset="0"/>
+                                </a:rPr>
+                              </m:ctrlPr>
+                            </m:dPr>
+                            <m:e>
+                              <m:sSub>
+                                <m:sSubPr>
+                                  <m:ctrlPr>
+                                    <a:rPr lang="en-US" sz="1200" i="1" dirty="0" smtClean="0">
+                                      <a:latin typeface="Cambria Math" panose="02040503050406030204" pitchFamily="18" charset="0"/>
+                                    </a:rPr>
+                                  </m:ctrlPr>
+                                </m:sSubPr>
+                                <m:e>
+                                  <m:r>
+                                    <m:rPr>
+                                      <m:nor/>
+                                    </m:rPr>
+                                    <a:rPr lang="en-US" sz="1200" b="0" i="0" dirty="0" smtClean="0">
+                                      <a:latin typeface="Cambria Math" panose="02040503050406030204" pitchFamily="18" charset="0"/>
+                                    </a:rPr>
+                                    <m:t>A</m:t>
+                                  </m:r>
+                                </m:e>
+                                <m:sub>
+                                  <m:r>
+                                    <a:rPr lang="en-US" sz="1200" i="1" dirty="0" smtClean="0">
+                                      <a:latin typeface="Cambria Math" panose="02040503050406030204" pitchFamily="18" charset="0"/>
+                                    </a:rPr>
+                                    <m:t>𝑖</m:t>
+                                  </m:r>
+                                </m:sub>
+                              </m:sSub>
+                              <m:r>
+                                <a:rPr lang="en-US" sz="1200" i="1" dirty="0" smtClean="0">
+                                  <a:latin typeface="Cambria Math" panose="02040503050406030204" pitchFamily="18" charset="0"/>
+                                </a:rPr>
+                                <m:t>∣</m:t>
+                              </m:r>
+                              <m:sSub>
+                                <m:sSubPr>
+                                  <m:ctrlPr>
+                                    <a:rPr lang="en-US" sz="1200" b="0" i="1" dirty="0" smtClean="0">
+                                      <a:latin typeface="Cambria Math" panose="02040503050406030204" pitchFamily="18" charset="0"/>
+                                    </a:rPr>
+                                  </m:ctrlPr>
+                                </m:sSubPr>
+                                <m:e>
+                                  <m:r>
+                                    <a:rPr lang="en-US" sz="1200" b="0" i="1" dirty="0" smtClean="0">
+                                      <a:latin typeface="Cambria Math" panose="02040503050406030204" pitchFamily="18" charset="0"/>
+                                    </a:rPr>
+                                    <m:t>𝑌</m:t>
+                                  </m:r>
+                                </m:e>
+                                <m:sub>
+                                  <m:r>
+                                    <a:rPr lang="en-US" sz="1200" b="0" i="1" dirty="0" smtClean="0">
+                                      <a:latin typeface="Cambria Math" panose="02040503050406030204" pitchFamily="18" charset="0"/>
+                                    </a:rPr>
+                                    <m:t>𝑖</m:t>
+                                  </m:r>
+                                </m:sub>
+                              </m:sSub>
+                              <m:r>
+                                <a:rPr lang="en-US" sz="1200" i="1" dirty="0" smtClean="0">
+                                  <a:latin typeface="Cambria Math" panose="02040503050406030204" pitchFamily="18" charset="0"/>
+                                </a:rPr>
+                                <m:t>=1</m:t>
+                              </m:r>
+                            </m:e>
+                          </m:d>
+                        </m:e>
+                      </m:func>
+                    </m:oMath>
+                  </a14:m>
+                  <a:endParaRPr lang="en-US" sz="1200" dirty="0"/>
+                </a:p>
+                <a:p>
+                  <a:r>
+                    <a:rPr lang="en-US" sz="1200" dirty="0"/>
+                    <a:t> </a:t>
+                  </a:r>
+                  <a14:m>
+                    <m:oMath xmlns:m="http://schemas.openxmlformats.org/officeDocument/2006/math">
+                      <m:sSub>
+                        <m:sSubPr>
+                          <m:ctrlPr>
+                            <a:rPr lang="en-US" sz="1200" i="1" dirty="0" smtClean="0">
+                              <a:latin typeface="Cambria Math" panose="02040503050406030204" pitchFamily="18" charset="0"/>
+                            </a:rPr>
+                          </m:ctrlPr>
+                        </m:sSubPr>
+                        <m:e>
+                          <m:r>
+                            <a:rPr lang="en-US" sz="1200" i="1" dirty="0" smtClean="0">
+                              <a:latin typeface="Cambria Math" panose="02040503050406030204" pitchFamily="18" charset="0"/>
+                            </a:rPr>
+                            <m:t>𝐿</m:t>
+                          </m:r>
+                        </m:e>
+                        <m:sub>
+                          <m:r>
+                            <a:rPr lang="en-US" sz="1200" i="1" dirty="0" smtClean="0">
+                              <a:latin typeface="Cambria Math" panose="02040503050406030204" pitchFamily="18" charset="0"/>
+                            </a:rPr>
+                            <m:t>𝐶</m:t>
+                          </m:r>
+                        </m:sub>
+                      </m:sSub>
+                    </m:oMath>
+                  </a14:m>
+                  <a:r>
+                    <a:rPr lang="en-US" sz="1200" dirty="0"/>
+                    <a:t> (smooth, sim default) </a:t>
+                  </a:r>
+                  <a14:m>
+                    <m:oMath xmlns:m="http://schemas.openxmlformats.org/officeDocument/2006/math">
+                      <m:r>
+                        <a:rPr lang="en-US" sz="1200" i="1" dirty="0" smtClean="0">
+                          <a:latin typeface="Cambria Math" panose="02040503050406030204" pitchFamily="18" charset="0"/>
+                        </a:rPr>
+                        <m:t>→</m:t>
+                      </m:r>
+                    </m:oMath>
+                  </a14:m>
+                  <a:r>
+                    <a:rPr lang="en-US" sz="1200" dirty="0"/>
+                    <a:t>  LOO mean of </a:t>
+                  </a:r>
+                  <a14:m>
+                    <m:oMath xmlns:m="http://schemas.openxmlformats.org/officeDocument/2006/math">
+                      <m:r>
+                        <a:rPr lang="en-US" sz="1200" i="1" dirty="0" smtClean="0">
+                          <a:latin typeface="Cambria Math" panose="02040503050406030204" pitchFamily="18" charset="0"/>
+                        </a:rPr>
+                        <m:t>𝜎</m:t>
+                      </m:r>
+                      <m:d>
+                        <m:dPr>
+                          <m:ctrlPr>
+                            <a:rPr lang="en-US" sz="1200" i="1" dirty="0" smtClean="0">
+                              <a:latin typeface="Cambria Math" panose="02040503050406030204" pitchFamily="18" charset="0"/>
+                            </a:rPr>
+                          </m:ctrlPr>
+                        </m:dPr>
+                        <m:e>
+                          <m:r>
+                            <a:rPr lang="en-US" sz="1200" i="1" dirty="0" smtClean="0">
+                              <a:latin typeface="Cambria Math" panose="02040503050406030204" pitchFamily="18" charset="0"/>
+                            </a:rPr>
+                            <m:t>𝛾</m:t>
+                          </m:r>
+                          <m:d>
+                            <m:dPr>
+                              <m:ctrlPr>
+                                <a:rPr lang="en-US" sz="1200" i="1" dirty="0" smtClean="0">
+                                  <a:latin typeface="Cambria Math" panose="02040503050406030204" pitchFamily="18" charset="0"/>
+                                </a:rPr>
+                              </m:ctrlPr>
+                            </m:dPr>
+                            <m:e>
+                              <m:sSub>
+                                <m:sSubPr>
+                                  <m:ctrlPr>
+                                    <a:rPr lang="en-US" sz="1200" b="0" i="1" dirty="0" smtClean="0">
+                                      <a:latin typeface="Cambria Math" panose="02040503050406030204" pitchFamily="18" charset="0"/>
+                                    </a:rPr>
+                                  </m:ctrlPr>
+                                </m:sSubPr>
+                                <m:e>
+                                  <m:r>
+                                    <a:rPr lang="en-US" sz="1200" b="0" i="1" dirty="0" smtClean="0">
+                                      <a:latin typeface="Cambria Math" panose="02040503050406030204" pitchFamily="18" charset="0"/>
+                                    </a:rPr>
+                                    <m:t>𝐴</m:t>
+                                  </m:r>
+                                </m:e>
+                                <m:sub>
+                                  <m:r>
+                                    <a:rPr lang="en-US" sz="1200" b="0" i="1" dirty="0" smtClean="0">
+                                      <a:latin typeface="Cambria Math" panose="02040503050406030204" pitchFamily="18" charset="0"/>
+                                    </a:rPr>
+                                    <m:t>𝑗</m:t>
+                                  </m:r>
+                                </m:sub>
+                              </m:sSub>
+                              <m:r>
+                                <a:rPr lang="en-US" sz="1200" i="1" dirty="0" smtClean="0">
+                                  <a:latin typeface="Cambria Math" panose="02040503050406030204" pitchFamily="18" charset="0"/>
+                                </a:rPr>
+                                <m:t>−</m:t>
+                              </m:r>
+                              <m:r>
+                                <a:rPr lang="en-US" sz="1200" i="1" dirty="0">
+                                  <a:latin typeface="Cambria Math" panose="02040503050406030204" pitchFamily="18" charset="0"/>
+                                </a:rPr>
+                                <m:t>𝜃</m:t>
+                              </m:r>
+                            </m:e>
+                          </m:d>
+                        </m:e>
+                      </m:d>
+                    </m:oMath>
+                  </a14:m>
+                  <a:r>
+                    <a:rPr lang="en-US" sz="1200" dirty="0"/>
+                    <a:t>  </a:t>
+                  </a:r>
+                  <a14:m>
+                    <m:oMath xmlns:m="http://schemas.openxmlformats.org/officeDocument/2006/math">
+                      <m:r>
+                        <a:rPr lang="en-US" sz="1200" i="1" dirty="0" smtClean="0">
+                          <a:latin typeface="Cambria Math" panose="02040503050406030204" pitchFamily="18" charset="0"/>
+                        </a:rPr>
+                        <m:t>𝑗</m:t>
+                      </m:r>
+                      <m:r>
+                        <a:rPr lang="en-US" sz="1200" i="1" dirty="0">
+                          <a:latin typeface="Cambria Math" panose="02040503050406030204" pitchFamily="18" charset="0"/>
+                          <a:ea typeface="Cambria Math" panose="02040503050406030204" pitchFamily="18" charset="0"/>
+                        </a:rPr>
+                        <m:t>≠</m:t>
+                      </m:r>
+                      <m:r>
+                        <a:rPr lang="en-US" sz="1200" b="0" i="1" dirty="0" smtClean="0">
+                          <a:latin typeface="Cambria Math" panose="02040503050406030204" pitchFamily="18" charset="0"/>
+                        </a:rPr>
+                        <m:t>𝑖</m:t>
+                      </m:r>
+                    </m:oMath>
+                  </a14:m>
+                  <a:endParaRPr lang="en-US" sz="1200" dirty="0"/>
+                </a:p>
+              </p:txBody>
+            </p:sp>
+          </mc:Choice>
+          <mc:Fallback>
+            <p:sp>
+              <p:nvSpPr>
+                <p:cNvPr id="9" name="TextBox 8">
+                  <a:extLst>
+                    <a:ext uri="{FF2B5EF4-FFF2-40B4-BE49-F238E27FC236}">
+                      <a16:creationId xmlns:a16="http://schemas.microsoft.com/office/drawing/2014/main" id="{6A98D608-4F63-807E-D1C7-797CA0D726D8}"/>
+                    </a:ext>
+                  </a:extLst>
+                </p:cNvPr>
+                <p:cNvSpPr txBox="1">
+                  <a:spLocks noRot="1" noChangeAspect="1" noMove="1" noResize="1" noEditPoints="1" noAdjustHandles="1" noChangeArrowheads="1" noChangeShapeType="1" noTextEdit="1"/>
+                </p:cNvSpPr>
+                <p:nvPr/>
+              </p:nvSpPr>
+              <p:spPr>
+                <a:xfrm>
+                  <a:off x="6222695" y="2107914"/>
+                  <a:ext cx="3261912" cy="1362542"/>
+                </a:xfrm>
+                <a:prstGeom prst="rect">
+                  <a:avLst/>
+                </a:prstGeom>
+                <a:blipFill>
+                  <a:blip r:embed="rId3"/>
+                  <a:stretch>
+                    <a:fillRect/>
+                  </a:stretch>
+                </a:blipFill>
+              </p:spPr>
+              <p:txBody>
+                <a:bodyPr/>
+                <a:lstStyle/>
+                <a:p>
+                  <a:r>
+                    <a:rPr lang="en-US">
+                      <a:noFill/>
+                    </a:rPr>
+                    <a:t> </a:t>
+                  </a:r>
+                </a:p>
+              </p:txBody>
+            </p:sp>
+          </mc:Fallback>
+        </mc:AlternateContent>
+      </p:grpSp>
+      <p:sp>
+        <p:nvSpPr>
+          <p:cNvPr id="14" name="TextBox 13">
+            <a:extLst>
+              <a:ext uri="{FF2B5EF4-FFF2-40B4-BE49-F238E27FC236}">
+                <a16:creationId xmlns:a16="http://schemas.microsoft.com/office/drawing/2014/main" id="{3CC208B5-EB39-7B80-C198-C8E98A540F97}"/>
+              </a:ext>
+            </a:extLst>
+          </p:cNvPr>
+          <p:cNvSpPr txBox="1"/>
+          <p:nvPr/>
+        </p:nvSpPr>
+        <p:spPr>
+          <a:xfrm>
+            <a:off x="308113" y="2001582"/>
+            <a:ext cx="3865106" cy="307777"/>
+          </a:xfrm>
+          <a:prstGeom prst="rect">
+            <a:avLst/>
+          </a:prstGeom>
+          <a:noFill/>
+        </p:spPr>
+        <p:txBody>
+          <a:bodyPr wrap="square" rtlCol="0">
+            <a:spAutoFit/>
+          </a:bodyPr>
+          <a:lstStyle/>
+          <a:p>
+            <a:r>
+              <a:rPr lang="en-US" sz="1400" dirty="0">
+                <a:solidFill>
+                  <a:srgbClr val="0432FF"/>
+                </a:solidFill>
+                <a:latin typeface="Futura Medium" panose="020B0602020204020303" pitchFamily="34" charset="-79"/>
+                <a:cs typeface="Futura Medium" panose="020B0602020204020303" pitchFamily="34" charset="-79"/>
+              </a:rPr>
+              <a:t>1. Soft Assignment</a:t>
+            </a:r>
+            <a:endParaRPr lang="en-US" sz="1400" dirty="0">
+              <a:solidFill>
+                <a:srgbClr val="0432FF"/>
+              </a:solidFill>
+            </a:endParaRPr>
+          </a:p>
+        </p:txBody>
+      </p:sp>
+      <p:sp>
+        <p:nvSpPr>
+          <p:cNvPr id="27" name="TextBox 26">
+            <a:extLst>
+              <a:ext uri="{FF2B5EF4-FFF2-40B4-BE49-F238E27FC236}">
+                <a16:creationId xmlns:a16="http://schemas.microsoft.com/office/drawing/2014/main" id="{21469F68-CAA9-E49D-F6C1-5CFDC19B2386}"/>
+              </a:ext>
+            </a:extLst>
+          </p:cNvPr>
+          <p:cNvSpPr txBox="1"/>
+          <p:nvPr/>
+        </p:nvSpPr>
+        <p:spPr>
+          <a:xfrm>
+            <a:off x="1498888" y="307119"/>
+            <a:ext cx="3473331" cy="646331"/>
+          </a:xfrm>
+          <a:prstGeom prst="rect">
+            <a:avLst/>
+          </a:prstGeom>
+          <a:noFill/>
+        </p:spPr>
+        <p:txBody>
+          <a:bodyPr wrap="square" rtlCol="0">
+            <a:spAutoFit/>
+          </a:bodyPr>
+          <a:lstStyle/>
+          <a:p>
+            <a:r>
+              <a:rPr lang="en-US" dirty="0">
+                <a:solidFill>
+                  <a:srgbClr val="0432FF"/>
+                </a:solidFill>
+                <a:latin typeface="Futura Medium" panose="020B0602020204020303" pitchFamily="34" charset="-79"/>
+                <a:cs typeface="Futura Medium" panose="020B0602020204020303" pitchFamily="34" charset="-79"/>
+              </a:rPr>
+              <a:t>MODEL FOUR STEP PROCESS:</a:t>
+            </a:r>
+          </a:p>
+          <a:p>
+            <a:endParaRPr lang="en-US" dirty="0"/>
+          </a:p>
+        </p:txBody>
+      </p:sp>
+      <p:grpSp>
+        <p:nvGrpSpPr>
+          <p:cNvPr id="49" name="Group 48">
+            <a:extLst>
+              <a:ext uri="{FF2B5EF4-FFF2-40B4-BE49-F238E27FC236}">
+                <a16:creationId xmlns:a16="http://schemas.microsoft.com/office/drawing/2014/main" id="{32C98397-F41D-C757-7DD0-297ADAF9D84A}"/>
+              </a:ext>
+            </a:extLst>
+          </p:cNvPr>
+          <p:cNvGrpSpPr/>
+          <p:nvPr/>
+        </p:nvGrpSpPr>
+        <p:grpSpPr>
+          <a:xfrm>
+            <a:off x="5739323" y="3112649"/>
+            <a:ext cx="5821260" cy="2762104"/>
+            <a:chOff x="5896486" y="1893636"/>
+            <a:chExt cx="5821260" cy="2762104"/>
+          </a:xfrm>
+        </p:grpSpPr>
+        <p:sp>
+          <p:nvSpPr>
+            <p:cNvPr id="30" name="TextBox 29">
+              <a:extLst>
+                <a:ext uri="{FF2B5EF4-FFF2-40B4-BE49-F238E27FC236}">
+                  <a16:creationId xmlns:a16="http://schemas.microsoft.com/office/drawing/2014/main" id="{301A9E92-5C9D-BCD7-C6C5-E0DA529B171F}"/>
+                </a:ext>
+              </a:extLst>
+            </p:cNvPr>
+            <p:cNvSpPr txBox="1"/>
+            <p:nvPr/>
+          </p:nvSpPr>
+          <p:spPr>
+            <a:xfrm>
+              <a:off x="5896486" y="1893636"/>
+              <a:ext cx="4536028" cy="307776"/>
+            </a:xfrm>
+            <a:prstGeom prst="rect">
+              <a:avLst/>
+            </a:prstGeom>
+            <a:noFill/>
+          </p:spPr>
+          <p:txBody>
+            <a:bodyPr wrap="square" rtlCol="0">
+              <a:spAutoFit/>
+            </a:bodyPr>
+            <a:lstStyle/>
+            <a:p>
+              <a:r>
+                <a:rPr lang="en-US" sz="1400" dirty="0">
+                  <a:solidFill>
+                    <a:srgbClr val="0432FF"/>
+                  </a:solidFill>
+                  <a:latin typeface="Futura Medium" panose="020B0602020204020303" pitchFamily="34" charset="-79"/>
+                  <a:cs typeface="Futura Medium" panose="020B0602020204020303" pitchFamily="34" charset="-79"/>
+                </a:rPr>
+                <a:t>4. Visualize</a:t>
+              </a:r>
+              <a:endParaRPr lang="en-US" sz="1400" dirty="0">
+                <a:solidFill>
+                  <a:srgbClr val="0432FF"/>
+                </a:solidFill>
+              </a:endParaRPr>
+            </a:p>
+          </p:txBody>
+        </p:sp>
+        <p:grpSp>
+          <p:nvGrpSpPr>
+            <p:cNvPr id="48" name="Group 47">
+              <a:extLst>
+                <a:ext uri="{FF2B5EF4-FFF2-40B4-BE49-F238E27FC236}">
+                  <a16:creationId xmlns:a16="http://schemas.microsoft.com/office/drawing/2014/main" id="{CDA24237-A28E-D2A3-9F28-712E70DD479A}"/>
+                </a:ext>
+              </a:extLst>
+            </p:cNvPr>
+            <p:cNvGrpSpPr/>
+            <p:nvPr/>
+          </p:nvGrpSpPr>
+          <p:grpSpPr>
+            <a:xfrm>
+              <a:off x="6012815" y="2135929"/>
+              <a:ext cx="5704931" cy="2519811"/>
+              <a:chOff x="6012815" y="2135929"/>
+              <a:chExt cx="5704931" cy="2519811"/>
+            </a:xfrm>
+          </p:grpSpPr>
+          <p:sp>
+            <p:nvSpPr>
+              <p:cNvPr id="37" name="TextBox 36">
+                <a:extLst>
+                  <a:ext uri="{FF2B5EF4-FFF2-40B4-BE49-F238E27FC236}">
+                    <a16:creationId xmlns:a16="http://schemas.microsoft.com/office/drawing/2014/main" id="{32F7F6AD-3FF6-6C6F-0329-C3D9E58FA597}"/>
+                  </a:ext>
+                </a:extLst>
+              </p:cNvPr>
+              <p:cNvSpPr txBox="1"/>
+              <p:nvPr/>
+            </p:nvSpPr>
+            <p:spPr>
+              <a:xfrm>
+                <a:off x="7838076" y="2135929"/>
+                <a:ext cx="1921873" cy="292388"/>
+              </a:xfrm>
+              <a:prstGeom prst="rect">
+                <a:avLst/>
+              </a:prstGeom>
+              <a:noFill/>
+            </p:spPr>
+            <p:txBody>
+              <a:bodyPr wrap="none" rtlCol="0">
+                <a:spAutoFit/>
+              </a:bodyPr>
+              <a:lstStyle/>
+              <a:p>
+                <a:pPr algn="ctr"/>
+                <a:r>
+                  <a:rPr lang="en-US" sz="1300" dirty="0">
+                    <a:solidFill>
+                      <a:srgbClr val="0432FF"/>
+                    </a:solidFill>
+                    <a:latin typeface="Futura Medium" panose="020B0602020204020303" pitchFamily="34" charset="-79"/>
+                    <a:cs typeface="Futura Medium" panose="020B0602020204020303" pitchFamily="34" charset="-79"/>
+                  </a:rPr>
+                  <a:t>TALENT vs SELECTION</a:t>
+                </a:r>
+              </a:p>
+            </p:txBody>
+          </p:sp>
+          <p:grpSp>
+            <p:nvGrpSpPr>
+              <p:cNvPr id="47" name="Group 46">
+                <a:extLst>
+                  <a:ext uri="{FF2B5EF4-FFF2-40B4-BE49-F238E27FC236}">
+                    <a16:creationId xmlns:a16="http://schemas.microsoft.com/office/drawing/2014/main" id="{535A64FD-CCE0-2EBD-8861-BAE439E7A4CA}"/>
+                  </a:ext>
+                </a:extLst>
+              </p:cNvPr>
+              <p:cNvGrpSpPr/>
+              <p:nvPr/>
+            </p:nvGrpSpPr>
+            <p:grpSpPr>
+              <a:xfrm>
+                <a:off x="6012815" y="4103742"/>
+                <a:ext cx="5704931" cy="551998"/>
+                <a:chOff x="6096000" y="2274932"/>
+                <a:chExt cx="5704931" cy="551998"/>
+              </a:xfrm>
+            </p:grpSpPr>
+            <p:sp>
+              <p:nvSpPr>
+                <p:cNvPr id="3" name="TextBox 2">
+                  <a:extLst>
+                    <a:ext uri="{FF2B5EF4-FFF2-40B4-BE49-F238E27FC236}">
+                      <a16:creationId xmlns:a16="http://schemas.microsoft.com/office/drawing/2014/main" id="{580F20F0-942E-865E-0CF4-8CDD18DA42FD}"/>
+                    </a:ext>
+                  </a:extLst>
+                </p:cNvPr>
+                <p:cNvSpPr txBox="1"/>
+                <p:nvPr/>
+              </p:nvSpPr>
+              <p:spPr>
+                <a:xfrm>
+                  <a:off x="6096000" y="2274932"/>
+                  <a:ext cx="5704931" cy="292388"/>
+                </a:xfrm>
+                <a:prstGeom prst="rect">
+                  <a:avLst/>
+                </a:prstGeom>
+                <a:noFill/>
+              </p:spPr>
+              <p:txBody>
+                <a:bodyPr wrap="square" rtlCol="0">
+                  <a:spAutoFit/>
+                </a:bodyPr>
+                <a:lstStyle/>
+                <a:p>
+                  <a:pPr algn="ctr"/>
+                  <a:r>
+                    <a:rPr lang="en-US" sz="1300" dirty="0">
+                      <a:solidFill>
+                        <a:srgbClr val="0432FF"/>
+                      </a:solidFill>
+                      <a:latin typeface="Futura Medium" panose="020B0602020204020303" pitchFamily="34" charset="-79"/>
+                      <a:cs typeface="Futura Medium" panose="020B0602020204020303" pitchFamily="34" charset="-79"/>
+                    </a:rPr>
+                    <a:t>Empirical (real panel)</a:t>
+                  </a:r>
+                </a:p>
+              </p:txBody>
+            </p:sp>
+            <mc:AlternateContent xmlns:mc="http://schemas.openxmlformats.org/markup-compatibility/2006">
+              <mc:Choice xmlns:a14="http://schemas.microsoft.com/office/drawing/2010/main" Requires="a14">
+                <p:sp>
+                  <p:nvSpPr>
+                    <p:cNvPr id="7" name="TextBox 6">
+                      <a:extLst>
+                        <a:ext uri="{FF2B5EF4-FFF2-40B4-BE49-F238E27FC236}">
+                          <a16:creationId xmlns:a16="http://schemas.microsoft.com/office/drawing/2014/main" id="{0B77B650-C396-DEF6-5A33-8DB93D5652B9}"/>
+                        </a:ext>
+                      </a:extLst>
+                    </p:cNvPr>
+                    <p:cNvSpPr txBox="1"/>
+                    <p:nvPr/>
+                  </p:nvSpPr>
+                  <p:spPr>
+                    <a:xfrm>
+                      <a:off x="6096000" y="2485170"/>
+                      <a:ext cx="5704931" cy="341760"/>
+                    </a:xfrm>
+                    <a:prstGeom prst="rect">
+                      <a:avLst/>
+                    </a:prstGeom>
+                    <a:noFill/>
+                  </p:spPr>
+                  <p:txBody>
+                    <a:bodyPr wrap="square" rtlCol="0">
+                      <a:spAutoFit/>
+                    </a:bodyPr>
+                    <a:lstStyle/>
+                    <a:p>
+                      <a:pPr>
+                        <a:lnSpc>
+                          <a:spcPct val="150000"/>
+                        </a:lnSpc>
+                      </a:pPr>
+                      <a:r>
+                        <a:rPr lang="en-US" sz="1200" b="0" dirty="0"/>
+                        <a:t>Naïve: </a:t>
+                      </a:r>
+                      <a14:m>
+                        <m:oMath xmlns:m="http://schemas.openxmlformats.org/officeDocument/2006/math">
+                          <m:r>
+                            <a:rPr lang="en-US" sz="1200" b="0" i="1" dirty="0" smtClean="0">
+                              <a:latin typeface="Cambria Math" panose="02040503050406030204" pitchFamily="18" charset="0"/>
+                            </a:rPr>
+                            <m:t>𝑃</m:t>
+                          </m:r>
+                          <m:d>
+                            <m:dPr>
+                              <m:ctrlPr>
+                                <a:rPr lang="en-US" sz="1200" b="0" i="1" dirty="0" smtClean="0">
+                                  <a:latin typeface="Cambria Math" panose="02040503050406030204" pitchFamily="18" charset="0"/>
+                                </a:rPr>
+                              </m:ctrlPr>
+                            </m:dPr>
+                            <m:e>
+                              <m:sSub>
+                                <m:sSubPr>
+                                  <m:ctrlPr>
+                                    <a:rPr lang="en-US" sz="1200" b="0" i="1" dirty="0" smtClean="0">
+                                      <a:latin typeface="Cambria Math" panose="02040503050406030204" pitchFamily="18" charset="0"/>
+                                    </a:rPr>
+                                  </m:ctrlPr>
+                                </m:sSubPr>
+                                <m:e>
+                                  <m:r>
+                                    <a:rPr lang="en-US" sz="1200" b="0" i="1" dirty="0" smtClean="0">
+                                      <a:latin typeface="Cambria Math" panose="02040503050406030204" pitchFamily="18" charset="0"/>
+                                    </a:rPr>
+                                    <m:t>𝑌</m:t>
+                                  </m:r>
+                                </m:e>
+                                <m:sub>
+                                  <m:r>
+                                    <a:rPr lang="en-US" sz="1200" b="0" i="1" dirty="0" smtClean="0">
+                                      <a:latin typeface="Cambria Math" panose="02040503050406030204" pitchFamily="18" charset="0"/>
+                                    </a:rPr>
+                                    <m:t>𝑖</m:t>
+                                  </m:r>
+                                </m:sub>
+                              </m:sSub>
+                              <m:r>
+                                <a:rPr lang="en-US" sz="1200" b="0" i="1" dirty="0" smtClean="0">
+                                  <a:latin typeface="Cambria Math" panose="02040503050406030204" pitchFamily="18" charset="0"/>
+                                </a:rPr>
+                                <m:t>=1|</m:t>
+                              </m:r>
+                              <m:sSub>
+                                <m:sSubPr>
+                                  <m:ctrlPr>
+                                    <a:rPr lang="en-US" sz="1200" b="0" i="1" dirty="0" smtClean="0">
+                                      <a:latin typeface="Cambria Math" panose="02040503050406030204" pitchFamily="18" charset="0"/>
+                                    </a:rPr>
+                                  </m:ctrlPr>
+                                </m:sSubPr>
+                                <m:e>
+                                  <m:r>
+                                    <a:rPr lang="en-US" sz="1200" b="0" i="1" dirty="0" smtClean="0">
+                                      <a:latin typeface="Cambria Math" panose="02040503050406030204" pitchFamily="18" charset="0"/>
+                                    </a:rPr>
+                                    <m:t>𝐴</m:t>
+                                  </m:r>
+                                </m:e>
+                                <m:sub>
+                                  <m:r>
+                                    <a:rPr lang="en-US" sz="1200" b="0" i="1" dirty="0" smtClean="0">
+                                      <a:latin typeface="Cambria Math" panose="02040503050406030204" pitchFamily="18" charset="0"/>
+                                    </a:rPr>
+                                    <m:t>𝑖</m:t>
+                                  </m:r>
+                                </m:sub>
+                              </m:sSub>
+                            </m:e>
+                          </m:d>
+                          <m:r>
+                            <a:rPr lang="en-US" sz="1200" b="0" i="1" dirty="0" smtClean="0">
+                              <a:latin typeface="Cambria Math" panose="02040503050406030204" pitchFamily="18" charset="0"/>
+                            </a:rPr>
+                            <m:t> → </m:t>
+                          </m:r>
+                        </m:oMath>
+                      </a14:m>
+                      <a:r>
+                        <a:rPr lang="en-US" sz="1200" b="0" dirty="0"/>
+                        <a:t>   </a:t>
+                      </a:r>
+                      <a14:m>
+                        <m:oMath xmlns:m="http://schemas.openxmlformats.org/officeDocument/2006/math">
+                          <m:r>
+                            <a:rPr lang="en-US" sz="1200" b="0" dirty="0" smtClean="0">
+                              <a:latin typeface="Cambria Math" panose="02040503050406030204" pitchFamily="18" charset="0"/>
+                            </a:rPr>
+                            <m:t>≈</m:t>
+                          </m:r>
+                        </m:oMath>
+                      </a14:m>
+                      <a:r>
+                        <a:rPr lang="en-US" sz="1200" b="0" dirty="0"/>
+                        <a:t>  monotone              Hero:  </a:t>
+                      </a:r>
+                      <a14:m>
+                        <m:oMath xmlns:m="http://schemas.openxmlformats.org/officeDocument/2006/math">
+                          <m:r>
+                            <a:rPr lang="en-US" sz="1200" b="0" i="1" dirty="0" smtClean="0">
+                              <a:latin typeface="Cambria Math" panose="02040503050406030204" pitchFamily="18" charset="0"/>
+                            </a:rPr>
+                            <m:t>𝑃</m:t>
+                          </m:r>
+                          <m:d>
+                            <m:dPr>
+                              <m:ctrlPr>
+                                <a:rPr lang="en-US" sz="1200" b="0" i="1" dirty="0" smtClean="0">
+                                  <a:latin typeface="Cambria Math" panose="02040503050406030204" pitchFamily="18" charset="0"/>
+                                </a:rPr>
+                              </m:ctrlPr>
+                            </m:dPr>
+                            <m:e>
+                              <m:sSub>
+                                <m:sSubPr>
+                                  <m:ctrlPr>
+                                    <a:rPr lang="en-US" sz="1200" b="0" i="1" dirty="0" smtClean="0">
+                                      <a:latin typeface="Cambria Math" panose="02040503050406030204" pitchFamily="18" charset="0"/>
+                                    </a:rPr>
+                                  </m:ctrlPr>
+                                </m:sSubPr>
+                                <m:e>
+                                  <m:r>
+                                    <a:rPr lang="en-US" sz="1200" b="0" i="1" dirty="0" smtClean="0">
+                                      <a:latin typeface="Cambria Math" panose="02040503050406030204" pitchFamily="18" charset="0"/>
+                                    </a:rPr>
+                                    <m:t>𝑌</m:t>
+                                  </m:r>
+                                </m:e>
+                                <m:sub>
+                                  <m:r>
+                                    <a:rPr lang="en-US" sz="1200" b="0" i="1" dirty="0" smtClean="0">
+                                      <a:latin typeface="Cambria Math" panose="02040503050406030204" pitchFamily="18" charset="0"/>
+                                    </a:rPr>
+                                    <m:t>𝑖</m:t>
+                                  </m:r>
+                                </m:sub>
+                              </m:sSub>
+                              <m:r>
+                                <a:rPr lang="en-US" sz="1200" b="0" i="0" dirty="0" smtClean="0">
+                                  <a:latin typeface="Cambria Math" panose="02040503050406030204" pitchFamily="18" charset="0"/>
+                                </a:rPr>
+                                <m:t>=1|</m:t>
+                              </m:r>
+                              <m:r>
+                                <a:rPr lang="en-US" sz="1200" b="0" i="1" dirty="0" smtClean="0">
+                                  <a:latin typeface="Cambria Math" panose="02040503050406030204" pitchFamily="18" charset="0"/>
+                                </a:rPr>
+                                <m:t>𝑃𝑜𝑜𝑙𝑄</m:t>
+                              </m:r>
+                              <m:r>
+                                <a:rPr lang="en-US" sz="1200" b="0" i="0" dirty="0" smtClean="0">
+                                  <a:latin typeface="Cambria Math" panose="02040503050406030204" pitchFamily="18" charset="0"/>
+                                </a:rPr>
+                                <m:t>_</m:t>
+                              </m:r>
+                              <m:r>
+                                <a:rPr lang="en-US" sz="1200" b="0" i="1" dirty="0" smtClean="0">
+                                  <a:latin typeface="Cambria Math" panose="02040503050406030204" pitchFamily="18" charset="0"/>
+                                </a:rPr>
+                                <m:t>𝐿𝑂𝑂</m:t>
+                              </m:r>
+                            </m:e>
+                          </m:d>
+                          <m:r>
+                            <a:rPr lang="en-US" sz="1200" b="0" i="1" dirty="0" smtClean="0">
+                              <a:latin typeface="Cambria Math" panose="02040503050406030204" pitchFamily="18" charset="0"/>
+                            </a:rPr>
+                            <m:t> → </m:t>
+                          </m:r>
+                        </m:oMath>
+                      </a14:m>
+                      <a:r>
+                        <a:rPr lang="en-US" sz="1200" b="0" dirty="0"/>
+                        <a:t>  tail dip</a:t>
+                      </a:r>
+                    </a:p>
+                  </p:txBody>
+                </p:sp>
+              </mc:Choice>
+              <mc:Fallback>
+                <p:sp>
+                  <p:nvSpPr>
+                    <p:cNvPr id="7" name="TextBox 6">
+                      <a:extLst>
+                        <a:ext uri="{FF2B5EF4-FFF2-40B4-BE49-F238E27FC236}">
+                          <a16:creationId xmlns:a16="http://schemas.microsoft.com/office/drawing/2014/main" id="{0B77B650-C396-DEF6-5A33-8DB93D5652B9}"/>
+                        </a:ext>
+                      </a:extLst>
+                    </p:cNvPr>
+                    <p:cNvSpPr txBox="1">
+                      <a:spLocks noRot="1" noChangeAspect="1" noMove="1" noResize="1" noEditPoints="1" noAdjustHandles="1" noChangeArrowheads="1" noChangeShapeType="1" noTextEdit="1"/>
+                    </p:cNvSpPr>
+                    <p:nvPr/>
+                  </p:nvSpPr>
+                  <p:spPr>
+                    <a:xfrm>
+                      <a:off x="6096000" y="2485170"/>
+                      <a:ext cx="5704931" cy="341760"/>
+                    </a:xfrm>
+                    <a:prstGeom prst="rect">
+                      <a:avLst/>
+                    </a:prstGeom>
+                    <a:blipFill>
+                      <a:blip r:embed="rId4"/>
+                      <a:stretch>
+                        <a:fillRect l="-222" b="-10714"/>
+                      </a:stretch>
+                    </a:blipFill>
+                  </p:spPr>
+                  <p:txBody>
+                    <a:bodyPr/>
+                    <a:lstStyle/>
+                    <a:p>
+                      <a:r>
+                        <a:rPr lang="en-US">
+                          <a:noFill/>
+                        </a:rPr>
+                        <a:t> </a:t>
+                      </a:r>
+                    </a:p>
+                  </p:txBody>
+                </p:sp>
+              </mc:Fallback>
+            </mc:AlternateContent>
+          </p:grpSp>
+          <p:grpSp>
+            <p:nvGrpSpPr>
+              <p:cNvPr id="46" name="Group 45">
+                <a:extLst>
+                  <a:ext uri="{FF2B5EF4-FFF2-40B4-BE49-F238E27FC236}">
+                    <a16:creationId xmlns:a16="http://schemas.microsoft.com/office/drawing/2014/main" id="{187A4389-5EED-3727-88B2-2098D31DAA44}"/>
+                  </a:ext>
+                </a:extLst>
+              </p:cNvPr>
+              <p:cNvGrpSpPr/>
+              <p:nvPr/>
+            </p:nvGrpSpPr>
+            <p:grpSpPr>
+              <a:xfrm>
+                <a:off x="6379001" y="2593972"/>
+                <a:ext cx="4972558" cy="1262789"/>
+                <a:chOff x="5929630" y="765162"/>
+                <a:chExt cx="4972558" cy="1262789"/>
+              </a:xfrm>
+            </p:grpSpPr>
+            <p:grpSp>
+              <p:nvGrpSpPr>
+                <p:cNvPr id="44" name="Group 43">
+                  <a:extLst>
+                    <a:ext uri="{FF2B5EF4-FFF2-40B4-BE49-F238E27FC236}">
+                      <a16:creationId xmlns:a16="http://schemas.microsoft.com/office/drawing/2014/main" id="{270FB135-E9EC-6756-E718-9EA297D4BB65}"/>
+                    </a:ext>
+                  </a:extLst>
+                </p:cNvPr>
+                <p:cNvGrpSpPr/>
+                <p:nvPr/>
+              </p:nvGrpSpPr>
+              <p:grpSpPr>
+                <a:xfrm>
+                  <a:off x="8563807" y="765162"/>
+                  <a:ext cx="2338381" cy="1262789"/>
+                  <a:chOff x="9163891" y="765162"/>
+                  <a:chExt cx="2338381" cy="1262789"/>
+                </a:xfrm>
+              </p:grpSpPr>
+              <p:grpSp>
+                <p:nvGrpSpPr>
+                  <p:cNvPr id="43" name="Group 42">
+                    <a:extLst>
+                      <a:ext uri="{FF2B5EF4-FFF2-40B4-BE49-F238E27FC236}">
+                        <a16:creationId xmlns:a16="http://schemas.microsoft.com/office/drawing/2014/main" id="{2BD0EC91-815F-C3E5-4E8F-7E226E707EEB}"/>
+                      </a:ext>
+                    </a:extLst>
+                  </p:cNvPr>
+                  <p:cNvGrpSpPr/>
+                  <p:nvPr/>
+                </p:nvGrpSpPr>
+                <p:grpSpPr>
+                  <a:xfrm>
+                    <a:off x="9248166" y="1052739"/>
+                    <a:ext cx="2169831" cy="975212"/>
+                    <a:chOff x="9238479" y="1052739"/>
+                    <a:chExt cx="2169831" cy="975212"/>
+                  </a:xfrm>
+                </p:grpSpPr>
+                <p:cxnSp>
+                  <p:nvCxnSpPr>
+                    <p:cNvPr id="13" name="Straight Arrow Connector 12">
+                      <a:extLst>
+                        <a:ext uri="{FF2B5EF4-FFF2-40B4-BE49-F238E27FC236}">
+                          <a16:creationId xmlns:a16="http://schemas.microsoft.com/office/drawing/2014/main" id="{234D3C5B-0386-6577-8F3A-3B32318FCEAB}"/>
+                        </a:ext>
+                      </a:extLst>
+                    </p:cNvPr>
+                    <p:cNvCxnSpPr>
+                      <a:cxnSpLocks/>
+                    </p:cNvCxnSpPr>
+                    <p:nvPr/>
+                  </p:nvCxnSpPr>
+                  <p:spPr>
+                    <a:xfrm>
+                      <a:off x="10021826" y="1052739"/>
+                      <a:ext cx="0" cy="948842"/>
+                    </a:xfrm>
+                    <a:prstGeom prst="straightConnector1">
+                      <a:avLst/>
+                    </a:prstGeom>
+                    <a:ln>
+                      <a:solidFill>
+                        <a:schemeClr val="tx1"/>
+                      </a:solidFill>
+                      <a:headEnd type="triangle"/>
+                      <a:tailEnd type="triangle"/>
+                    </a:ln>
+                  </p:spPr>
+                  <p:style>
+                    <a:lnRef idx="2">
+                      <a:schemeClr val="accent1"/>
+                    </a:lnRef>
+                    <a:fillRef idx="0">
+                      <a:schemeClr val="accent1"/>
+                    </a:fillRef>
+                    <a:effectRef idx="1">
+                      <a:schemeClr val="accent1"/>
+                    </a:effectRef>
+                    <a:fontRef idx="minor">
+                      <a:schemeClr val="tx1"/>
+                    </a:fontRef>
+                  </p:style>
+                </p:cxnSp>
+                <p:cxnSp>
+                  <p:nvCxnSpPr>
+                    <p:cNvPr id="15" name="Straight Arrow Connector 14">
+                      <a:extLst>
+                        <a:ext uri="{FF2B5EF4-FFF2-40B4-BE49-F238E27FC236}">
+                          <a16:creationId xmlns:a16="http://schemas.microsoft.com/office/drawing/2014/main" id="{5CD78934-FF51-6805-CC54-572EE0E2BE02}"/>
+                        </a:ext>
+                      </a:extLst>
+                    </p:cNvPr>
+                    <p:cNvCxnSpPr>
+                      <a:cxnSpLocks/>
+                    </p:cNvCxnSpPr>
+                    <p:nvPr/>
+                  </p:nvCxnSpPr>
+                  <p:spPr>
+                    <a:xfrm>
+                      <a:off x="9853830" y="1829061"/>
+                      <a:ext cx="1554480" cy="0"/>
+                    </a:xfrm>
+                    <a:prstGeom prst="straightConnector1">
+                      <a:avLst/>
+                    </a:prstGeom>
+                    <a:ln>
+                      <a:solidFill>
+                        <a:schemeClr val="tx1"/>
+                      </a:solidFill>
+                      <a:headEnd type="triangle"/>
+                      <a:tailEnd type="triangle"/>
+                    </a:ln>
+                  </p:spPr>
+                  <p:style>
+                    <a:lnRef idx="2">
+                      <a:schemeClr val="accent1"/>
+                    </a:lnRef>
+                    <a:fillRef idx="0">
+                      <a:schemeClr val="accent1"/>
+                    </a:fillRef>
+                    <a:effectRef idx="1">
+                      <a:schemeClr val="accent1"/>
+                    </a:effectRef>
+                    <a:fontRef idx="minor">
+                      <a:schemeClr val="tx1"/>
+                    </a:fontRef>
+                  </p:style>
+                </p:cxnSp>
+                <p:sp>
+                  <p:nvSpPr>
+                    <p:cNvPr id="21" name="Freeform 20">
+                      <a:extLst>
+                        <a:ext uri="{FF2B5EF4-FFF2-40B4-BE49-F238E27FC236}">
+                          <a16:creationId xmlns:a16="http://schemas.microsoft.com/office/drawing/2014/main" id="{EF02243E-BE04-CFA6-42FF-2D21A22E01CF}"/>
+                        </a:ext>
+                      </a:extLst>
+                    </p:cNvPr>
+                    <p:cNvSpPr/>
+                    <p:nvPr/>
+                  </p:nvSpPr>
+                  <p:spPr>
+                    <a:xfrm>
+                      <a:off x="10100567" y="1156263"/>
+                      <a:ext cx="1093689" cy="593999"/>
+                    </a:xfrm>
+                    <a:custGeom>
+                      <a:avLst/>
+                      <a:gdLst>
+                        <a:gd name="csX0" fmla="*/ 0 w 1593560"/>
+                        <a:gd name="csY0" fmla="*/ 588775 h 593999"/>
+                        <a:gd name="csX1" fmla="*/ 265593 w 1593560"/>
+                        <a:gd name="csY1" fmla="*/ 584981 h 593999"/>
+                        <a:gd name="csX2" fmla="*/ 538775 w 1593560"/>
+                        <a:gd name="csY2" fmla="*/ 505303 h 593999"/>
+                        <a:gd name="csX3" fmla="*/ 770221 w 1593560"/>
+                        <a:gd name="csY3" fmla="*/ 395272 h 593999"/>
+                        <a:gd name="csX4" fmla="*/ 982695 w 1593560"/>
+                        <a:gd name="csY4" fmla="*/ 239710 h 593999"/>
+                        <a:gd name="csX5" fmla="*/ 1130669 w 1593560"/>
+                        <a:gd name="csY5" fmla="*/ 122090 h 593999"/>
+                        <a:gd name="csX6" fmla="*/ 1305201 w 1593560"/>
+                        <a:gd name="csY6" fmla="*/ 676 h 593999"/>
+                        <a:gd name="csX7" fmla="*/ 1506294 w 1593560"/>
+                        <a:gd name="csY7" fmla="*/ 80354 h 593999"/>
+                        <a:gd name="csX8" fmla="*/ 1593560 w 1593560"/>
+                        <a:gd name="csY8" fmla="*/ 232121 h 593999"/>
+                      </a:gdLst>
+                      <a:ahLst/>
+                      <a:cxnLst>
+                        <a:cxn ang="0">
+                          <a:pos x="csX0" y="csY0"/>
+                        </a:cxn>
+                        <a:cxn ang="0">
+                          <a:pos x="csX1" y="csY1"/>
+                        </a:cxn>
+                        <a:cxn ang="0">
+                          <a:pos x="csX2" y="csY2"/>
+                        </a:cxn>
+                        <a:cxn ang="0">
+                          <a:pos x="csX3" y="csY3"/>
+                        </a:cxn>
+                        <a:cxn ang="0">
+                          <a:pos x="csX4" y="csY4"/>
+                        </a:cxn>
+                        <a:cxn ang="0">
+                          <a:pos x="csX5" y="csY5"/>
+                        </a:cxn>
+                        <a:cxn ang="0">
+                          <a:pos x="csX6" y="csY6"/>
+                        </a:cxn>
+                        <a:cxn ang="0">
+                          <a:pos x="csX7" y="csY7"/>
+                        </a:cxn>
+                        <a:cxn ang="0">
+                          <a:pos x="csX8" y="csY8"/>
+                        </a:cxn>
+                      </a:cxnLst>
+                      <a:rect l="l" t="t" r="r" b="b"/>
+                      <a:pathLst>
+                        <a:path w="1593560" h="593999">
+                          <a:moveTo>
+                            <a:pt x="0" y="588775"/>
+                          </a:moveTo>
+                          <a:cubicBezTo>
+                            <a:pt x="87898" y="593834"/>
+                            <a:pt x="175797" y="598893"/>
+                            <a:pt x="265593" y="584981"/>
+                          </a:cubicBezTo>
+                          <a:cubicBezTo>
+                            <a:pt x="355389" y="571069"/>
+                            <a:pt x="454670" y="536921"/>
+                            <a:pt x="538775" y="505303"/>
+                          </a:cubicBezTo>
+                          <a:cubicBezTo>
+                            <a:pt x="622880" y="473685"/>
+                            <a:pt x="696234" y="439537"/>
+                            <a:pt x="770221" y="395272"/>
+                          </a:cubicBezTo>
+                          <a:cubicBezTo>
+                            <a:pt x="844208" y="351007"/>
+                            <a:pt x="922620" y="285240"/>
+                            <a:pt x="982695" y="239710"/>
+                          </a:cubicBezTo>
+                          <a:cubicBezTo>
+                            <a:pt x="1042770" y="194180"/>
+                            <a:pt x="1076918" y="161929"/>
+                            <a:pt x="1130669" y="122090"/>
+                          </a:cubicBezTo>
+                          <a:cubicBezTo>
+                            <a:pt x="1184420" y="82251"/>
+                            <a:pt x="1242597" y="7632"/>
+                            <a:pt x="1305201" y="676"/>
+                          </a:cubicBezTo>
+                          <a:cubicBezTo>
+                            <a:pt x="1367805" y="-6280"/>
+                            <a:pt x="1458234" y="41780"/>
+                            <a:pt x="1506294" y="80354"/>
+                          </a:cubicBezTo>
+                          <a:cubicBezTo>
+                            <a:pt x="1554354" y="118928"/>
+                            <a:pt x="1573957" y="175524"/>
+                            <a:pt x="1593560" y="232121"/>
+                          </a:cubicBezTo>
+                        </a:path>
+                      </a:pathLst>
+                    </a:custGeom>
+                    <a:noFill/>
+                    <a:ln>
+                      <a:solidFill>
+                        <a:srgbClr val="0432FF"/>
+                      </a:solidFill>
+                    </a:ln>
+                  </p:spPr>
+                  <p:style>
+                    <a:lnRef idx="2">
+                      <a:schemeClr val="accent1">
+                        <a:shade val="15000"/>
+                      </a:schemeClr>
+                    </a:lnRef>
+                    <a:fillRef idx="1">
+                      <a:schemeClr val="accent1"/>
+                    </a:fillRef>
+                    <a:effectRef idx="0">
+                      <a:schemeClr val="accent1"/>
+                    </a:effectRef>
+                    <a:fontRef idx="minor">
+                      <a:schemeClr val="lt1"/>
+                    </a:fontRef>
+                  </p:style>
+                  <p:txBody>
+                    <a:bodyPr rtlCol="0" anchor="ctr"/>
+                    <a:lstStyle/>
+                    <a:p>
+                      <a:pPr algn="ctr"/>
+                      <a:endParaRPr lang="en-US" sz="1200"/>
+                    </a:p>
+                  </p:txBody>
+                </p:sp>
+                <mc:AlternateContent xmlns:mc="http://schemas.openxmlformats.org/markup-compatibility/2006">
+                  <mc:Choice xmlns:a14="http://schemas.microsoft.com/office/drawing/2010/main" Requires="a14">
+                    <p:sp>
+                      <p:nvSpPr>
+                        <p:cNvPr id="22" name="TextBox 21">
+                          <a:extLst>
+                            <a:ext uri="{FF2B5EF4-FFF2-40B4-BE49-F238E27FC236}">
+                              <a16:creationId xmlns:a16="http://schemas.microsoft.com/office/drawing/2014/main" id="{E3E0712F-1D01-EB8E-7547-12BDDB329C60}"/>
+                            </a:ext>
+                          </a:extLst>
+                        </p:cNvPr>
+                        <p:cNvSpPr txBox="1"/>
+                        <p:nvPr/>
+                      </p:nvSpPr>
+                      <p:spPr>
+                        <a:xfrm>
+                          <a:off x="9238479" y="1299374"/>
+                          <a:ext cx="615351" cy="153888"/>
+                        </a:xfrm>
+                        <a:prstGeom prst="rect">
+                          <a:avLst/>
+                        </a:prstGeom>
+                        <a:noFill/>
+                      </p:spPr>
+                      <p:txBody>
+                        <a:bodyPr wrap="none" lIns="0" tIns="0" rIns="0" bIns="0" rtlCol="0">
+                          <a:spAutoFit/>
+                        </a:bodyPr>
+                        <a:lstStyle/>
+                        <a:p>
+                          <a:pPr/>
+                          <a14:m>
+                            <m:oMathPara xmlns:m="http://schemas.openxmlformats.org/officeDocument/2006/math">
+                              <m:oMathParaPr>
+                                <m:jc m:val="centerGroup"/>
+                              </m:oMathParaPr>
+                              <m:oMath xmlns:m="http://schemas.openxmlformats.org/officeDocument/2006/math">
+                                <m:r>
+                                  <a:rPr lang="en-US" sz="1000" b="0" i="1" smtClean="0">
+                                    <a:latin typeface="Cambria Math" panose="02040503050406030204" pitchFamily="18" charset="0"/>
+                                  </a:rPr>
+                                  <m:t>𝑃</m:t>
+                                </m:r>
+                                <m:r>
+                                  <a:rPr lang="en-US" sz="1000" b="0" i="1" smtClean="0">
+                                    <a:latin typeface="Cambria Math" panose="02040503050406030204" pitchFamily="18" charset="0"/>
+                                  </a:rPr>
+                                  <m:t>(</m:t>
+                                </m:r>
+                                <m:sSub>
+                                  <m:sSubPr>
+                                    <m:ctrlPr>
+                                      <a:rPr lang="en-US" sz="1000" b="0" i="1" smtClean="0">
+                                        <a:latin typeface="Cambria Math" panose="02040503050406030204" pitchFamily="18" charset="0"/>
+                                      </a:rPr>
+                                    </m:ctrlPr>
+                                  </m:sSubPr>
+                                  <m:e>
+                                    <m:r>
+                                      <a:rPr lang="en-US" sz="1000" b="0" i="1" smtClean="0">
+                                        <a:latin typeface="Cambria Math" panose="02040503050406030204" pitchFamily="18" charset="0"/>
+                                      </a:rPr>
+                                      <m:t>𝑌</m:t>
+                                    </m:r>
+                                  </m:e>
+                                  <m:sub>
+                                    <m:r>
+                                      <a:rPr lang="en-US" sz="1000" b="0" i="1" smtClean="0">
+                                        <a:latin typeface="Cambria Math" panose="02040503050406030204" pitchFamily="18" charset="0"/>
+                                      </a:rPr>
+                                      <m:t>𝑖</m:t>
+                                    </m:r>
+                                  </m:sub>
+                                </m:sSub>
+                                <m:r>
+                                  <a:rPr lang="en-US" sz="1000" b="0" i="1" smtClean="0">
+                                    <a:latin typeface="Cambria Math" panose="02040503050406030204" pitchFamily="18" charset="0"/>
+                                  </a:rPr>
+                                  <m:t>=1|</m:t>
+                                </m:r>
+                                <m:sSub>
+                                  <m:sSubPr>
+                                    <m:ctrlPr>
+                                      <a:rPr lang="en-US" sz="1000" b="0" i="1" smtClean="0">
+                                        <a:latin typeface="Cambria Math" panose="02040503050406030204" pitchFamily="18" charset="0"/>
+                                      </a:rPr>
+                                    </m:ctrlPr>
+                                  </m:sSubPr>
+                                  <m:e>
+                                    <m:r>
+                                      <a:rPr lang="en-US" sz="1000" b="0" i="1" smtClean="0">
+                                        <a:latin typeface="Cambria Math" panose="02040503050406030204" pitchFamily="18" charset="0"/>
+                                      </a:rPr>
+                                      <m:t>𝐴</m:t>
+                                    </m:r>
+                                  </m:e>
+                                  <m:sub>
+                                    <m:r>
+                                      <a:rPr lang="en-US" sz="1000" b="0" i="1" smtClean="0">
+                                        <a:latin typeface="Cambria Math" panose="02040503050406030204" pitchFamily="18" charset="0"/>
+                                      </a:rPr>
+                                      <m:t>𝑖</m:t>
+                                    </m:r>
+                                  </m:sub>
+                                </m:sSub>
+                                <m:r>
+                                  <a:rPr lang="en-US" sz="1000" b="0" i="1" smtClean="0">
+                                    <a:latin typeface="Cambria Math" panose="02040503050406030204" pitchFamily="18" charset="0"/>
+                                  </a:rPr>
+                                  <m:t>)</m:t>
+                                </m:r>
+                              </m:oMath>
+                            </m:oMathPara>
+                          </a14:m>
+                          <a:endParaRPr lang="en-US" sz="1000" dirty="0"/>
+                        </a:p>
+                      </p:txBody>
+                    </p:sp>
+                  </mc:Choice>
+                  <mc:Fallback>
+                    <p:sp>
+                      <p:nvSpPr>
+                        <p:cNvPr id="22" name="TextBox 21">
+                          <a:extLst>
+                            <a:ext uri="{FF2B5EF4-FFF2-40B4-BE49-F238E27FC236}">
+                              <a16:creationId xmlns:a16="http://schemas.microsoft.com/office/drawing/2014/main" id="{E3E0712F-1D01-EB8E-7547-12BDDB329C60}"/>
+                            </a:ext>
+                          </a:extLst>
+                        </p:cNvPr>
+                        <p:cNvSpPr txBox="1">
+                          <a:spLocks noRot="1" noChangeAspect="1" noMove="1" noResize="1" noEditPoints="1" noAdjustHandles="1" noChangeArrowheads="1" noChangeShapeType="1" noTextEdit="1"/>
+                        </p:cNvSpPr>
+                        <p:nvPr/>
+                      </p:nvSpPr>
+                      <p:spPr>
+                        <a:xfrm>
+                          <a:off x="9238479" y="1299374"/>
+                          <a:ext cx="615351" cy="153888"/>
+                        </a:xfrm>
+                        <a:prstGeom prst="rect">
+                          <a:avLst/>
+                        </a:prstGeom>
+                        <a:blipFill>
+                          <a:blip r:embed="rId5"/>
+                          <a:stretch>
+                            <a:fillRect l="-8163" t="-7692" r="-20408" b="-30769"/>
+                          </a:stretch>
+                        </a:blipFill>
+                      </p:spPr>
+                      <p:txBody>
+                        <a:bodyPr/>
+                        <a:lstStyle/>
+                        <a:p>
+                          <a:r>
+                            <a:rPr lang="en-US">
+                              <a:noFill/>
+                            </a:rPr>
+                            <a:t> </a:t>
+                          </a:r>
+                        </a:p>
+                      </p:txBody>
+                    </p:sp>
+                  </mc:Fallback>
+                </mc:AlternateContent>
+                <mc:AlternateContent xmlns:mc="http://schemas.openxmlformats.org/markup-compatibility/2006">
+                  <mc:Choice xmlns:a14="http://schemas.microsoft.com/office/drawing/2010/main" Requires="a14">
+                    <p:sp>
+                      <p:nvSpPr>
+                        <p:cNvPr id="23" name="TextBox 22">
+                          <a:extLst>
+                            <a:ext uri="{FF2B5EF4-FFF2-40B4-BE49-F238E27FC236}">
+                              <a16:creationId xmlns:a16="http://schemas.microsoft.com/office/drawing/2014/main" id="{3FCE6E86-C6BA-9D19-0046-C043E90E37AE}"/>
+                            </a:ext>
+                          </a:extLst>
+                        </p:cNvPr>
+                        <p:cNvSpPr txBox="1"/>
+                        <p:nvPr/>
+                      </p:nvSpPr>
+                      <p:spPr>
+                        <a:xfrm>
+                          <a:off x="10407670" y="1874063"/>
+                          <a:ext cx="560407" cy="153888"/>
+                        </a:xfrm>
+                        <a:prstGeom prst="rect">
+                          <a:avLst/>
+                        </a:prstGeom>
+                        <a:noFill/>
+                      </p:spPr>
+                      <p:txBody>
+                        <a:bodyPr wrap="none" lIns="0" tIns="0" rIns="0" bIns="0" rtlCol="0">
+                          <a:spAutoFit/>
+                        </a:bodyPr>
+                        <a:lstStyle/>
+                        <a:p>
+                          <a:pPr/>
+                          <a14:m>
+                            <m:oMathPara xmlns:m="http://schemas.openxmlformats.org/officeDocument/2006/math">
+                              <m:oMathParaPr>
+                                <m:jc m:val="centerGroup"/>
+                              </m:oMathParaPr>
+                              <m:oMath xmlns:m="http://schemas.openxmlformats.org/officeDocument/2006/math">
+                                <m:r>
+                                  <a:rPr lang="en-US" sz="1000" b="0" i="1" smtClean="0">
+                                    <a:latin typeface="Cambria Math" panose="02040503050406030204" pitchFamily="18" charset="0"/>
+                                  </a:rPr>
+                                  <m:t>𝑃𝑜𝑜𝑙𝑄</m:t>
+                                </m:r>
+                                <m:r>
+                                  <a:rPr lang="en-US" sz="1000" b="0" i="1" smtClean="0">
+                                    <a:latin typeface="Cambria Math" panose="02040503050406030204" pitchFamily="18" charset="0"/>
+                                  </a:rPr>
+                                  <m:t> </m:t>
+                                </m:r>
+                                <m:r>
+                                  <a:rPr lang="en-US" sz="1000" b="0" i="1" smtClean="0">
+                                    <a:latin typeface="Cambria Math" panose="02040503050406030204" pitchFamily="18" charset="0"/>
+                                  </a:rPr>
+                                  <m:t>𝐿𝑂𝑂</m:t>
+                                </m:r>
+                              </m:oMath>
+                            </m:oMathPara>
+                          </a14:m>
+                          <a:endParaRPr lang="en-US" sz="1000" dirty="0"/>
+                        </a:p>
+                      </p:txBody>
+                    </p:sp>
+                  </mc:Choice>
+                  <mc:Fallback>
+                    <p:sp>
+                      <p:nvSpPr>
+                        <p:cNvPr id="23" name="TextBox 22">
+                          <a:extLst>
+                            <a:ext uri="{FF2B5EF4-FFF2-40B4-BE49-F238E27FC236}">
+                              <a16:creationId xmlns:a16="http://schemas.microsoft.com/office/drawing/2014/main" id="{3FCE6E86-C6BA-9D19-0046-C043E90E37AE}"/>
+                            </a:ext>
+                          </a:extLst>
+                        </p:cNvPr>
+                        <p:cNvSpPr txBox="1">
+                          <a:spLocks noRot="1" noChangeAspect="1" noMove="1" noResize="1" noEditPoints="1" noAdjustHandles="1" noChangeArrowheads="1" noChangeShapeType="1" noTextEdit="1"/>
+                        </p:cNvSpPr>
+                        <p:nvPr/>
+                      </p:nvSpPr>
+                      <p:spPr>
+                        <a:xfrm>
+                          <a:off x="10407670" y="1874063"/>
+                          <a:ext cx="560407" cy="153888"/>
+                        </a:xfrm>
+                        <a:prstGeom prst="rect">
+                          <a:avLst/>
+                        </a:prstGeom>
+                        <a:blipFill>
+                          <a:blip r:embed="rId6"/>
+                          <a:stretch>
+                            <a:fillRect l="-8696" t="-15385" r="-17391" b="-38462"/>
+                          </a:stretch>
+                        </a:blipFill>
+                      </p:spPr>
+                      <p:txBody>
+                        <a:bodyPr/>
+                        <a:lstStyle/>
+                        <a:p>
+                          <a:r>
+                            <a:rPr lang="en-US">
+                              <a:noFill/>
+                            </a:rPr>
+                            <a:t> </a:t>
+                          </a:r>
+                        </a:p>
+                      </p:txBody>
+                    </p:sp>
+                  </mc:Fallback>
+                </mc:AlternateContent>
+              </p:grpSp>
+              <p:sp>
+                <p:nvSpPr>
+                  <p:cNvPr id="24" name="TextBox 23">
+                    <a:extLst>
+                      <a:ext uri="{FF2B5EF4-FFF2-40B4-BE49-F238E27FC236}">
+                        <a16:creationId xmlns:a16="http://schemas.microsoft.com/office/drawing/2014/main" id="{4AA5E550-27E9-1E5D-A47B-CC9894E5E972}"/>
+                      </a:ext>
+                    </a:extLst>
+                  </p:cNvPr>
+                  <p:cNvSpPr txBox="1"/>
+                  <p:nvPr/>
+                </p:nvSpPr>
+                <p:spPr>
+                  <a:xfrm>
+                    <a:off x="9163891" y="765162"/>
+                    <a:ext cx="2338381" cy="276999"/>
+                  </a:xfrm>
+                  <a:prstGeom prst="rect">
+                    <a:avLst/>
+                  </a:prstGeom>
+                  <a:noFill/>
+                </p:spPr>
+                <p:txBody>
+                  <a:bodyPr wrap="square" rtlCol="0">
+                    <a:spAutoFit/>
+                  </a:bodyPr>
+                  <a:lstStyle/>
+                  <a:p>
+                    <a:pPr algn="ctr"/>
+                    <a:r>
+                      <a:rPr lang="en-US" sz="1200" i="1" dirty="0">
+                        <a:solidFill>
+                          <a:srgbClr val="0432FF"/>
+                        </a:solidFill>
+                      </a:rPr>
+                      <a:t>HERO (empirical)</a:t>
+                    </a:r>
+                  </a:p>
+                </p:txBody>
+              </p:sp>
+            </p:grpSp>
+            <p:grpSp>
+              <p:nvGrpSpPr>
+                <p:cNvPr id="45" name="Group 44">
+                  <a:extLst>
+                    <a:ext uri="{FF2B5EF4-FFF2-40B4-BE49-F238E27FC236}">
+                      <a16:creationId xmlns:a16="http://schemas.microsoft.com/office/drawing/2014/main" id="{5D42937F-04FB-BCCD-5B63-F83C664D59A5}"/>
+                    </a:ext>
+                  </a:extLst>
+                </p:cNvPr>
+                <p:cNvGrpSpPr/>
+                <p:nvPr/>
+              </p:nvGrpSpPr>
+              <p:grpSpPr>
+                <a:xfrm>
+                  <a:off x="5929630" y="766052"/>
+                  <a:ext cx="2807266" cy="1261899"/>
+                  <a:chOff x="5929630" y="766052"/>
+                  <a:chExt cx="2807266" cy="1261899"/>
+                </a:xfrm>
+              </p:grpSpPr>
+              <p:sp>
+                <p:nvSpPr>
+                  <p:cNvPr id="33" name="TextBox 32">
+                    <a:extLst>
+                      <a:ext uri="{FF2B5EF4-FFF2-40B4-BE49-F238E27FC236}">
+                        <a16:creationId xmlns:a16="http://schemas.microsoft.com/office/drawing/2014/main" id="{4303886C-1548-5570-E17E-5BD0CF5AC674}"/>
+                      </a:ext>
+                    </a:extLst>
+                  </p:cNvPr>
+                  <p:cNvSpPr txBox="1"/>
+                  <p:nvPr/>
+                </p:nvSpPr>
+                <p:spPr>
+                  <a:xfrm>
+                    <a:off x="5929630" y="766052"/>
+                    <a:ext cx="2807266" cy="276999"/>
+                  </a:xfrm>
+                  <a:prstGeom prst="rect">
+                    <a:avLst/>
+                  </a:prstGeom>
+                  <a:noFill/>
+                </p:spPr>
+                <p:txBody>
+                  <a:bodyPr wrap="square" rtlCol="0">
+                    <a:spAutoFit/>
+                  </a:bodyPr>
+                  <a:lstStyle/>
+                  <a:p>
+                    <a:pPr algn="ctr"/>
+                    <a:r>
+                      <a:rPr lang="en-US" sz="1200" i="1" dirty="0">
+                        <a:solidFill>
+                          <a:srgbClr val="0432FF"/>
+                        </a:solidFill>
+                      </a:rPr>
+                      <a:t>Naïve (empirical)</a:t>
+                    </a:r>
+                  </a:p>
+                </p:txBody>
+              </p:sp>
+              <p:grpSp>
+                <p:nvGrpSpPr>
+                  <p:cNvPr id="42" name="Group 41">
+                    <a:extLst>
+                      <a:ext uri="{FF2B5EF4-FFF2-40B4-BE49-F238E27FC236}">
+                        <a16:creationId xmlns:a16="http://schemas.microsoft.com/office/drawing/2014/main" id="{2E92C112-BF68-EC93-A4F2-C2FEC165B307}"/>
+                      </a:ext>
+                    </a:extLst>
+                  </p:cNvPr>
+                  <p:cNvGrpSpPr/>
+                  <p:nvPr/>
+                </p:nvGrpSpPr>
+                <p:grpSpPr>
+                  <a:xfrm>
+                    <a:off x="6250967" y="1052739"/>
+                    <a:ext cx="2164593" cy="975212"/>
+                    <a:chOff x="6288893" y="1052739"/>
+                    <a:chExt cx="2164593" cy="975212"/>
+                  </a:xfrm>
+                </p:grpSpPr>
+                <mc:AlternateContent xmlns:mc="http://schemas.openxmlformats.org/markup-compatibility/2006">
+                  <mc:Choice xmlns:a14="http://schemas.microsoft.com/office/drawing/2010/main" Requires="a14">
+                    <p:sp>
+                      <p:nvSpPr>
+                        <p:cNvPr id="31" name="TextBox 30">
+                          <a:extLst>
+                            <a:ext uri="{FF2B5EF4-FFF2-40B4-BE49-F238E27FC236}">
+                              <a16:creationId xmlns:a16="http://schemas.microsoft.com/office/drawing/2014/main" id="{2BE58BA4-22A1-ABB5-039D-E96A936D1027}"/>
+                            </a:ext>
+                          </a:extLst>
+                        </p:cNvPr>
+                        <p:cNvSpPr txBox="1"/>
+                        <p:nvPr/>
+                      </p:nvSpPr>
+                      <p:spPr>
+                        <a:xfrm>
+                          <a:off x="6288893" y="1299374"/>
+                          <a:ext cx="738739" cy="153888"/>
+                        </a:xfrm>
+                        <a:prstGeom prst="rect">
+                          <a:avLst/>
+                        </a:prstGeom>
+                        <a:noFill/>
+                      </p:spPr>
+                      <p:txBody>
+                        <a:bodyPr wrap="none" lIns="0" tIns="0" rIns="0" bIns="0" rtlCol="0">
+                          <a:spAutoFit/>
+                        </a:bodyPr>
+                        <a:lstStyle/>
+                        <a:p>
+                          <a:pPr/>
+                          <a14:m>
+                            <m:oMathPara xmlns:m="http://schemas.openxmlformats.org/officeDocument/2006/math">
+                              <m:oMathParaPr>
+                                <m:jc m:val="centerGroup"/>
+                              </m:oMathParaPr>
+                              <m:oMath xmlns:m="http://schemas.openxmlformats.org/officeDocument/2006/math">
+                                <m:r>
+                                  <a:rPr lang="en-US" sz="1000" b="0" i="1" smtClean="0">
+                                    <a:latin typeface="Cambria Math" panose="02040503050406030204" pitchFamily="18" charset="0"/>
+                                  </a:rPr>
+                                  <m:t>𝑃</m:t>
+                                </m:r>
+                                <m:r>
+                                  <a:rPr lang="en-US" sz="1000" b="0" i="1" smtClean="0">
+                                    <a:latin typeface="Cambria Math" panose="02040503050406030204" pitchFamily="18" charset="0"/>
+                                  </a:rPr>
+                                  <m:t>(</m:t>
+                                </m:r>
+                                <m:sSub>
+                                  <m:sSubPr>
+                                    <m:ctrlPr>
+                                      <a:rPr lang="en-US" sz="1000" b="0" i="1" smtClean="0">
+                                        <a:latin typeface="Cambria Math" panose="02040503050406030204" pitchFamily="18" charset="0"/>
+                                      </a:rPr>
+                                    </m:ctrlPr>
+                                  </m:sSubPr>
+                                  <m:e>
+                                    <m:r>
+                                      <a:rPr lang="en-US" sz="1000" b="0" i="1" smtClean="0">
+                                        <a:latin typeface="Cambria Math" panose="02040503050406030204" pitchFamily="18" charset="0"/>
+                                      </a:rPr>
+                                      <m:t>𝑌</m:t>
+                                    </m:r>
+                                  </m:e>
+                                  <m:sub>
+                                    <m:r>
+                                      <a:rPr lang="en-US" sz="1000" b="0" i="1" smtClean="0">
+                                        <a:latin typeface="Cambria Math" panose="02040503050406030204" pitchFamily="18" charset="0"/>
+                                      </a:rPr>
+                                      <m:t>𝑖</m:t>
+                                    </m:r>
+                                  </m:sub>
+                                </m:sSub>
+                                <m:r>
+                                  <a:rPr lang="en-US" sz="1000" b="0" i="1" smtClean="0">
+                                    <a:latin typeface="Cambria Math" panose="02040503050406030204" pitchFamily="18" charset="0"/>
+                                  </a:rPr>
+                                  <m:t>=1|</m:t>
+                                </m:r>
+                                <m:sSub>
+                                  <m:sSubPr>
+                                    <m:ctrlPr>
+                                      <a:rPr lang="en-US" sz="1000" b="0" i="1" smtClean="0">
+                                        <a:latin typeface="Cambria Math" panose="02040503050406030204" pitchFamily="18" charset="0"/>
+                                      </a:rPr>
+                                    </m:ctrlPr>
+                                  </m:sSubPr>
+                                  <m:e>
+                                    <m:r>
+                                      <a:rPr lang="en-US" sz="1000" b="0" i="1" smtClean="0">
+                                        <a:latin typeface="Cambria Math" panose="02040503050406030204" pitchFamily="18" charset="0"/>
+                                      </a:rPr>
+                                      <m:t>𝐴</m:t>
+                                    </m:r>
+                                  </m:e>
+                                  <m:sub>
+                                    <m:r>
+                                      <a:rPr lang="en-US" sz="1000" b="0" i="1" smtClean="0">
+                                        <a:latin typeface="Cambria Math" panose="02040503050406030204" pitchFamily="18" charset="0"/>
+                                      </a:rPr>
+                                      <m:t>𝑖</m:t>
+                                    </m:r>
+                                  </m:sub>
+                                </m:sSub>
+                                <m:r>
+                                  <a:rPr lang="en-US" sz="1000" b="0" i="1" smtClean="0">
+                                    <a:latin typeface="Cambria Math" panose="02040503050406030204" pitchFamily="18" charset="0"/>
+                                  </a:rPr>
+                                  <m:t>)</m:t>
+                                </m:r>
+                              </m:oMath>
+                            </m:oMathPara>
+                          </a14:m>
+                          <a:endParaRPr lang="en-US" sz="1000" dirty="0"/>
+                        </a:p>
+                      </p:txBody>
+                    </p:sp>
+                  </mc:Choice>
+                  <mc:Fallback>
+                    <p:sp>
+                      <p:nvSpPr>
+                        <p:cNvPr id="31" name="TextBox 30">
+                          <a:extLst>
+                            <a:ext uri="{FF2B5EF4-FFF2-40B4-BE49-F238E27FC236}">
+                              <a16:creationId xmlns:a16="http://schemas.microsoft.com/office/drawing/2014/main" id="{2BE58BA4-22A1-ABB5-039D-E96A936D1027}"/>
+                            </a:ext>
+                          </a:extLst>
+                        </p:cNvPr>
+                        <p:cNvSpPr txBox="1">
+                          <a:spLocks noRot="1" noChangeAspect="1" noMove="1" noResize="1" noEditPoints="1" noAdjustHandles="1" noChangeArrowheads="1" noChangeShapeType="1" noTextEdit="1"/>
+                        </p:cNvSpPr>
+                        <p:nvPr/>
+                      </p:nvSpPr>
+                      <p:spPr>
+                        <a:xfrm>
+                          <a:off x="6288893" y="1299374"/>
+                          <a:ext cx="738739" cy="153888"/>
+                        </a:xfrm>
+                        <a:prstGeom prst="rect">
+                          <a:avLst/>
+                        </a:prstGeom>
+                        <a:blipFill>
+                          <a:blip r:embed="rId7"/>
+                          <a:stretch>
+                            <a:fillRect l="-3390" t="-7692" r="-3390" b="-30769"/>
+                          </a:stretch>
+                        </a:blipFill>
+                      </p:spPr>
+                      <p:txBody>
+                        <a:bodyPr/>
+                        <a:lstStyle/>
+                        <a:p>
+                          <a:r>
+                            <a:rPr lang="en-US">
+                              <a:noFill/>
+                            </a:rPr>
+                            <a:t> </a:t>
+                          </a:r>
+                        </a:p>
+                      </p:txBody>
+                    </p:sp>
+                  </mc:Fallback>
+                </mc:AlternateContent>
+                <mc:AlternateContent xmlns:mc="http://schemas.openxmlformats.org/markup-compatibility/2006">
+                  <mc:Choice xmlns:a14="http://schemas.microsoft.com/office/drawing/2010/main" Requires="a14">
+                    <p:sp>
+                      <p:nvSpPr>
+                        <p:cNvPr id="32" name="TextBox 31">
+                          <a:extLst>
+                            <a:ext uri="{FF2B5EF4-FFF2-40B4-BE49-F238E27FC236}">
+                              <a16:creationId xmlns:a16="http://schemas.microsoft.com/office/drawing/2014/main" id="{78092802-0200-04DA-853D-32FFCFD8E616}"/>
+                            </a:ext>
+                          </a:extLst>
+                        </p:cNvPr>
+                        <p:cNvSpPr txBox="1"/>
+                        <p:nvPr/>
+                      </p:nvSpPr>
+                      <p:spPr>
+                        <a:xfrm>
+                          <a:off x="7599437" y="1874063"/>
+                          <a:ext cx="153618" cy="153888"/>
+                        </a:xfrm>
+                        <a:prstGeom prst="rect">
+                          <a:avLst/>
+                        </a:prstGeom>
+                        <a:noFill/>
+                      </p:spPr>
+                      <p:txBody>
+                        <a:bodyPr wrap="none" lIns="0" tIns="0" rIns="0" bIns="0" rtlCol="0">
+                          <a:spAutoFit/>
+                        </a:bodyPr>
+                        <a:lstStyle/>
+                        <a:p>
+                          <a:pPr/>
+                          <a14:m>
+                            <m:oMathPara xmlns:m="http://schemas.openxmlformats.org/officeDocument/2006/math">
+                              <m:oMathParaPr>
+                                <m:jc m:val="centerGroup"/>
+                              </m:oMathParaPr>
+                              <m:oMath xmlns:m="http://schemas.openxmlformats.org/officeDocument/2006/math">
+                                <m:sSub>
+                                  <m:sSubPr>
+                                    <m:ctrlPr>
+                                      <a:rPr lang="en-US" sz="1000" b="0" i="1" smtClean="0">
+                                        <a:latin typeface="Cambria Math" panose="02040503050406030204" pitchFamily="18" charset="0"/>
+                                      </a:rPr>
+                                    </m:ctrlPr>
+                                  </m:sSubPr>
+                                  <m:e>
+                                    <m:r>
+                                      <a:rPr lang="en-US" sz="1000" b="0" i="1" smtClean="0">
+                                        <a:latin typeface="Cambria Math" panose="02040503050406030204" pitchFamily="18" charset="0"/>
+                                      </a:rPr>
+                                      <m:t>𝐴</m:t>
+                                    </m:r>
+                                  </m:e>
+                                  <m:sub>
+                                    <m:r>
+                                      <a:rPr lang="en-US" sz="1000" b="0" i="1" smtClean="0">
+                                        <a:latin typeface="Cambria Math" panose="02040503050406030204" pitchFamily="18" charset="0"/>
+                                      </a:rPr>
+                                      <m:t>𝑖</m:t>
+                                    </m:r>
+                                  </m:sub>
+                                </m:sSub>
+                              </m:oMath>
+                            </m:oMathPara>
+                          </a14:m>
+                          <a:endParaRPr lang="en-US" sz="1000" dirty="0"/>
+                        </a:p>
+                      </p:txBody>
+                    </p:sp>
+                  </mc:Choice>
+                  <mc:Fallback>
+                    <p:sp>
+                      <p:nvSpPr>
+                        <p:cNvPr id="32" name="TextBox 31">
+                          <a:extLst>
+                            <a:ext uri="{FF2B5EF4-FFF2-40B4-BE49-F238E27FC236}">
+                              <a16:creationId xmlns:a16="http://schemas.microsoft.com/office/drawing/2014/main" id="{78092802-0200-04DA-853D-32FFCFD8E616}"/>
+                            </a:ext>
+                          </a:extLst>
+                        </p:cNvPr>
+                        <p:cNvSpPr txBox="1">
+                          <a:spLocks noRot="1" noChangeAspect="1" noMove="1" noResize="1" noEditPoints="1" noAdjustHandles="1" noChangeArrowheads="1" noChangeShapeType="1" noTextEdit="1"/>
+                        </p:cNvSpPr>
+                        <p:nvPr/>
+                      </p:nvSpPr>
+                      <p:spPr>
+                        <a:xfrm>
+                          <a:off x="7599437" y="1874063"/>
+                          <a:ext cx="153618" cy="153888"/>
+                        </a:xfrm>
+                        <a:prstGeom prst="rect">
+                          <a:avLst/>
+                        </a:prstGeom>
+                        <a:blipFill>
+                          <a:blip r:embed="rId8"/>
+                          <a:stretch>
+                            <a:fillRect l="-23077" r="-7692" b="-15385"/>
+                          </a:stretch>
+                        </a:blipFill>
+                      </p:spPr>
+                      <p:txBody>
+                        <a:bodyPr/>
+                        <a:lstStyle/>
+                        <a:p>
+                          <a:r>
+                            <a:rPr lang="en-US">
+                              <a:noFill/>
+                            </a:rPr>
+                            <a:t> </a:t>
+                          </a:r>
+                        </a:p>
+                      </p:txBody>
+                    </p:sp>
+                  </mc:Fallback>
+                </mc:AlternateContent>
+                <p:sp>
+                  <p:nvSpPr>
+                    <p:cNvPr id="35" name="Freeform 34">
+                      <a:extLst>
+                        <a:ext uri="{FF2B5EF4-FFF2-40B4-BE49-F238E27FC236}">
+                          <a16:creationId xmlns:a16="http://schemas.microsoft.com/office/drawing/2014/main" id="{A2F5A194-1ED3-EC75-8B0B-8728190CC44A}"/>
+                        </a:ext>
+                      </a:extLst>
+                    </p:cNvPr>
+                    <p:cNvSpPr/>
+                    <p:nvPr/>
+                  </p:nvSpPr>
+                  <p:spPr>
+                    <a:xfrm>
+                      <a:off x="7134169" y="1156509"/>
+                      <a:ext cx="1095016" cy="562794"/>
+                    </a:xfrm>
+                    <a:custGeom>
+                      <a:avLst/>
+                      <a:gdLst>
+                        <a:gd name="csX0" fmla="*/ 0 w 1403850"/>
+                        <a:gd name="csY0" fmla="*/ 409773 h 409773"/>
+                        <a:gd name="csX1" fmla="*/ 18971 w 1403850"/>
+                        <a:gd name="csY1" fmla="*/ 405979 h 409773"/>
+                        <a:gd name="csX2" fmla="*/ 34148 w 1403850"/>
+                        <a:gd name="csY2" fmla="*/ 402185 h 409773"/>
+                        <a:gd name="csX3" fmla="*/ 79678 w 1403850"/>
+                        <a:gd name="csY3" fmla="*/ 394596 h 409773"/>
+                        <a:gd name="csX4" fmla="*/ 91060 w 1403850"/>
+                        <a:gd name="csY4" fmla="*/ 387008 h 409773"/>
+                        <a:gd name="csX5" fmla="*/ 132797 w 1403850"/>
+                        <a:gd name="csY5" fmla="*/ 379419 h 409773"/>
+                        <a:gd name="csX6" fmla="*/ 170738 w 1403850"/>
+                        <a:gd name="csY6" fmla="*/ 368037 h 409773"/>
+                        <a:gd name="csX7" fmla="*/ 185915 w 1403850"/>
+                        <a:gd name="csY7" fmla="*/ 360448 h 409773"/>
+                        <a:gd name="csX8" fmla="*/ 220063 w 1403850"/>
+                        <a:gd name="csY8" fmla="*/ 371831 h 409773"/>
+                        <a:gd name="csX9" fmla="*/ 242828 w 1403850"/>
+                        <a:gd name="csY9" fmla="*/ 379419 h 409773"/>
+                        <a:gd name="csX10" fmla="*/ 254211 w 1403850"/>
+                        <a:gd name="csY10" fmla="*/ 383214 h 409773"/>
+                        <a:gd name="csX11" fmla="*/ 276976 w 1403850"/>
+                        <a:gd name="csY11" fmla="*/ 387008 h 409773"/>
+                        <a:gd name="csX12" fmla="*/ 303535 w 1403850"/>
+                        <a:gd name="csY12" fmla="*/ 383214 h 409773"/>
+                        <a:gd name="csX13" fmla="*/ 314918 w 1403850"/>
+                        <a:gd name="csY13" fmla="*/ 375625 h 409773"/>
+                        <a:gd name="csX14" fmla="*/ 333889 w 1403850"/>
+                        <a:gd name="csY14" fmla="*/ 364243 h 409773"/>
+                        <a:gd name="csX15" fmla="*/ 349065 w 1403850"/>
+                        <a:gd name="csY15" fmla="*/ 360448 h 409773"/>
+                        <a:gd name="csX16" fmla="*/ 364242 w 1403850"/>
+                        <a:gd name="csY16" fmla="*/ 352860 h 409773"/>
+                        <a:gd name="csX17" fmla="*/ 390801 w 1403850"/>
+                        <a:gd name="csY17" fmla="*/ 345272 h 409773"/>
+                        <a:gd name="csX18" fmla="*/ 405978 w 1403850"/>
+                        <a:gd name="csY18" fmla="*/ 337683 h 409773"/>
+                        <a:gd name="csX19" fmla="*/ 432538 w 1403850"/>
+                        <a:gd name="csY19" fmla="*/ 326301 h 409773"/>
+                        <a:gd name="csX20" fmla="*/ 455303 w 1403850"/>
+                        <a:gd name="csY20" fmla="*/ 307330 h 409773"/>
+                        <a:gd name="csX21" fmla="*/ 478068 w 1403850"/>
+                        <a:gd name="csY21" fmla="*/ 295947 h 409773"/>
+                        <a:gd name="csX22" fmla="*/ 489450 w 1403850"/>
+                        <a:gd name="csY22" fmla="*/ 288359 h 409773"/>
+                        <a:gd name="csX23" fmla="*/ 576717 w 1403850"/>
+                        <a:gd name="csY23" fmla="*/ 295947 h 409773"/>
+                        <a:gd name="csX24" fmla="*/ 614659 w 1403850"/>
+                        <a:gd name="csY24" fmla="*/ 292153 h 409773"/>
+                        <a:gd name="csX25" fmla="*/ 626041 w 1403850"/>
+                        <a:gd name="csY25" fmla="*/ 280770 h 409773"/>
+                        <a:gd name="csX26" fmla="*/ 641218 w 1403850"/>
+                        <a:gd name="csY26" fmla="*/ 254211 h 409773"/>
+                        <a:gd name="csX27" fmla="*/ 660189 w 1403850"/>
+                        <a:gd name="csY27" fmla="*/ 239034 h 409773"/>
+                        <a:gd name="csX28" fmla="*/ 675366 w 1403850"/>
+                        <a:gd name="csY28" fmla="*/ 235240 h 409773"/>
+                        <a:gd name="csX29" fmla="*/ 686748 w 1403850"/>
+                        <a:gd name="csY29" fmla="*/ 231446 h 409773"/>
+                        <a:gd name="csX30" fmla="*/ 709514 w 1403850"/>
+                        <a:gd name="csY30" fmla="*/ 235240 h 409773"/>
+                        <a:gd name="csX31" fmla="*/ 724690 w 1403850"/>
+                        <a:gd name="csY31" fmla="*/ 239034 h 409773"/>
+                        <a:gd name="csX32" fmla="*/ 743661 w 1403850"/>
+                        <a:gd name="csY32" fmla="*/ 235240 h 409773"/>
+                        <a:gd name="csX33" fmla="*/ 762632 w 1403850"/>
+                        <a:gd name="csY33" fmla="*/ 223858 h 409773"/>
+                        <a:gd name="csX34" fmla="*/ 777809 w 1403850"/>
+                        <a:gd name="csY34" fmla="*/ 216269 h 409773"/>
+                        <a:gd name="csX35" fmla="*/ 792986 w 1403850"/>
+                        <a:gd name="csY35" fmla="*/ 204887 h 409773"/>
+                        <a:gd name="csX36" fmla="*/ 830928 w 1403850"/>
+                        <a:gd name="csY36" fmla="*/ 182121 h 409773"/>
+                        <a:gd name="csX37" fmla="*/ 861281 w 1403850"/>
+                        <a:gd name="csY37" fmla="*/ 174533 h 409773"/>
+                        <a:gd name="csX38" fmla="*/ 887840 w 1403850"/>
+                        <a:gd name="csY38" fmla="*/ 166945 h 409773"/>
+                        <a:gd name="csX39" fmla="*/ 910606 w 1403850"/>
+                        <a:gd name="csY39" fmla="*/ 151768 h 409773"/>
+                        <a:gd name="csX40" fmla="*/ 940959 w 1403850"/>
+                        <a:gd name="csY40" fmla="*/ 125209 h 409773"/>
+                        <a:gd name="csX41" fmla="*/ 971313 w 1403850"/>
+                        <a:gd name="csY41" fmla="*/ 121414 h 409773"/>
+                        <a:gd name="csX42" fmla="*/ 994078 w 1403850"/>
+                        <a:gd name="csY42" fmla="*/ 129003 h 409773"/>
+                        <a:gd name="csX43" fmla="*/ 1039608 w 1403850"/>
+                        <a:gd name="csY43" fmla="*/ 121414 h 409773"/>
+                        <a:gd name="csX44" fmla="*/ 1077550 w 1403850"/>
+                        <a:gd name="csY44" fmla="*/ 117620 h 409773"/>
+                        <a:gd name="csX45" fmla="*/ 1142051 w 1403850"/>
+                        <a:gd name="csY45" fmla="*/ 110032 h 409773"/>
+                        <a:gd name="csX46" fmla="*/ 1157228 w 1403850"/>
+                        <a:gd name="csY46" fmla="*/ 102443 h 409773"/>
+                        <a:gd name="csX47" fmla="*/ 1176199 w 1403850"/>
+                        <a:gd name="csY47" fmla="*/ 94855 h 409773"/>
+                        <a:gd name="csX48" fmla="*/ 1206553 w 1403850"/>
+                        <a:gd name="csY48" fmla="*/ 68296 h 409773"/>
+                        <a:gd name="csX49" fmla="*/ 1217935 w 1403850"/>
+                        <a:gd name="csY49" fmla="*/ 60707 h 409773"/>
+                        <a:gd name="csX50" fmla="*/ 1236906 w 1403850"/>
+                        <a:gd name="csY50" fmla="*/ 45531 h 409773"/>
+                        <a:gd name="csX51" fmla="*/ 1255877 w 1403850"/>
+                        <a:gd name="csY51" fmla="*/ 30354 h 409773"/>
+                        <a:gd name="csX52" fmla="*/ 1290025 w 1403850"/>
+                        <a:gd name="csY52" fmla="*/ 18971 h 409773"/>
+                        <a:gd name="csX53" fmla="*/ 1301407 w 1403850"/>
+                        <a:gd name="csY53" fmla="*/ 11383 h 409773"/>
+                        <a:gd name="csX54" fmla="*/ 1316584 w 1403850"/>
+                        <a:gd name="csY54" fmla="*/ 7589 h 409773"/>
+                        <a:gd name="csX55" fmla="*/ 1346938 w 1403850"/>
+                        <a:gd name="csY55" fmla="*/ 0 h 409773"/>
+                        <a:gd name="csX56" fmla="*/ 1403850 w 1403850"/>
+                        <a:gd name="csY56" fmla="*/ 3795 h 409773"/>
+                      </a:gdLst>
+                      <a:ahLst/>
+                      <a:cxnLst>
+                        <a:cxn ang="0">
+                          <a:pos x="csX0" y="csY0"/>
+                        </a:cxn>
+                        <a:cxn ang="0">
+                          <a:pos x="csX1" y="csY1"/>
+                        </a:cxn>
+                        <a:cxn ang="0">
+                          <a:pos x="csX2" y="csY2"/>
+                        </a:cxn>
+                        <a:cxn ang="0">
+                          <a:pos x="csX3" y="csY3"/>
+                        </a:cxn>
+                        <a:cxn ang="0">
+                          <a:pos x="csX4" y="csY4"/>
+                        </a:cxn>
+                        <a:cxn ang="0">
+                          <a:pos x="csX5" y="csY5"/>
+                        </a:cxn>
+                        <a:cxn ang="0">
+                          <a:pos x="csX6" y="csY6"/>
+                        </a:cxn>
+                        <a:cxn ang="0">
+                          <a:pos x="csX7" y="csY7"/>
+                        </a:cxn>
+                        <a:cxn ang="0">
+                          <a:pos x="csX8" y="csY8"/>
+                        </a:cxn>
+                        <a:cxn ang="0">
+                          <a:pos x="csX9" y="csY9"/>
+                        </a:cxn>
+                        <a:cxn ang="0">
+                          <a:pos x="csX10" y="csY10"/>
+                        </a:cxn>
+                        <a:cxn ang="0">
+                          <a:pos x="csX11" y="csY11"/>
+                        </a:cxn>
+                        <a:cxn ang="0">
+                          <a:pos x="csX12" y="csY12"/>
+                        </a:cxn>
+                        <a:cxn ang="0">
+                          <a:pos x="csX13" y="csY13"/>
+                        </a:cxn>
+                        <a:cxn ang="0">
+                          <a:pos x="csX14" y="csY14"/>
+                        </a:cxn>
+                        <a:cxn ang="0">
+                          <a:pos x="csX15" y="csY15"/>
+                        </a:cxn>
+                        <a:cxn ang="0">
+                          <a:pos x="csX16" y="csY16"/>
+                        </a:cxn>
+                        <a:cxn ang="0">
+                          <a:pos x="csX17" y="csY17"/>
+                        </a:cxn>
+                        <a:cxn ang="0">
+                          <a:pos x="csX18" y="csY18"/>
+                        </a:cxn>
+                        <a:cxn ang="0">
+                          <a:pos x="csX19" y="csY19"/>
+                        </a:cxn>
+                        <a:cxn ang="0">
+                          <a:pos x="csX20" y="csY20"/>
+                        </a:cxn>
+                        <a:cxn ang="0">
+                          <a:pos x="csX21" y="csY21"/>
+                        </a:cxn>
+                        <a:cxn ang="0">
+                          <a:pos x="csX22" y="csY22"/>
+                        </a:cxn>
+                        <a:cxn ang="0">
+                          <a:pos x="csX23" y="csY23"/>
+                        </a:cxn>
+                        <a:cxn ang="0">
+                          <a:pos x="csX24" y="csY24"/>
+                        </a:cxn>
+                        <a:cxn ang="0">
+                          <a:pos x="csX25" y="csY25"/>
+                        </a:cxn>
+                        <a:cxn ang="0">
+                          <a:pos x="csX26" y="csY26"/>
+                        </a:cxn>
+                        <a:cxn ang="0">
+                          <a:pos x="csX27" y="csY27"/>
+                        </a:cxn>
+                        <a:cxn ang="0">
+                          <a:pos x="csX28" y="csY28"/>
+                        </a:cxn>
+                        <a:cxn ang="0">
+                          <a:pos x="csX29" y="csY29"/>
+                        </a:cxn>
+                        <a:cxn ang="0">
+                          <a:pos x="csX30" y="csY30"/>
+                        </a:cxn>
+                        <a:cxn ang="0">
+                          <a:pos x="csX31" y="csY31"/>
+                        </a:cxn>
+                        <a:cxn ang="0">
+                          <a:pos x="csX32" y="csY32"/>
+                        </a:cxn>
+                        <a:cxn ang="0">
+                          <a:pos x="csX33" y="csY33"/>
+                        </a:cxn>
+                        <a:cxn ang="0">
+                          <a:pos x="csX34" y="csY34"/>
+                        </a:cxn>
+                        <a:cxn ang="0">
+                          <a:pos x="csX35" y="csY35"/>
+                        </a:cxn>
+                        <a:cxn ang="0">
+                          <a:pos x="csX36" y="csY36"/>
+                        </a:cxn>
+                        <a:cxn ang="0">
+                          <a:pos x="csX37" y="csY37"/>
+                        </a:cxn>
+                        <a:cxn ang="0">
+                          <a:pos x="csX38" y="csY38"/>
+                        </a:cxn>
+                        <a:cxn ang="0">
+                          <a:pos x="csX39" y="csY39"/>
+                        </a:cxn>
+                        <a:cxn ang="0">
+                          <a:pos x="csX40" y="csY40"/>
+                        </a:cxn>
+                        <a:cxn ang="0">
+                          <a:pos x="csX41" y="csY41"/>
+                        </a:cxn>
+                        <a:cxn ang="0">
+                          <a:pos x="csX42" y="csY42"/>
+                        </a:cxn>
+                        <a:cxn ang="0">
+                          <a:pos x="csX43" y="csY43"/>
+                        </a:cxn>
+                        <a:cxn ang="0">
+                          <a:pos x="csX44" y="csY44"/>
+                        </a:cxn>
+                        <a:cxn ang="0">
+                          <a:pos x="csX45" y="csY45"/>
+                        </a:cxn>
+                        <a:cxn ang="0">
+                          <a:pos x="csX46" y="csY46"/>
+                        </a:cxn>
+                        <a:cxn ang="0">
+                          <a:pos x="csX47" y="csY47"/>
+                        </a:cxn>
+                        <a:cxn ang="0">
+                          <a:pos x="csX48" y="csY48"/>
+                        </a:cxn>
+                        <a:cxn ang="0">
+                          <a:pos x="csX49" y="csY49"/>
+                        </a:cxn>
+                        <a:cxn ang="0">
+                          <a:pos x="csX50" y="csY50"/>
+                        </a:cxn>
+                        <a:cxn ang="0">
+                          <a:pos x="csX51" y="csY51"/>
+                        </a:cxn>
+                        <a:cxn ang="0">
+                          <a:pos x="csX52" y="csY52"/>
+                        </a:cxn>
+                        <a:cxn ang="0">
+                          <a:pos x="csX53" y="csY53"/>
+                        </a:cxn>
+                        <a:cxn ang="0">
+                          <a:pos x="csX54" y="csY54"/>
+                        </a:cxn>
+                        <a:cxn ang="0">
+                          <a:pos x="csX55" y="csY55"/>
+                        </a:cxn>
+                        <a:cxn ang="0">
+                          <a:pos x="csX56" y="csY56"/>
+                        </a:cxn>
+                      </a:cxnLst>
+                      <a:rect l="l" t="t" r="r" b="b"/>
+                      <a:pathLst>
+                        <a:path w="1403850" h="409773">
+                          <a:moveTo>
+                            <a:pt x="0" y="409773"/>
+                          </a:moveTo>
+                          <a:cubicBezTo>
+                            <a:pt x="6324" y="408508"/>
+                            <a:pt x="12676" y="407378"/>
+                            <a:pt x="18971" y="405979"/>
+                          </a:cubicBezTo>
+                          <a:cubicBezTo>
+                            <a:pt x="24062" y="404848"/>
+                            <a:pt x="29023" y="403146"/>
+                            <a:pt x="34148" y="402185"/>
+                          </a:cubicBezTo>
+                          <a:cubicBezTo>
+                            <a:pt x="49270" y="399349"/>
+                            <a:pt x="79678" y="394596"/>
+                            <a:pt x="79678" y="394596"/>
+                          </a:cubicBezTo>
+                          <a:cubicBezTo>
+                            <a:pt x="83472" y="392067"/>
+                            <a:pt x="86790" y="388609"/>
+                            <a:pt x="91060" y="387008"/>
+                          </a:cubicBezTo>
+                          <a:cubicBezTo>
+                            <a:pt x="95705" y="385266"/>
+                            <a:pt x="129760" y="380026"/>
+                            <a:pt x="132797" y="379419"/>
+                          </a:cubicBezTo>
+                          <a:cubicBezTo>
+                            <a:pt x="141873" y="377604"/>
+                            <a:pt x="164287" y="371263"/>
+                            <a:pt x="170738" y="368037"/>
+                          </a:cubicBezTo>
+                          <a:lnTo>
+                            <a:pt x="185915" y="360448"/>
+                          </a:lnTo>
+                          <a:cubicBezTo>
+                            <a:pt x="222375" y="367742"/>
+                            <a:pt x="188643" y="359264"/>
+                            <a:pt x="220063" y="371831"/>
+                          </a:cubicBezTo>
+                          <a:cubicBezTo>
+                            <a:pt x="227490" y="374802"/>
+                            <a:pt x="235240" y="376890"/>
+                            <a:pt x="242828" y="379419"/>
+                          </a:cubicBezTo>
+                          <a:cubicBezTo>
+                            <a:pt x="246622" y="380684"/>
+                            <a:pt x="250266" y="382556"/>
+                            <a:pt x="254211" y="383214"/>
+                          </a:cubicBezTo>
+                          <a:lnTo>
+                            <a:pt x="276976" y="387008"/>
+                          </a:lnTo>
+                          <a:cubicBezTo>
+                            <a:pt x="285829" y="385743"/>
+                            <a:pt x="294969" y="385784"/>
+                            <a:pt x="303535" y="383214"/>
+                          </a:cubicBezTo>
+                          <a:cubicBezTo>
+                            <a:pt x="307903" y="381904"/>
+                            <a:pt x="311051" y="378042"/>
+                            <a:pt x="314918" y="375625"/>
+                          </a:cubicBezTo>
+                          <a:cubicBezTo>
+                            <a:pt x="321172" y="371717"/>
+                            <a:pt x="327150" y="367238"/>
+                            <a:pt x="333889" y="364243"/>
+                          </a:cubicBezTo>
+                          <a:cubicBezTo>
+                            <a:pt x="338654" y="362125"/>
+                            <a:pt x="344183" y="362279"/>
+                            <a:pt x="349065" y="360448"/>
+                          </a:cubicBezTo>
+                          <a:cubicBezTo>
+                            <a:pt x="354361" y="358462"/>
+                            <a:pt x="359043" y="355088"/>
+                            <a:pt x="364242" y="352860"/>
+                          </a:cubicBezTo>
+                          <a:cubicBezTo>
+                            <a:pt x="371861" y="349595"/>
+                            <a:pt x="383101" y="347197"/>
+                            <a:pt x="390801" y="345272"/>
+                          </a:cubicBezTo>
+                          <a:cubicBezTo>
+                            <a:pt x="395860" y="342742"/>
+                            <a:pt x="400779" y="339911"/>
+                            <a:pt x="405978" y="337683"/>
+                          </a:cubicBezTo>
+                          <a:cubicBezTo>
+                            <a:pt x="427261" y="328562"/>
+                            <a:pt x="407371" y="340682"/>
+                            <a:pt x="432538" y="326301"/>
+                          </a:cubicBezTo>
+                          <a:cubicBezTo>
+                            <a:pt x="450513" y="316029"/>
+                            <a:pt x="438191" y="321590"/>
+                            <a:pt x="455303" y="307330"/>
+                          </a:cubicBezTo>
+                          <a:cubicBezTo>
+                            <a:pt x="465112" y="299156"/>
+                            <a:pt x="466657" y="299750"/>
+                            <a:pt x="478068" y="295947"/>
+                          </a:cubicBezTo>
+                          <a:cubicBezTo>
+                            <a:pt x="481862" y="293418"/>
+                            <a:pt x="484899" y="288643"/>
+                            <a:pt x="489450" y="288359"/>
+                          </a:cubicBezTo>
+                          <a:cubicBezTo>
+                            <a:pt x="498255" y="287809"/>
+                            <a:pt x="563367" y="294612"/>
+                            <a:pt x="576717" y="295947"/>
+                          </a:cubicBezTo>
+                          <a:cubicBezTo>
+                            <a:pt x="589364" y="294682"/>
+                            <a:pt x="602511" y="295891"/>
+                            <a:pt x="614659" y="292153"/>
+                          </a:cubicBezTo>
+                          <a:cubicBezTo>
+                            <a:pt x="619787" y="290575"/>
+                            <a:pt x="622922" y="285136"/>
+                            <a:pt x="626041" y="280770"/>
+                          </a:cubicBezTo>
+                          <a:cubicBezTo>
+                            <a:pt x="633475" y="270363"/>
+                            <a:pt x="632262" y="263167"/>
+                            <a:pt x="641218" y="254211"/>
+                          </a:cubicBezTo>
+                          <a:cubicBezTo>
+                            <a:pt x="646944" y="248485"/>
+                            <a:pt x="653110" y="242967"/>
+                            <a:pt x="660189" y="239034"/>
+                          </a:cubicBezTo>
+                          <a:cubicBezTo>
+                            <a:pt x="664747" y="236502"/>
+                            <a:pt x="670352" y="236673"/>
+                            <a:pt x="675366" y="235240"/>
+                          </a:cubicBezTo>
+                          <a:cubicBezTo>
+                            <a:pt x="679211" y="234141"/>
+                            <a:pt x="682954" y="232711"/>
+                            <a:pt x="686748" y="231446"/>
+                          </a:cubicBezTo>
+                          <a:cubicBezTo>
+                            <a:pt x="694337" y="232711"/>
+                            <a:pt x="701970" y="233731"/>
+                            <a:pt x="709514" y="235240"/>
+                          </a:cubicBezTo>
+                          <a:cubicBezTo>
+                            <a:pt x="714627" y="236263"/>
+                            <a:pt x="719476" y="239034"/>
+                            <a:pt x="724690" y="239034"/>
+                          </a:cubicBezTo>
+                          <a:cubicBezTo>
+                            <a:pt x="731139" y="239034"/>
+                            <a:pt x="737337" y="236505"/>
+                            <a:pt x="743661" y="235240"/>
+                          </a:cubicBezTo>
+                          <a:cubicBezTo>
+                            <a:pt x="749985" y="231446"/>
+                            <a:pt x="756186" y="227439"/>
+                            <a:pt x="762632" y="223858"/>
+                          </a:cubicBezTo>
+                          <a:cubicBezTo>
+                            <a:pt x="767576" y="221111"/>
+                            <a:pt x="773013" y="219267"/>
+                            <a:pt x="777809" y="216269"/>
+                          </a:cubicBezTo>
+                          <a:cubicBezTo>
+                            <a:pt x="783171" y="212918"/>
+                            <a:pt x="787805" y="208513"/>
+                            <a:pt x="792986" y="204887"/>
+                          </a:cubicBezTo>
+                          <a:cubicBezTo>
+                            <a:pt x="800856" y="199378"/>
+                            <a:pt x="819750" y="185847"/>
+                            <a:pt x="830928" y="182121"/>
+                          </a:cubicBezTo>
+                          <a:cubicBezTo>
+                            <a:pt x="840822" y="178823"/>
+                            <a:pt x="851387" y="177831"/>
+                            <a:pt x="861281" y="174533"/>
+                          </a:cubicBezTo>
+                          <a:cubicBezTo>
+                            <a:pt x="877611" y="169090"/>
+                            <a:pt x="868784" y="171709"/>
+                            <a:pt x="887840" y="166945"/>
+                          </a:cubicBezTo>
+                          <a:cubicBezTo>
+                            <a:pt x="909751" y="134080"/>
+                            <a:pt x="877935" y="176271"/>
+                            <a:pt x="910606" y="151768"/>
+                          </a:cubicBezTo>
+                          <a:cubicBezTo>
+                            <a:pt x="966732" y="109673"/>
+                            <a:pt x="892405" y="149484"/>
+                            <a:pt x="940959" y="125209"/>
+                          </a:cubicBezTo>
+                          <a:cubicBezTo>
+                            <a:pt x="953172" y="112996"/>
+                            <a:pt x="946772" y="115279"/>
+                            <a:pt x="971313" y="121414"/>
+                          </a:cubicBezTo>
+                          <a:cubicBezTo>
+                            <a:pt x="979073" y="123354"/>
+                            <a:pt x="994078" y="129003"/>
+                            <a:pt x="994078" y="129003"/>
+                          </a:cubicBezTo>
+                          <a:cubicBezTo>
+                            <a:pt x="1009255" y="126473"/>
+                            <a:pt x="1024363" y="123493"/>
+                            <a:pt x="1039608" y="121414"/>
+                          </a:cubicBezTo>
+                          <a:cubicBezTo>
+                            <a:pt x="1052202" y="119697"/>
+                            <a:pt x="1064917" y="119024"/>
+                            <a:pt x="1077550" y="117620"/>
+                          </a:cubicBezTo>
+                          <a:lnTo>
+                            <a:pt x="1142051" y="110032"/>
+                          </a:lnTo>
+                          <a:cubicBezTo>
+                            <a:pt x="1147110" y="107502"/>
+                            <a:pt x="1152059" y="104740"/>
+                            <a:pt x="1157228" y="102443"/>
+                          </a:cubicBezTo>
+                          <a:cubicBezTo>
+                            <a:pt x="1163452" y="99677"/>
+                            <a:pt x="1170245" y="98162"/>
+                            <a:pt x="1176199" y="94855"/>
+                          </a:cubicBezTo>
+                          <a:cubicBezTo>
+                            <a:pt x="1212596" y="74636"/>
+                            <a:pt x="1169372" y="93086"/>
+                            <a:pt x="1206553" y="68296"/>
+                          </a:cubicBezTo>
+                          <a:lnTo>
+                            <a:pt x="1217935" y="60707"/>
+                          </a:lnTo>
+                          <a:cubicBezTo>
+                            <a:pt x="1233049" y="38036"/>
+                            <a:pt x="1216542" y="57750"/>
+                            <a:pt x="1236906" y="45531"/>
+                          </a:cubicBezTo>
+                          <a:cubicBezTo>
+                            <a:pt x="1255956" y="34100"/>
+                            <a:pt x="1231016" y="40713"/>
+                            <a:pt x="1255877" y="30354"/>
+                          </a:cubicBezTo>
+                          <a:cubicBezTo>
+                            <a:pt x="1266952" y="25739"/>
+                            <a:pt x="1280042" y="25627"/>
+                            <a:pt x="1290025" y="18971"/>
+                          </a:cubicBezTo>
+                          <a:cubicBezTo>
+                            <a:pt x="1293819" y="16442"/>
+                            <a:pt x="1297216" y="13179"/>
+                            <a:pt x="1301407" y="11383"/>
+                          </a:cubicBezTo>
+                          <a:cubicBezTo>
+                            <a:pt x="1306200" y="9329"/>
+                            <a:pt x="1311570" y="9021"/>
+                            <a:pt x="1316584" y="7589"/>
+                          </a:cubicBezTo>
+                          <a:cubicBezTo>
+                            <a:pt x="1343814" y="-190"/>
+                            <a:pt x="1308359" y="7717"/>
+                            <a:pt x="1346938" y="0"/>
+                          </a:cubicBezTo>
+                          <a:cubicBezTo>
+                            <a:pt x="1398784" y="3989"/>
+                            <a:pt x="1379772" y="3795"/>
+                            <a:pt x="1403850" y="3795"/>
+                          </a:cubicBezTo>
+                        </a:path>
+                      </a:pathLst>
+                    </a:custGeom>
+                    <a:noFill/>
+                    <a:ln>
+                      <a:solidFill>
+                        <a:srgbClr val="0432FF"/>
+                      </a:solidFill>
+                    </a:ln>
+                  </p:spPr>
+                  <p:style>
+                    <a:lnRef idx="2">
+                      <a:schemeClr val="accent1">
+                        <a:shade val="15000"/>
+                      </a:schemeClr>
+                    </a:lnRef>
+                    <a:fillRef idx="1">
+                      <a:schemeClr val="accent1"/>
+                    </a:fillRef>
+                    <a:effectRef idx="0">
+                      <a:schemeClr val="accent1"/>
+                    </a:effectRef>
+                    <a:fontRef idx="minor">
+                      <a:schemeClr val="lt1"/>
+                    </a:fontRef>
+                  </p:style>
+                  <p:txBody>
+                    <a:bodyPr rtlCol="0" anchor="ctr"/>
+                    <a:lstStyle/>
+                    <a:p>
+                      <a:pPr algn="ctr"/>
+                      <a:endParaRPr lang="en-US" sz="1200" dirty="0"/>
+                    </a:p>
+                  </p:txBody>
+                </p:sp>
+                <p:cxnSp>
+                  <p:nvCxnSpPr>
+                    <p:cNvPr id="40" name="Straight Arrow Connector 39">
+                      <a:extLst>
+                        <a:ext uri="{FF2B5EF4-FFF2-40B4-BE49-F238E27FC236}">
+                          <a16:creationId xmlns:a16="http://schemas.microsoft.com/office/drawing/2014/main" id="{3E016420-5927-FD32-0FCE-83E364F87D86}"/>
+                        </a:ext>
+                      </a:extLst>
+                    </p:cNvPr>
+                    <p:cNvCxnSpPr>
+                      <a:cxnSpLocks/>
+                    </p:cNvCxnSpPr>
+                    <p:nvPr/>
+                  </p:nvCxnSpPr>
+                  <p:spPr>
+                    <a:xfrm>
+                      <a:off x="7067002" y="1052739"/>
+                      <a:ext cx="0" cy="948842"/>
+                    </a:xfrm>
+                    <a:prstGeom prst="straightConnector1">
+                      <a:avLst/>
+                    </a:prstGeom>
+                    <a:ln>
+                      <a:solidFill>
+                        <a:schemeClr val="tx1"/>
+                      </a:solidFill>
+                      <a:headEnd type="triangle"/>
+                      <a:tailEnd type="triangle"/>
+                    </a:ln>
+                  </p:spPr>
+                  <p:style>
+                    <a:lnRef idx="2">
+                      <a:schemeClr val="accent1"/>
+                    </a:lnRef>
+                    <a:fillRef idx="0">
+                      <a:schemeClr val="accent1"/>
+                    </a:fillRef>
+                    <a:effectRef idx="1">
+                      <a:schemeClr val="accent1"/>
+                    </a:effectRef>
+                    <a:fontRef idx="minor">
+                      <a:schemeClr val="tx1"/>
+                    </a:fontRef>
+                  </p:style>
+                </p:cxnSp>
+                <p:cxnSp>
+                  <p:nvCxnSpPr>
+                    <p:cNvPr id="41" name="Straight Arrow Connector 40">
+                      <a:extLst>
+                        <a:ext uri="{FF2B5EF4-FFF2-40B4-BE49-F238E27FC236}">
+                          <a16:creationId xmlns:a16="http://schemas.microsoft.com/office/drawing/2014/main" id="{80B21997-826F-5CDA-BDC4-DE7298E6ED90}"/>
+                        </a:ext>
+                      </a:extLst>
+                    </p:cNvPr>
+                    <p:cNvCxnSpPr>
+                      <a:cxnSpLocks/>
+                    </p:cNvCxnSpPr>
+                    <p:nvPr/>
+                  </p:nvCxnSpPr>
+                  <p:spPr>
+                    <a:xfrm>
+                      <a:off x="6899006" y="1829061"/>
+                      <a:ext cx="1554480" cy="0"/>
+                    </a:xfrm>
+                    <a:prstGeom prst="straightConnector1">
+                      <a:avLst/>
+                    </a:prstGeom>
+                    <a:ln>
+                      <a:solidFill>
+                        <a:schemeClr val="tx1"/>
+                      </a:solidFill>
+                      <a:headEnd type="triangle"/>
+                      <a:tailEnd type="triangle"/>
+                    </a:ln>
+                  </p:spPr>
+                  <p:style>
+                    <a:lnRef idx="2">
+                      <a:schemeClr val="accent1"/>
+                    </a:lnRef>
+                    <a:fillRef idx="0">
+                      <a:schemeClr val="accent1"/>
+                    </a:fillRef>
+                    <a:effectRef idx="1">
+                      <a:schemeClr val="accent1"/>
+                    </a:effectRef>
+                    <a:fontRef idx="minor">
+                      <a:schemeClr val="tx1"/>
+                    </a:fontRef>
+                  </p:style>
+                </p:cxnSp>
+              </p:grpSp>
+            </p:grpSp>
+          </p:grpSp>
+        </p:grpSp>
+      </p:grpSp>
+      <p:grpSp>
+        <p:nvGrpSpPr>
           <p:cNvPr id="11" name="Group 10">
             <a:extLst>
               <a:ext uri="{FF2B5EF4-FFF2-40B4-BE49-F238E27FC236}">
@@ -3606,10 +6674,10 @@
         </p:nvGrpSpPr>
         <p:grpSpPr>
           <a:xfrm>
-            <a:off x="451691" y="1464708"/>
-            <a:ext cx="4516915" cy="2291852"/>
-            <a:chOff x="451691" y="1835634"/>
-            <a:chExt cx="3613533" cy="2291852"/>
+            <a:off x="308112" y="3548422"/>
+            <a:ext cx="4536028" cy="1536048"/>
+            <a:chOff x="436400" y="1835634"/>
+            <a:chExt cx="3628824" cy="1536048"/>
           </a:xfrm>
         </p:grpSpPr>
         <p:sp>
@@ -3640,7 +6708,6 @@
             </a:bodyPr>
             <a:lstStyle/>
             <a:p>
-              <a:pPr algn="ctr"/>
               <a:r>
                 <a:rPr lang="en-US" sz="1400" dirty="0">
                   <a:solidFill>
@@ -3649,7 +6716,7 @@
                   <a:latin typeface="Futura Medium" panose="020B0602020204020303" pitchFamily="34" charset="-79"/>
                   <a:cs typeface="Futura Medium" panose="020B0602020204020303" pitchFamily="34" charset="-79"/>
                 </a:rPr>
-                <a:t>Unified Selection Score Equation</a:t>
+                <a:t>2. Unified Selection Score Equation</a:t>
               </a:r>
               <a:endParaRPr lang="en-US" sz="1400" dirty="0">
                 <a:solidFill>
@@ -3675,8 +6742,8 @@
               </p:nvSpPr>
               <p:spPr>
                 <a:xfrm>
-                  <a:off x="451691" y="2011970"/>
-                  <a:ext cx="3613533" cy="2115516"/>
+                  <a:off x="436400" y="2048243"/>
+                  <a:ext cx="3613533" cy="1323439"/>
                 </a:xfrm>
                 <a:prstGeom prst="rect">
                   <a:avLst/>
@@ -3689,11 +6756,7 @@
                 </a:bodyPr>
                 <a:lstStyle/>
                 <a:p>
-                  <a:pPr algn="ctr">
-                    <a:lnSpc>
-                      <a:spcPct val="150000"/>
-                    </a:lnSpc>
-                  </a:pPr>
+                  <a:pPr algn="ctr"/>
                   <a:r>
                     <a:rPr lang="en-US" sz="1400" b="0" dirty="0"/>
                     <a:t>     </a:t>
@@ -3849,24 +6912,19 @@
                   </a:endParaRPr>
                 </a:p>
                 <a:p>
-                  <a:pPr>
-                    <a:lnSpc>
-                      <a:spcPct val="150000"/>
-                    </a:lnSpc>
-                  </a:pPr>
                   <a14:m>
                     <m:oMath xmlns:m="http://schemas.openxmlformats.org/officeDocument/2006/math">
                       <m:sSub>
                         <m:sSubPr>
                           <m:ctrlPr>
-                            <a:rPr lang="en-US" sz="1400" b="0" i="1" dirty="0" smtClean="0">
+                            <a:rPr lang="en-US" sz="1200" b="0" i="1" dirty="0" smtClean="0">
                               <a:latin typeface="Cambria Math" panose="02040503050406030204" pitchFamily="18" charset="0"/>
                             </a:rPr>
                           </m:ctrlPr>
                         </m:sSubPr>
                         <m:e>
                           <m:r>
-                            <a:rPr lang="en-US" sz="1400" b="0" i="1" dirty="0" smtClean="0">
+                            <a:rPr lang="en-US" sz="1200" b="0" i="1" dirty="0" smtClean="0">
                               <a:latin typeface="Cambria Math" panose="02040503050406030204" pitchFamily="18" charset="0"/>
                             </a:rPr>
                             <m:t>𝑆</m:t>
@@ -3874,7 +6932,7 @@
                         </m:e>
                         <m:sub>
                           <m:r>
-                            <a:rPr lang="en-US" sz="1400" b="0" i="1" dirty="0" smtClean="0">
+                            <a:rPr lang="en-US" sz="1200" b="0" i="1" dirty="0" smtClean="0">
                               <a:latin typeface="Cambria Math" panose="02040503050406030204" pitchFamily="18" charset="0"/>
                             </a:rPr>
                             <m:t>𝑖</m:t>
@@ -3882,13 +6940,13 @@
                         </m:sub>
                       </m:sSub>
                       <m:r>
-                        <a:rPr lang="en-US" sz="1400" i="1" dirty="0">
+                        <a:rPr lang="en-US" sz="1200" i="1" dirty="0">
                           <a:latin typeface="Cambria Math" panose="02040503050406030204" pitchFamily="18" charset="0"/>
                         </a:rPr>
                         <m:t>=</m:t>
                       </m:r>
                       <m:r>
-                        <a:rPr lang="en-US" sz="1400" i="1" dirty="0" smtClean="0">
+                        <a:rPr lang="en-US" sz="1200" i="1" dirty="0" smtClean="0">
                           <a:latin typeface="Cambria Math" panose="02040503050406030204" pitchFamily="18" charset="0"/>
                         </a:rPr>
                         <m:t> </m:t>
@@ -3901,752 +6959,6 @@
                   </a:r>
                 </a:p>
                 <a:p>
-                  <a:pPr>
-                    <a:lnSpc>
-                      <a:spcPct val="150000"/>
-                    </a:lnSpc>
-                  </a:pPr>
-                  <a14:m>
-                    <m:oMath xmlns:m="http://schemas.openxmlformats.org/officeDocument/2006/math">
-                      <m:sSub>
-                        <m:sSubPr>
-                          <m:ctrlPr>
-                            <a:rPr lang="en-US" sz="1400" i="1" dirty="0" smtClean="0">
-                              <a:latin typeface="Cambria Math" panose="02040503050406030204" pitchFamily="18" charset="0"/>
-                            </a:rPr>
-                          </m:ctrlPr>
-                        </m:sSubPr>
-                        <m:e>
-                          <m:r>
-                            <a:rPr lang="en-US" sz="1400" i="1" dirty="0" smtClean="0">
-                              <a:latin typeface="Cambria Math" panose="02040503050406030204" pitchFamily="18" charset="0"/>
-                            </a:rPr>
-                            <m:t>𝐴</m:t>
-                          </m:r>
-                        </m:e>
-                        <m:sub>
-                          <m:r>
-                            <a:rPr lang="en-US" sz="1400" i="1" dirty="0" smtClean="0">
-                              <a:latin typeface="Cambria Math" panose="02040503050406030204" pitchFamily="18" charset="0"/>
-                            </a:rPr>
-                            <m:t>𝑖</m:t>
-                          </m:r>
-                        </m:sub>
-                      </m:sSub>
-                      <m:r>
-                        <a:rPr lang="en-US" sz="1400" i="1" dirty="0" smtClean="0">
-                          <a:latin typeface="Cambria Math" panose="02040503050406030204" pitchFamily="18" charset="0"/>
-                        </a:rPr>
-                        <m:t>=</m:t>
-                      </m:r>
-                      <m:r>
-                        <a:rPr lang="en-US" sz="1400" i="1" dirty="0">
-                          <a:latin typeface="Cambria Math" panose="02040503050406030204" pitchFamily="18" charset="0"/>
-                        </a:rPr>
-                        <m:t> </m:t>
-                      </m:r>
-                    </m:oMath>
-                  </a14:m>
-                  <a:r>
-                    <a:rPr lang="en-US" sz="1200" dirty="0"/>
-                    <a:t>individual performance metric</a:t>
-                  </a:r>
-                </a:p>
-                <a:p>
-                  <a:pPr>
-                    <a:lnSpc>
-                      <a:spcPct val="150000"/>
-                    </a:lnSpc>
-                  </a:pPr>
-                  <a14:m>
-                    <m:oMath xmlns:m="http://schemas.openxmlformats.org/officeDocument/2006/math">
-                      <m:r>
-                        <a:rPr lang="en-US" sz="1400" i="1" dirty="0" smtClean="0">
-                          <a:latin typeface="Cambria Math" panose="02040503050406030204" pitchFamily="18" charset="0"/>
-                        </a:rPr>
-                        <m:t>𝜆</m:t>
-                      </m:r>
-                      <m:r>
-                        <a:rPr lang="en-US" sz="1400" i="1" dirty="0" smtClean="0">
-                          <a:latin typeface="Cambria Math" panose="02040503050406030204" pitchFamily="18" charset="0"/>
-                        </a:rPr>
-                        <m:t>=</m:t>
-                      </m:r>
-                    </m:oMath>
-                  </a14:m>
-                  <a:r>
-                    <a:rPr lang="en-US" sz="1200" dirty="0"/>
-                    <a:t> environmental weight</a:t>
-                  </a:r>
-                </a:p>
-                <a:p>
-                  <a:pPr>
-                    <a:lnSpc>
-                      <a:spcPct val="150000"/>
-                    </a:lnSpc>
-                  </a:pPr>
-                  <a:r>
-                    <a:rPr lang="en-US" sz="1400" dirty="0"/>
-                    <a:t>environmental impact</a:t>
-                  </a:r>
-                </a:p>
-                <a:p>
-                  <a:pPr>
-                    <a:lnSpc>
-                      <a:spcPct val="150000"/>
-                    </a:lnSpc>
-                  </a:pPr>
-                  <a14:m>
-                    <m:oMath xmlns:m="http://schemas.openxmlformats.org/officeDocument/2006/math">
-                      <m:sSub>
-                        <m:sSubPr>
-                          <m:ctrlPr>
-                            <a:rPr lang="en-US" sz="1400" b="0" i="1" smtClean="0">
-                              <a:latin typeface="Cambria Math" panose="02040503050406030204" pitchFamily="18" charset="0"/>
-                            </a:rPr>
-                          </m:ctrlPr>
-                        </m:sSubPr>
-                        <m:e>
-                          <m:r>
-                            <a:rPr lang="en-US" sz="1400" b="0" i="1" smtClean="0">
-                              <a:latin typeface="Cambria Math" panose="02040503050406030204" pitchFamily="18" charset="0"/>
-                            </a:rPr>
-                            <m:t>𝐿</m:t>
-                          </m:r>
-                        </m:e>
-                        <m:sub>
-                          <m:r>
-                            <a:rPr lang="en-US" sz="1400" b="0" i="1" smtClean="0">
-                              <a:latin typeface="Cambria Math" panose="02040503050406030204" pitchFamily="18" charset="0"/>
-                            </a:rPr>
-                            <m:t>𝑛𝑒𝑡</m:t>
-                          </m:r>
-                        </m:sub>
-                      </m:sSub>
-                      <m:r>
-                        <a:rPr lang="en-US" sz="1400" b="0" i="1" smtClean="0">
-                          <a:latin typeface="Cambria Math" panose="02040503050406030204" pitchFamily="18" charset="0"/>
-                        </a:rPr>
-                        <m:t>=</m:t>
-                      </m:r>
-                      <m:r>
-                        <a:rPr lang="en-US" sz="1400" b="0" i="1" smtClean="0">
-                          <a:latin typeface="Cambria Math" panose="02040503050406030204" pitchFamily="18" charset="0"/>
-                        </a:rPr>
-                        <m:t>𝐵</m:t>
-                      </m:r>
-                      <m:r>
-                        <a:rPr lang="en-US" sz="1400" b="0" i="1" smtClean="0">
-                          <a:latin typeface="Cambria Math" panose="02040503050406030204" pitchFamily="18" charset="0"/>
-                        </a:rPr>
-                        <m:t>−</m:t>
-                      </m:r>
-                      <m:r>
-                        <a:rPr lang="en-US" sz="1400" b="0" i="1" smtClean="0">
-                          <a:latin typeface="Cambria Math" panose="02040503050406030204" pitchFamily="18" charset="0"/>
-                        </a:rPr>
-                        <m:t>𝐷</m:t>
-                      </m:r>
-                    </m:oMath>
-                  </a14:m>
-                  <a:r>
-                    <a:rPr lang="en-US" sz="1400" dirty="0"/>
-                    <a:t>     (</a:t>
-                  </a:r>
-                  <a14:m>
-                    <m:oMath xmlns:m="http://schemas.openxmlformats.org/officeDocument/2006/math">
-                      <m:r>
-                        <a:rPr lang="en-US" sz="1400" i="1" dirty="0" smtClean="0">
-                          <a:latin typeface="Cambria Math" panose="02040503050406030204" pitchFamily="18" charset="0"/>
-                        </a:rPr>
-                        <m:t>𝐵</m:t>
-                      </m:r>
-                      <m:r>
-                        <a:rPr lang="en-US" sz="1400" b="0" i="1" dirty="0" smtClean="0">
-                          <a:latin typeface="Cambria Math" panose="02040503050406030204" pitchFamily="18" charset="0"/>
-                        </a:rPr>
-                        <m:t>≈</m:t>
-                      </m:r>
-                    </m:oMath>
-                  </a14:m>
-                  <a:r>
-                    <a:rPr lang="en-US" sz="1200" dirty="0"/>
-                    <a:t> benefits</a:t>
-                  </a:r>
-                  <a:r>
-                    <a:rPr lang="en-US" sz="1400" dirty="0"/>
-                    <a:t>,  </a:t>
-                  </a:r>
-                  <a14:m>
-                    <m:oMath xmlns:m="http://schemas.openxmlformats.org/officeDocument/2006/math">
-                      <m:r>
-                        <a:rPr lang="en-US" sz="1400" b="0" i="1" smtClean="0">
-                          <a:latin typeface="Cambria Math" panose="02040503050406030204" pitchFamily="18" charset="0"/>
-                        </a:rPr>
-                        <m:t>𝐷</m:t>
-                      </m:r>
-                      <m:r>
-                        <a:rPr lang="en-US" sz="1400" b="0" i="1" smtClean="0">
-                          <a:latin typeface="Cambria Math" panose="02040503050406030204" pitchFamily="18" charset="0"/>
-                        </a:rPr>
-                        <m:t>≈</m:t>
-                      </m:r>
-                    </m:oMath>
-                  </a14:m>
-                  <a:r>
-                    <a:rPr lang="en-US" sz="1200" dirty="0"/>
-                    <a:t> drawbacks</a:t>
-                  </a:r>
-                  <a:r>
-                    <a:rPr lang="en-US" sz="1400" dirty="0"/>
-                    <a:t>)</a:t>
-                  </a:r>
-                </a:p>
-              </p:txBody>
-            </p:sp>
-          </mc:Choice>
-          <mc:Fallback>
-            <p:sp>
-              <p:nvSpPr>
-                <p:cNvPr id="6" name="TextBox 5">
-                  <a:extLst>
-                    <a:ext uri="{FF2B5EF4-FFF2-40B4-BE49-F238E27FC236}">
-                      <a16:creationId xmlns:a16="http://schemas.microsoft.com/office/drawing/2014/main" id="{D1D1ECB8-4444-68F0-367A-195A32F205DE}"/>
-                    </a:ext>
-                  </a:extLst>
-                </p:cNvPr>
-                <p:cNvSpPr txBox="1">
-                  <a:spLocks noRot="1" noChangeAspect="1" noMove="1" noResize="1" noEditPoints="1" noAdjustHandles="1" noChangeArrowheads="1" noChangeShapeType="1" noTextEdit="1"/>
-                </p:cNvSpPr>
-                <p:nvPr/>
-              </p:nvSpPr>
-              <p:spPr>
-                <a:xfrm>
-                  <a:off x="451691" y="2011970"/>
-                  <a:ext cx="3613533" cy="2115516"/>
-                </a:xfrm>
-                <a:prstGeom prst="rect">
-                  <a:avLst/>
-                </a:prstGeom>
-                <a:blipFill>
-                  <a:blip r:embed="rId3"/>
-                  <a:stretch>
-                    <a:fillRect l="-280" b="-2395"/>
-                  </a:stretch>
-                </a:blipFill>
-              </p:spPr>
-              <p:txBody>
-                <a:bodyPr/>
-                <a:lstStyle/>
-                <a:p>
-                  <a:r>
-                    <a:rPr lang="en-US">
-                      <a:noFill/>
-                    </a:rPr>
-                    <a:t> </a:t>
-                  </a:r>
-                </a:p>
-              </p:txBody>
-            </p:sp>
-          </mc:Fallback>
-        </mc:AlternateContent>
-      </p:grpSp>
-      <p:grpSp>
-        <p:nvGrpSpPr>
-          <p:cNvPr id="10" name="Group 9">
-            <a:extLst>
-              <a:ext uri="{FF2B5EF4-FFF2-40B4-BE49-F238E27FC236}">
-                <a16:creationId xmlns:a16="http://schemas.microsoft.com/office/drawing/2014/main" id="{37749C4F-EE9C-B1EA-1134-44EC02293BA7}"/>
-              </a:ext>
-            </a:extLst>
-          </p:cNvPr>
-          <p:cNvGrpSpPr/>
-          <p:nvPr/>
-        </p:nvGrpSpPr>
-        <p:grpSpPr>
-          <a:xfrm>
-            <a:off x="451691" y="3932896"/>
-            <a:ext cx="4516916" cy="2860268"/>
-            <a:chOff x="6222694" y="1954025"/>
-            <a:chExt cx="3261913" cy="2725201"/>
-          </a:xfrm>
-        </p:grpSpPr>
-        <p:sp>
-          <p:nvSpPr>
-            <p:cNvPr id="8" name="TextBox 7">
-              <a:extLst>
-                <a:ext uri="{FF2B5EF4-FFF2-40B4-BE49-F238E27FC236}">
-                  <a16:creationId xmlns:a16="http://schemas.microsoft.com/office/drawing/2014/main" id="{A7736192-DD40-FDF1-097C-DDB6E6B0FEC8}"/>
-                </a:ext>
-              </a:extLst>
-            </p:cNvPr>
-            <p:cNvSpPr txBox="1"/>
-            <p:nvPr/>
-          </p:nvSpPr>
-          <p:spPr>
-            <a:xfrm>
-              <a:off x="6222694" y="1954025"/>
-              <a:ext cx="3261912" cy="307777"/>
-            </a:xfrm>
-            <a:prstGeom prst="rect">
-              <a:avLst/>
-            </a:prstGeom>
-            <a:noFill/>
-          </p:spPr>
-          <p:txBody>
-            <a:bodyPr wrap="square" rtlCol="0">
-              <a:spAutoFit/>
-            </a:bodyPr>
-            <a:lstStyle/>
-            <a:p>
-              <a:pPr algn="ctr"/>
-              <a:r>
-                <a:rPr lang="en-US" sz="1400" dirty="0">
-                  <a:solidFill>
-                    <a:srgbClr val="0432FF"/>
-                  </a:solidFill>
-                  <a:latin typeface="Futura Medium" panose="020B0602020204020303" pitchFamily="34" charset="-79"/>
-                  <a:cs typeface="Futura Medium" panose="020B0602020204020303" pitchFamily="34" charset="-79"/>
-                </a:rPr>
-                <a:t>Congestion Equation v1</a:t>
-              </a:r>
-              <a:endParaRPr lang="en-US" sz="1400" dirty="0">
-                <a:solidFill>
-                  <a:srgbClr val="0432FF"/>
-                </a:solidFill>
-              </a:endParaRPr>
-            </a:p>
-          </p:txBody>
-        </p:sp>
-        <mc:AlternateContent xmlns:mc="http://schemas.openxmlformats.org/markup-compatibility/2006">
-          <mc:Choice xmlns:a14="http://schemas.microsoft.com/office/drawing/2010/main" Requires="a14">
-            <p:sp>
-              <p:nvSpPr>
-                <p:cNvPr id="9" name="TextBox 8">
-                  <a:extLst>
-                    <a:ext uri="{FF2B5EF4-FFF2-40B4-BE49-F238E27FC236}">
-                      <a16:creationId xmlns:a16="http://schemas.microsoft.com/office/drawing/2014/main" id="{6A98D608-4F63-807E-D1C7-797CA0D726D8}"/>
-                    </a:ext>
-                  </a:extLst>
-                </p:cNvPr>
-                <p:cNvSpPr txBox="1"/>
-                <p:nvPr/>
-              </p:nvSpPr>
-              <p:spPr>
-                <a:xfrm>
-                  <a:off x="6222695" y="2107914"/>
-                  <a:ext cx="3261912" cy="2571312"/>
-                </a:xfrm>
-                <a:prstGeom prst="rect">
-                  <a:avLst/>
-                </a:prstGeom>
-                <a:noFill/>
-              </p:spPr>
-              <p:txBody>
-                <a:bodyPr wrap="square" rtlCol="0">
-                  <a:spAutoFit/>
-                </a:bodyPr>
-                <a:lstStyle/>
-                <a:p>
-                  <a:pPr>
-                    <a:lnSpc>
-                      <a:spcPct val="150000"/>
-                    </a:lnSpc>
-                  </a:pPr>
-                  <a:r>
-                    <a:rPr lang="en-US" b="0" dirty="0"/>
-                    <a:t>  </a:t>
-                  </a:r>
-                  <a14:m>
-                    <m:oMath xmlns:m="http://schemas.openxmlformats.org/officeDocument/2006/math">
-                      <m:d>
-                        <m:dPr>
-                          <m:ctrlPr>
-                            <a:rPr lang="en-US" sz="1400" b="0" i="1" dirty="0" smtClean="0">
-                              <a:latin typeface="Cambria Math" panose="02040503050406030204" pitchFamily="18" charset="0"/>
-                            </a:rPr>
-                          </m:ctrlPr>
-                        </m:dPr>
-                        <m:e>
-                          <m:r>
-                            <a:rPr lang="en-US" sz="1400" b="0" i="1" dirty="0" smtClean="0">
-                              <a:latin typeface="Cambria Math" panose="02040503050406030204" pitchFamily="18" charset="0"/>
-                            </a:rPr>
-                            <m:t>𝐵</m:t>
-                          </m:r>
-                          <m:r>
-                            <a:rPr lang="en-US" sz="1400" b="0" i="1" dirty="0" smtClean="0">
-                              <a:latin typeface="Cambria Math" panose="02040503050406030204" pitchFamily="18" charset="0"/>
-                            </a:rPr>
-                            <m:t>−</m:t>
-                          </m:r>
-                          <m:r>
-                            <a:rPr lang="en-US" sz="1400" b="0" i="1" dirty="0" smtClean="0">
-                              <a:latin typeface="Cambria Math" panose="02040503050406030204" pitchFamily="18" charset="0"/>
-                            </a:rPr>
-                            <m:t>𝐷</m:t>
-                          </m:r>
-                        </m:e>
-                      </m:d>
-                      <m:r>
-                        <a:rPr lang="en-US" sz="1400" b="0" i="1" dirty="0" smtClean="0">
-                          <a:latin typeface="Cambria Math" panose="02040503050406030204" pitchFamily="18" charset="0"/>
-                        </a:rPr>
-                        <m:t>=−</m:t>
-                      </m:r>
-                      <m:sSub>
-                        <m:sSubPr>
-                          <m:ctrlPr>
-                            <a:rPr lang="en-US" sz="1400" b="0" i="1" dirty="0" smtClean="0">
-                              <a:latin typeface="Cambria Math" panose="02040503050406030204" pitchFamily="18" charset="0"/>
-                            </a:rPr>
-                          </m:ctrlPr>
-                        </m:sSubPr>
-                        <m:e>
-                          <m:r>
-                            <a:rPr lang="en-US" sz="1400" b="0" i="1" dirty="0" smtClean="0">
-                              <a:latin typeface="Cambria Math" panose="02040503050406030204" pitchFamily="18" charset="0"/>
-                            </a:rPr>
-                            <m:t>𝐿</m:t>
-                          </m:r>
-                        </m:e>
-                        <m:sub>
-                          <m:r>
-                            <a:rPr lang="en-US" sz="1400" b="0" i="1" dirty="0" smtClean="0">
-                              <a:latin typeface="Cambria Math" panose="02040503050406030204" pitchFamily="18" charset="0"/>
-                            </a:rPr>
-                            <m:t>𝐶</m:t>
-                          </m:r>
-                        </m:sub>
-                      </m:sSub>
-                    </m:oMath>
-                  </a14:m>
-                  <a:r>
-                    <a:rPr lang="en-US" b="0" dirty="0"/>
-                    <a:t>  </a:t>
-                  </a:r>
-                  <a:r>
-                    <a:rPr lang="en-US" sz="1200" b="0" dirty="0"/>
-                    <a:t>(congestion)</a:t>
-                  </a:r>
-                  <a:endParaRPr lang="en-US" b="0" dirty="0"/>
-                </a:p>
-                <a:p>
-                  <a:pPr>
-                    <a:lnSpc>
-                      <a:spcPct val="150000"/>
-                    </a:lnSpc>
-                  </a:pPr>
-                  <a14:m>
-                    <m:oMathPara xmlns:m="http://schemas.openxmlformats.org/officeDocument/2006/math">
-                      <m:oMathParaPr>
-                        <m:jc m:val="centerGroup"/>
-                      </m:oMathParaPr>
-                      <m:oMath xmlns:m="http://schemas.openxmlformats.org/officeDocument/2006/math">
-                        <m:sSub>
-                          <m:sSubPr>
-                            <m:ctrlPr>
-                              <a:rPr lang="en-US" b="0" i="1" smtClean="0">
-                                <a:solidFill>
-                                  <a:srgbClr val="9437FF"/>
-                                </a:solidFill>
-                                <a:latin typeface="Cambria Math" panose="02040503050406030204" pitchFamily="18" charset="0"/>
-                              </a:rPr>
-                            </m:ctrlPr>
-                          </m:sSubPr>
-                          <m:e>
-                            <m:r>
-                              <a:rPr lang="en-US" b="0" i="1" smtClean="0">
-                                <a:solidFill>
-                                  <a:srgbClr val="9437FF"/>
-                                </a:solidFill>
-                                <a:latin typeface="Cambria Math" panose="02040503050406030204" pitchFamily="18" charset="0"/>
-                              </a:rPr>
-                              <m:t>𝑆</m:t>
-                            </m:r>
-                          </m:e>
-                          <m:sub>
-                            <m:r>
-                              <a:rPr lang="en-US" b="0" i="1" smtClean="0">
-                                <a:solidFill>
-                                  <a:srgbClr val="9437FF"/>
-                                </a:solidFill>
-                                <a:latin typeface="Cambria Math" panose="02040503050406030204" pitchFamily="18" charset="0"/>
-                              </a:rPr>
-                              <m:t>𝑖</m:t>
-                            </m:r>
-                          </m:sub>
-                        </m:sSub>
-                        <m:r>
-                          <a:rPr lang="en-US" b="0" i="1" smtClean="0">
-                            <a:solidFill>
-                              <a:srgbClr val="9437FF"/>
-                            </a:solidFill>
-                            <a:latin typeface="Cambria Math" panose="02040503050406030204" pitchFamily="18" charset="0"/>
-                          </a:rPr>
-                          <m:t>=</m:t>
-                        </m:r>
-                        <m:sSub>
-                          <m:sSubPr>
-                            <m:ctrlPr>
-                              <a:rPr lang="en-US" b="0" i="1" smtClean="0">
-                                <a:solidFill>
-                                  <a:srgbClr val="9437FF"/>
-                                </a:solidFill>
-                                <a:latin typeface="Cambria Math" panose="02040503050406030204" pitchFamily="18" charset="0"/>
-                              </a:rPr>
-                            </m:ctrlPr>
-                          </m:sSubPr>
-                          <m:e>
-                            <m:r>
-                              <a:rPr lang="en-US" b="0" i="1" smtClean="0">
-                                <a:solidFill>
-                                  <a:srgbClr val="9437FF"/>
-                                </a:solidFill>
-                                <a:latin typeface="Cambria Math" panose="02040503050406030204" pitchFamily="18" charset="0"/>
-                              </a:rPr>
-                              <m:t>𝐴</m:t>
-                            </m:r>
-                          </m:e>
-                          <m:sub>
-                            <m:r>
-                              <a:rPr lang="en-US" b="0" i="1" smtClean="0">
-                                <a:solidFill>
-                                  <a:srgbClr val="9437FF"/>
-                                </a:solidFill>
-                                <a:latin typeface="Cambria Math" panose="02040503050406030204" pitchFamily="18" charset="0"/>
-                              </a:rPr>
-                              <m:t>𝑖</m:t>
-                            </m:r>
-                          </m:sub>
-                        </m:sSub>
-                        <m:r>
-                          <a:rPr lang="en-US" b="0" i="1" smtClean="0">
-                            <a:solidFill>
-                              <a:srgbClr val="9437FF"/>
-                            </a:solidFill>
-                            <a:latin typeface="Cambria Math" panose="02040503050406030204" pitchFamily="18" charset="0"/>
-                          </a:rPr>
-                          <m:t>−</m:t>
-                        </m:r>
-                        <m:r>
-                          <a:rPr lang="en-US" b="0" i="1" smtClean="0">
-                            <a:solidFill>
-                              <a:srgbClr val="9437FF"/>
-                            </a:solidFill>
-                            <a:latin typeface="Cambria Math" panose="02040503050406030204" pitchFamily="18" charset="0"/>
-                          </a:rPr>
-                          <m:t>𝜆</m:t>
-                        </m:r>
-                        <m:r>
-                          <a:rPr lang="en-US" b="0" i="1" smtClean="0">
-                            <a:solidFill>
-                              <a:srgbClr val="9437FF"/>
-                            </a:solidFill>
-                            <a:latin typeface="Cambria Math" panose="02040503050406030204" pitchFamily="18" charset="0"/>
-                          </a:rPr>
-                          <m:t> </m:t>
-                        </m:r>
-                        <m:sSub>
-                          <m:sSubPr>
-                            <m:ctrlPr>
-                              <a:rPr lang="en-US" b="0" i="1" smtClean="0">
-                                <a:solidFill>
-                                  <a:srgbClr val="9437FF"/>
-                                </a:solidFill>
-                                <a:latin typeface="Cambria Math" panose="02040503050406030204" pitchFamily="18" charset="0"/>
-                              </a:rPr>
-                            </m:ctrlPr>
-                          </m:sSubPr>
-                          <m:e>
-                            <m:r>
-                              <a:rPr lang="en-US" b="0" i="1" smtClean="0">
-                                <a:solidFill>
-                                  <a:srgbClr val="9437FF"/>
-                                </a:solidFill>
-                                <a:latin typeface="Cambria Math" panose="02040503050406030204" pitchFamily="18" charset="0"/>
-                              </a:rPr>
-                              <m:t>𝐿</m:t>
-                            </m:r>
-                          </m:e>
-                          <m:sub>
-                            <m:r>
-                              <a:rPr lang="en-US" b="0" i="1" smtClean="0">
-                                <a:solidFill>
-                                  <a:srgbClr val="9437FF"/>
-                                </a:solidFill>
-                                <a:latin typeface="Cambria Math" panose="02040503050406030204" pitchFamily="18" charset="0"/>
-                              </a:rPr>
-                              <m:t>𝐶</m:t>
-                            </m:r>
-                          </m:sub>
-                        </m:sSub>
-                      </m:oMath>
-                    </m:oMathPara>
-                  </a14:m>
-                  <a:endParaRPr lang="en-US" sz="1400" dirty="0"/>
-                </a:p>
-                <a:p>
-                  <a:pPr>
-                    <a:lnSpc>
-                      <a:spcPct val="150000"/>
-                    </a:lnSpc>
-                  </a:pPr>
-                  <a:r>
-                    <a:rPr lang="en-US" sz="1200" dirty="0"/>
-                    <a:t>Knockout (sim): </a:t>
-                  </a:r>
-                  <a14:m>
-                    <m:oMath xmlns:m="http://schemas.openxmlformats.org/officeDocument/2006/math">
-                      <m:r>
-                        <a:rPr lang="el-GR" sz="1400" i="1" dirty="0" smtClean="0">
-                          <a:latin typeface="Cambria Math" panose="02040503050406030204" pitchFamily="18" charset="0"/>
-                        </a:rPr>
-                        <m:t>𝜆</m:t>
-                      </m:r>
-                      <m:r>
-                        <a:rPr lang="el-GR" sz="1400" i="1" dirty="0" smtClean="0">
-                          <a:latin typeface="Cambria Math" panose="02040503050406030204" pitchFamily="18" charset="0"/>
-                        </a:rPr>
-                        <m:t> = 0 ⇒</m:t>
-                      </m:r>
-                      <m:sSub>
-                        <m:sSubPr>
-                          <m:ctrlPr>
-                            <a:rPr lang="en-US" sz="1400" b="0" i="1" dirty="0" smtClean="0">
-                              <a:latin typeface="Cambria Math" panose="02040503050406030204" pitchFamily="18" charset="0"/>
-                            </a:rPr>
-                          </m:ctrlPr>
-                        </m:sSubPr>
-                        <m:e>
-                          <m:r>
-                            <a:rPr lang="en-US" sz="1400" b="0" i="1" dirty="0" smtClean="0">
-                              <a:latin typeface="Cambria Math" panose="02040503050406030204" pitchFamily="18" charset="0"/>
-                            </a:rPr>
-                            <m:t>𝑆</m:t>
-                          </m:r>
-                        </m:e>
-                        <m:sub>
-                          <m:r>
-                            <a:rPr lang="en-US" sz="1400" b="0" i="1" dirty="0" smtClean="0">
-                              <a:latin typeface="Cambria Math" panose="02040503050406030204" pitchFamily="18" charset="0"/>
-                            </a:rPr>
-                            <m:t>𝑖</m:t>
-                          </m:r>
-                        </m:sub>
-                      </m:sSub>
-                      <m:r>
-                        <a:rPr lang="en-US" sz="1400" i="1" dirty="0">
-                          <a:latin typeface="Cambria Math" panose="02040503050406030204" pitchFamily="18" charset="0"/>
-                        </a:rPr>
-                        <m:t>=</m:t>
-                      </m:r>
-                      <m:sSub>
-                        <m:sSubPr>
-                          <m:ctrlPr>
-                            <a:rPr lang="en-US" sz="1400" b="0" i="1" dirty="0" smtClean="0">
-                              <a:latin typeface="Cambria Math" panose="02040503050406030204" pitchFamily="18" charset="0"/>
-                            </a:rPr>
-                          </m:ctrlPr>
-                        </m:sSubPr>
-                        <m:e>
-                          <m:r>
-                            <a:rPr lang="en-US" sz="1400" b="0" i="1" dirty="0" smtClean="0">
-                              <a:latin typeface="Cambria Math" panose="02040503050406030204" pitchFamily="18" charset="0"/>
-                            </a:rPr>
-                            <m:t>𝐴</m:t>
-                          </m:r>
-                        </m:e>
-                        <m:sub>
-                          <m:r>
-                            <a:rPr lang="en-US" sz="1400" b="0" i="1" dirty="0" smtClean="0">
-                              <a:latin typeface="Cambria Math" panose="02040503050406030204" pitchFamily="18" charset="0"/>
-                            </a:rPr>
-                            <m:t>𝑖</m:t>
-                          </m:r>
-                        </m:sub>
-                      </m:sSub>
-                    </m:oMath>
-                  </a14:m>
-                  <a:r>
-                    <a:rPr lang="en-US" sz="1400" dirty="0"/>
-                    <a:t> </a:t>
-                  </a:r>
-                </a:p>
-                <a:p>
-                  <a:pPr>
-                    <a:lnSpc>
-                      <a:spcPct val="150000"/>
-                    </a:lnSpc>
-                  </a:pPr>
-                  <a:r>
-                    <a:rPr lang="en-US" sz="1400" dirty="0"/>
-                    <a:t>     </a:t>
-                  </a:r>
-                  <a:r>
-                    <a:rPr lang="en-US" sz="1200" dirty="0"/>
-                    <a:t>(congestion out of selection)</a:t>
-                  </a:r>
-                </a:p>
-                <a:p>
-                  <a:pPr>
-                    <a:lnSpc>
-                      <a:spcPct val="150000"/>
-                    </a:lnSpc>
-                  </a:pPr>
-                  <a14:m>
-                    <m:oMath xmlns:m="http://schemas.openxmlformats.org/officeDocument/2006/math">
-                      <m:sSub>
-                        <m:sSubPr>
-                          <m:ctrlPr>
-                            <a:rPr lang="en-US" sz="1400" b="0" i="1" smtClean="0">
-                              <a:latin typeface="Cambria Math" panose="02040503050406030204" pitchFamily="18" charset="0"/>
-                            </a:rPr>
-                          </m:ctrlPr>
-                        </m:sSubPr>
-                        <m:e>
-                          <m:r>
-                            <a:rPr lang="en-US" sz="1400" b="0" i="1" smtClean="0">
-                              <a:latin typeface="Cambria Math" panose="02040503050406030204" pitchFamily="18" charset="0"/>
-                            </a:rPr>
-                            <m:t>𝐿</m:t>
-                          </m:r>
-                        </m:e>
-                        <m:sub>
-                          <m:r>
-                            <a:rPr lang="en-US" sz="1400" b="0" i="1" smtClean="0">
-                              <a:latin typeface="Cambria Math" panose="02040503050406030204" pitchFamily="18" charset="0"/>
-                            </a:rPr>
-                            <m:t>𝐶</m:t>
-                          </m:r>
-                        </m:sub>
-                      </m:sSub>
-                      <m:r>
-                        <a:rPr lang="en-US" sz="1400" b="0" i="1" smtClean="0">
-                          <a:latin typeface="Cambria Math" panose="02040503050406030204" pitchFamily="18" charset="0"/>
-                        </a:rPr>
-                        <m:t> </m:t>
-                      </m:r>
-                    </m:oMath>
-                  </a14:m>
-                  <a:r>
-                    <a:rPr lang="en-US" sz="1200" dirty="0"/>
-                    <a:t>(hard) </a:t>
-                  </a:r>
-                  <a14:m>
-                    <m:oMath xmlns:m="http://schemas.openxmlformats.org/officeDocument/2006/math">
-                      <m:r>
-                        <a:rPr lang="en-US" sz="1200" i="1" dirty="0" smtClean="0">
-                          <a:latin typeface="Cambria Math" panose="02040503050406030204" pitchFamily="18" charset="0"/>
-                        </a:rPr>
-                        <m:t>→</m:t>
-                      </m:r>
-                    </m:oMath>
-                  </a14:m>
-                  <a:r>
-                    <a:rPr lang="en-US" sz="1200" dirty="0"/>
-                    <a:t> count with </a:t>
-                  </a:r>
                   <a14:m>
                     <m:oMath xmlns:m="http://schemas.openxmlformats.org/officeDocument/2006/math">
                       <m:sSub>
@@ -4670,175 +6982,75 @@
                             <a:rPr lang="en-US" sz="1200" i="1" dirty="0" smtClean="0">
                               <a:latin typeface="Cambria Math" panose="02040503050406030204" pitchFamily="18" charset="0"/>
                             </a:rPr>
-                            <m:t>𝑗</m:t>
+                            <m:t>𝑖</m:t>
                           </m:r>
                         </m:sub>
                       </m:sSub>
                       <m:r>
-                        <a:rPr lang="en-US" sz="1400" b="0" i="1" smtClean="0">
-                          <a:latin typeface="Cambria Math" panose="02040503050406030204" pitchFamily="18" charset="0"/>
-                        </a:rPr>
-                        <m:t>&gt;</m:t>
-                      </m:r>
-                      <m:r>
-                        <a:rPr lang="en-US" sz="1400" b="0" i="1" smtClean="0">
-                          <a:latin typeface="Cambria Math" panose="02040503050406030204" pitchFamily="18" charset="0"/>
-                        </a:rPr>
-                        <m:t>𝜃</m:t>
-                      </m:r>
-                    </m:oMath>
-                  </a14:m>
-                  <a:endParaRPr lang="en-US" sz="1400" dirty="0"/>
-                </a:p>
-                <a:p>
-                  <a:pPr>
-                    <a:lnSpc>
-                      <a:spcPct val="150000"/>
-                    </a:lnSpc>
-                  </a:pPr>
-                  <a:r>
-                    <a:rPr lang="en-US" sz="1400" dirty="0"/>
-                    <a:t> </a:t>
-                  </a:r>
-                  <a14:m>
-                    <m:oMath xmlns:m="http://schemas.openxmlformats.org/officeDocument/2006/math">
-                      <m:r>
-                        <a:rPr lang="en-US" sz="1400" i="1" dirty="0" smtClean="0">
-                          <a:latin typeface="Cambria Math" panose="02040503050406030204" pitchFamily="18" charset="0"/>
-                        </a:rPr>
-                        <m:t>𝜃</m:t>
-                      </m:r>
-                      <m:r>
-                        <a:rPr lang="en-US" sz="1400" i="1" dirty="0" smtClean="0">
+                        <a:rPr lang="en-US" sz="1200" i="1" dirty="0" smtClean="0">
                           <a:latin typeface="Cambria Math" panose="02040503050406030204" pitchFamily="18" charset="0"/>
                         </a:rPr>
                         <m:t>=</m:t>
                       </m:r>
-                      <m:func>
-                        <m:funcPr>
-                          <m:ctrlPr>
-                            <a:rPr lang="en-US" sz="1400" i="1" dirty="0" smtClean="0">
-                              <a:latin typeface="Cambria Math" panose="02040503050406030204" pitchFamily="18" charset="0"/>
-                            </a:rPr>
-                          </m:ctrlPr>
-                        </m:funcPr>
-                        <m:fName>
-                          <m:r>
-                            <m:rPr>
-                              <m:sty m:val="p"/>
-                            </m:rPr>
-                            <a:rPr lang="en-US" sz="1400" i="1" dirty="0" smtClean="0">
-                              <a:latin typeface="Cambria Math" panose="02040503050406030204" pitchFamily="18" charset="0"/>
-                            </a:rPr>
-                            <m:t>med</m:t>
-                          </m:r>
-                        </m:fName>
-                        <m:e>
-                          <m:d>
-                            <m:dPr>
-                              <m:ctrlPr>
-                                <a:rPr lang="en-US" sz="1400" i="1" dirty="0" smtClean="0">
-                                  <a:latin typeface="Cambria Math" panose="02040503050406030204" pitchFamily="18" charset="0"/>
-                                </a:rPr>
-                              </m:ctrlPr>
-                            </m:dPr>
-                            <m:e>
-                              <m:sSub>
-                                <m:sSubPr>
-                                  <m:ctrlPr>
-                                    <a:rPr lang="en-US" sz="1400" i="1" dirty="0" smtClean="0">
-                                      <a:latin typeface="Cambria Math" panose="02040503050406030204" pitchFamily="18" charset="0"/>
-                                    </a:rPr>
-                                  </m:ctrlPr>
-                                </m:sSubPr>
-                                <m:e>
-                                  <m:r>
-                                    <m:rPr>
-                                      <m:nor/>
-                                    </m:rPr>
-                                    <a:rPr lang="en-US" sz="1400" b="0" i="0" dirty="0" smtClean="0">
-                                      <a:latin typeface="Cambria Math" panose="02040503050406030204" pitchFamily="18" charset="0"/>
-                                    </a:rPr>
-                                    <m:t>A</m:t>
-                                  </m:r>
-                                </m:e>
-                                <m:sub>
-                                  <m:r>
-                                    <a:rPr lang="en-US" sz="1400" i="1" dirty="0" smtClean="0">
-                                      <a:latin typeface="Cambria Math" panose="02040503050406030204" pitchFamily="18" charset="0"/>
-                                    </a:rPr>
-                                    <m:t>𝑖</m:t>
-                                  </m:r>
-                                </m:sub>
-                              </m:sSub>
-                              <m:r>
-                                <a:rPr lang="en-US" sz="1400" i="1" dirty="0" smtClean="0">
-                                  <a:latin typeface="Cambria Math" panose="02040503050406030204" pitchFamily="18" charset="0"/>
-                                </a:rPr>
-                                <m:t>∣</m:t>
-                              </m:r>
-                              <m:sSub>
-                                <m:sSubPr>
-                                  <m:ctrlPr>
-                                    <a:rPr lang="en-US" sz="1400" b="0" i="1" dirty="0" smtClean="0">
-                                      <a:latin typeface="Cambria Math" panose="02040503050406030204" pitchFamily="18" charset="0"/>
-                                    </a:rPr>
-                                  </m:ctrlPr>
-                                </m:sSubPr>
-                                <m:e>
-                                  <m:r>
-                                    <a:rPr lang="en-US" sz="1400" b="0" i="1" dirty="0" smtClean="0">
-                                      <a:latin typeface="Cambria Math" panose="02040503050406030204" pitchFamily="18" charset="0"/>
-                                    </a:rPr>
-                                    <m:t>𝑌</m:t>
-                                  </m:r>
-                                </m:e>
-                                <m:sub>
-                                  <m:r>
-                                    <a:rPr lang="en-US" sz="1400" b="0" i="1" dirty="0" smtClean="0">
-                                      <a:latin typeface="Cambria Math" panose="02040503050406030204" pitchFamily="18" charset="0"/>
-                                    </a:rPr>
-                                    <m:t>𝑖</m:t>
-                                  </m:r>
-                                </m:sub>
-                              </m:sSub>
-                              <m:r>
-                                <a:rPr lang="en-US" sz="1400" i="1" dirty="0" smtClean="0">
-                                  <a:latin typeface="Cambria Math" panose="02040503050406030204" pitchFamily="18" charset="0"/>
-                                </a:rPr>
-                                <m:t>=1</m:t>
-                              </m:r>
-                            </m:e>
-                          </m:d>
-                        </m:e>
-                      </m:func>
+                      <m:r>
+                        <a:rPr lang="en-US" sz="1200" i="1" dirty="0">
+                          <a:latin typeface="Cambria Math" panose="02040503050406030204" pitchFamily="18" charset="0"/>
+                        </a:rPr>
+                        <m:t> </m:t>
+                      </m:r>
                     </m:oMath>
                   </a14:m>
-                  <a:endParaRPr lang="en-US" sz="1400" dirty="0"/>
+                  <a:r>
+                    <a:rPr lang="en-US" sz="1200" dirty="0"/>
+                    <a:t>individual performance metric</a:t>
+                  </a:r>
                 </a:p>
                 <a:p>
-                  <a:pPr>
-                    <a:lnSpc>
-                      <a:spcPct val="150000"/>
-                    </a:lnSpc>
-                  </a:pPr>
+                  <a14:m>
+                    <m:oMath xmlns:m="http://schemas.openxmlformats.org/officeDocument/2006/math">
+                      <m:r>
+                        <a:rPr lang="en-US" sz="1200" i="1" dirty="0" smtClean="0">
+                          <a:latin typeface="Cambria Math" panose="02040503050406030204" pitchFamily="18" charset="0"/>
+                        </a:rPr>
+                        <m:t>𝜆</m:t>
+                      </m:r>
+                      <m:r>
+                        <a:rPr lang="en-US" sz="1200" i="1" dirty="0" smtClean="0">
+                          <a:latin typeface="Cambria Math" panose="02040503050406030204" pitchFamily="18" charset="0"/>
+                        </a:rPr>
+                        <m:t>=</m:t>
+                      </m:r>
+                    </m:oMath>
+                  </a14:m>
                   <a:r>
-                    <a:rPr lang="en-US" sz="1400" dirty="0"/>
-                    <a:t> </a:t>
+                    <a:rPr lang="en-US" sz="1200" dirty="0"/>
+                    <a:t> environmental weight</a:t>
                   </a:r>
+                </a:p>
+                <a:p>
+                  <a:r>
+                    <a:rPr lang="en-US" sz="1200" dirty="0">
+                      <a:solidFill>
+                        <a:srgbClr val="0432FF"/>
+                      </a:solidFill>
+                    </a:rPr>
+                    <a:t>environmental impact</a:t>
+                  </a:r>
+                </a:p>
+                <a:p>
                   <a14:m>
                     <m:oMath xmlns:m="http://schemas.openxmlformats.org/officeDocument/2006/math">
                       <m:sSub>
                         <m:sSubPr>
                           <m:ctrlPr>
-                            <a:rPr lang="en-US" sz="1400" i="1" dirty="0" smtClean="0">
+                            <a:rPr lang="en-US" sz="1200" b="0" i="1" smtClean="0">
                               <a:latin typeface="Cambria Math" panose="02040503050406030204" pitchFamily="18" charset="0"/>
                             </a:rPr>
                           </m:ctrlPr>
                         </m:sSubPr>
                         <m:e>
                           <m:r>
-                            <a:rPr lang="en-US" sz="1400" i="1" dirty="0" smtClean="0">
+                            <a:rPr lang="en-US" sz="1200" b="0" i="1" smtClean="0">
                               <a:latin typeface="Cambria Math" panose="02040503050406030204" pitchFamily="18" charset="0"/>
                             </a:rPr>
                             <m:t>𝐿</m:t>
@@ -4846,144 +7058,83 @@
                         </m:e>
                         <m:sub>
                           <m:r>
-                            <a:rPr lang="en-US" sz="1400" i="1" dirty="0" smtClean="0">
+                            <a:rPr lang="en-US" sz="1200" b="0" i="1" smtClean="0">
                               <a:latin typeface="Cambria Math" panose="02040503050406030204" pitchFamily="18" charset="0"/>
                             </a:rPr>
-                            <m:t>𝐶</m:t>
+                            <m:t>𝑛𝑒𝑡</m:t>
                           </m:r>
                         </m:sub>
                       </m:sSub>
+                      <m:r>
+                        <a:rPr lang="en-US" sz="1200" b="0" i="1" smtClean="0">
+                          <a:latin typeface="Cambria Math" panose="02040503050406030204" pitchFamily="18" charset="0"/>
+                        </a:rPr>
+                        <m:t>=</m:t>
+                      </m:r>
+                      <m:r>
+                        <a:rPr lang="en-US" sz="1200" b="0" i="1" smtClean="0">
+                          <a:latin typeface="Cambria Math" panose="02040503050406030204" pitchFamily="18" charset="0"/>
+                        </a:rPr>
+                        <m:t>𝐵</m:t>
+                      </m:r>
+                      <m:r>
+                        <a:rPr lang="en-US" sz="1200" b="0" i="1" smtClean="0">
+                          <a:latin typeface="Cambria Math" panose="02040503050406030204" pitchFamily="18" charset="0"/>
+                        </a:rPr>
+                        <m:t>−</m:t>
+                      </m:r>
+                      <m:r>
+                        <a:rPr lang="en-US" sz="1200" b="0" i="1" smtClean="0">
+                          <a:latin typeface="Cambria Math" panose="02040503050406030204" pitchFamily="18" charset="0"/>
+                        </a:rPr>
+                        <m:t>𝐷</m:t>
+                      </m:r>
                     </m:oMath>
                   </a14:m>
                   <a:r>
-                    <a:rPr lang="en-US" sz="1400" dirty="0"/>
-                    <a:t> </a:t>
-                  </a:r>
-                  <a:r>
                     <a:rPr lang="en-US" sz="1200" dirty="0"/>
-                    <a:t>(smooth, sim default) </a:t>
+                    <a:t>     (</a:t>
                   </a:r>
                   <a14:m>
                     <m:oMath xmlns:m="http://schemas.openxmlformats.org/officeDocument/2006/math">
                       <m:r>
-                        <a:rPr lang="en-US" sz="1400" i="1" dirty="0" smtClean="0">
+                        <a:rPr lang="en-US" sz="1200" i="1" dirty="0" smtClean="0">
                           <a:latin typeface="Cambria Math" panose="02040503050406030204" pitchFamily="18" charset="0"/>
                         </a:rPr>
-                        <m:t>→</m:t>
+                        <m:t>𝐵</m:t>
+                      </m:r>
+                      <m:r>
+                        <a:rPr lang="en-US" sz="1200" b="0" i="1" dirty="0" smtClean="0">
+                          <a:latin typeface="Cambria Math" panose="02040503050406030204" pitchFamily="18" charset="0"/>
+                        </a:rPr>
+                        <m:t>≈</m:t>
                       </m:r>
                     </m:oMath>
                   </a14:m>
                   <a:r>
-                    <a:rPr lang="en-US" sz="1400" dirty="0"/>
-                    <a:t>  </a:t>
-                  </a:r>
-                  <a:r>
                     <a:rPr lang="en-US" sz="1200" dirty="0"/>
-                    <a:t>LOO mean of </a:t>
+                    <a:t> benefits,  </a:t>
                   </a:r>
                   <a14:m>
                     <m:oMath xmlns:m="http://schemas.openxmlformats.org/officeDocument/2006/math">
                       <m:r>
-                        <a:rPr lang="en-US" sz="1400" i="1" dirty="0" smtClean="0">
+                        <a:rPr lang="en-US" sz="1200" b="0" i="1" smtClean="0">
                           <a:latin typeface="Cambria Math" panose="02040503050406030204" pitchFamily="18" charset="0"/>
                         </a:rPr>
-                        <m:t>𝜎</m:t>
+                        <m:t>𝐷</m:t>
                       </m:r>
-                      <m:d>
-                        <m:dPr>
-                          <m:ctrlPr>
-                            <a:rPr lang="en-US" sz="1400" i="1" dirty="0" smtClean="0">
-                              <a:latin typeface="Cambria Math" panose="02040503050406030204" pitchFamily="18" charset="0"/>
-                            </a:rPr>
-                          </m:ctrlPr>
-                        </m:dPr>
-                        <m:e>
-                          <m:r>
-                            <a:rPr lang="en-US" sz="1400" i="1" dirty="0" smtClean="0">
-                              <a:latin typeface="Cambria Math" panose="02040503050406030204" pitchFamily="18" charset="0"/>
-                            </a:rPr>
-                            <m:t>𝛾</m:t>
-                          </m:r>
-                          <m:d>
-                            <m:dPr>
-                              <m:ctrlPr>
-                                <a:rPr lang="en-US" sz="1400" i="1" dirty="0" smtClean="0">
-                                  <a:latin typeface="Cambria Math" panose="02040503050406030204" pitchFamily="18" charset="0"/>
-                                </a:rPr>
-                              </m:ctrlPr>
-                            </m:dPr>
-                            <m:e>
-                              <m:sSub>
-                                <m:sSubPr>
-                                  <m:ctrlPr>
-                                    <a:rPr lang="en-US" sz="1400" b="0" i="1" dirty="0" smtClean="0">
-                                      <a:latin typeface="Cambria Math" panose="02040503050406030204" pitchFamily="18" charset="0"/>
-                                    </a:rPr>
-                                  </m:ctrlPr>
-                                </m:sSubPr>
-                                <m:e>
-                                  <m:r>
-                                    <a:rPr lang="en-US" sz="1400" b="0" i="1" dirty="0" smtClean="0">
-                                      <a:latin typeface="Cambria Math" panose="02040503050406030204" pitchFamily="18" charset="0"/>
-                                    </a:rPr>
-                                    <m:t>𝐴</m:t>
-                                  </m:r>
-                                </m:e>
-                                <m:sub>
-                                  <m:r>
-                                    <a:rPr lang="en-US" sz="1400" b="0" i="1" dirty="0" smtClean="0">
-                                      <a:latin typeface="Cambria Math" panose="02040503050406030204" pitchFamily="18" charset="0"/>
-                                    </a:rPr>
-                                    <m:t>𝑗</m:t>
-                                  </m:r>
-                                </m:sub>
-                              </m:sSub>
-                              <m:r>
-                                <a:rPr lang="en-US" sz="1400" i="1" dirty="0" smtClean="0">
-                                  <a:latin typeface="Cambria Math" panose="02040503050406030204" pitchFamily="18" charset="0"/>
-                                </a:rPr>
-                                <m:t>−</m:t>
-                              </m:r>
-                              <m:r>
-                                <a:rPr lang="en-US" sz="1400" i="1" dirty="0">
-                                  <a:latin typeface="Cambria Math" panose="02040503050406030204" pitchFamily="18" charset="0"/>
-                                </a:rPr>
-                                <m:t>𝜃</m:t>
-                              </m:r>
-                            </m:e>
-                          </m:d>
-                        </m:e>
-                      </m:d>
+                      <m:r>
+                        <a:rPr lang="en-US" sz="1200" b="0" i="1" smtClean="0">
+                          <a:latin typeface="Cambria Math" panose="02040503050406030204" pitchFamily="18" charset="0"/>
+                        </a:rPr>
+                        <m:t>≈</m:t>
+                      </m:r>
                     </m:oMath>
                   </a14:m>
                   <a:r>
-                    <a:rPr lang="en-US" sz="1400" dirty="0"/>
-                    <a:t>  </a:t>
+                    <a:rPr lang="en-US" sz="1200" dirty="0"/>
+                    <a:t> drawbacks)</a:t>
                   </a:r>
-                  <a14:m>
-                    <m:oMath xmlns:m="http://schemas.openxmlformats.org/officeDocument/2006/math">
-                      <m:r>
-                        <a:rPr lang="en-US" sz="1400" i="1" dirty="0" smtClean="0">
-                          <a:latin typeface="Cambria Math" panose="02040503050406030204" pitchFamily="18" charset="0"/>
-                        </a:rPr>
-                        <m:t>𝑗</m:t>
-                      </m:r>
-                      <m:r>
-                        <a:rPr lang="en-US" sz="1400" i="1" dirty="0">
-                          <a:latin typeface="Cambria Math" panose="02040503050406030204" pitchFamily="18" charset="0"/>
-                          <a:ea typeface="Cambria Math" panose="02040503050406030204" pitchFamily="18" charset="0"/>
-                        </a:rPr>
-                        <m:t>≠</m:t>
-                      </m:r>
-                      <m:r>
-                        <a:rPr lang="en-US" sz="1400" b="0" i="1" dirty="0" smtClean="0">
-                          <a:latin typeface="Cambria Math" panose="02040503050406030204" pitchFamily="18" charset="0"/>
-                        </a:rPr>
-                        <m:t>𝑖</m:t>
-                      </m:r>
-                    </m:oMath>
-                  </a14:m>
-                  <a:endParaRPr lang="en-US" sz="1400" dirty="0"/>
                 </a:p>
               </p:txBody>
             </p:sp>
@@ -4991,10 +7142,10 @@
           <mc:Fallback>
             <p:sp>
               <p:nvSpPr>
-                <p:cNvPr id="9" name="TextBox 8">
+                <p:cNvPr id="6" name="TextBox 5">
                   <a:extLst>
                     <a:ext uri="{FF2B5EF4-FFF2-40B4-BE49-F238E27FC236}">
-                      <a16:creationId xmlns:a16="http://schemas.microsoft.com/office/drawing/2014/main" id="{6A98D608-4F63-807E-D1C7-797CA0D726D8}"/>
+                      <a16:creationId xmlns:a16="http://schemas.microsoft.com/office/drawing/2014/main" id="{D1D1ECB8-4444-68F0-367A-195A32F205DE}"/>
                     </a:ext>
                   </a:extLst>
                 </p:cNvPr>
@@ -5005,16 +7156,16 @@
               </p:nvSpPr>
               <p:spPr>
                 <a:xfrm>
-                  <a:off x="6222695" y="2107914"/>
-                  <a:ext cx="3261912" cy="2571312"/>
+                  <a:off x="436400" y="2048243"/>
+                  <a:ext cx="3613533" cy="1323439"/>
                 </a:xfrm>
                 <a:prstGeom prst="rect">
                   <a:avLst/>
                 </a:prstGeom>
                 <a:blipFill>
-                  <a:blip r:embed="rId4"/>
+                  <a:blip r:embed="rId9"/>
                   <a:stretch>
-                    <a:fillRect/>
+                    <a:fillRect b="-2857"/>
                   </a:stretch>
                 </a:blipFill>
               </p:spPr>
@@ -5034,2056 +7185,793 @@
           </mc:Fallback>
         </mc:AlternateContent>
       </p:grpSp>
-      <p:grpSp>
-        <p:nvGrpSpPr>
-          <p:cNvPr id="39" name="Group 38">
+      <p:sp>
+        <p:nvSpPr>
+          <p:cNvPr id="50" name="TextBox 49">
             <a:extLst>
               <a:ext uri="{FF2B5EF4-FFF2-40B4-BE49-F238E27FC236}">
-                <a16:creationId xmlns:a16="http://schemas.microsoft.com/office/drawing/2014/main" id="{9697770D-61AA-1873-5186-B58096EC97D6}"/>
+                <a16:creationId xmlns:a16="http://schemas.microsoft.com/office/drawing/2014/main" id="{4E77B8A6-F58E-8DB5-727E-F8CED3934D83}"/>
               </a:ext>
             </a:extLst>
           </p:cNvPr>
-          <p:cNvGrpSpPr/>
+          <p:cNvSpPr txBox="1"/>
           <p:nvPr/>
-        </p:nvGrpSpPr>
-        <p:grpSpPr>
+        </p:nvSpPr>
+        <p:spPr>
           <a:xfrm>
-            <a:off x="5885251" y="307119"/>
-            <a:ext cx="5703291" cy="2368684"/>
-            <a:chOff x="6067372" y="708851"/>
-            <a:chExt cx="5703291" cy="2368684"/>
+            <a:off x="5739323" y="2007354"/>
+            <a:ext cx="4536028" cy="307776"/>
           </a:xfrm>
-        </p:grpSpPr>
-        <p:grpSp>
-          <p:nvGrpSpPr>
-            <p:cNvPr id="38" name="Group 37">
-              <a:extLst>
-                <a:ext uri="{FF2B5EF4-FFF2-40B4-BE49-F238E27FC236}">
-                  <a16:creationId xmlns:a16="http://schemas.microsoft.com/office/drawing/2014/main" id="{F029F69E-1254-81C7-2E57-102C2DF06261}"/>
-                </a:ext>
-              </a:extLst>
-            </p:cNvPr>
-            <p:cNvGrpSpPr/>
-            <p:nvPr/>
-          </p:nvGrpSpPr>
-          <p:grpSpPr>
-            <a:xfrm>
-              <a:off x="6067372" y="1295718"/>
-              <a:ext cx="5703291" cy="1781817"/>
-              <a:chOff x="6067372" y="1295718"/>
-              <a:chExt cx="5703291" cy="1781817"/>
-            </a:xfrm>
-          </p:grpSpPr>
-          <p:grpSp>
-            <p:nvGrpSpPr>
-              <p:cNvPr id="26" name="Group 25">
-                <a:extLst>
-                  <a:ext uri="{FF2B5EF4-FFF2-40B4-BE49-F238E27FC236}">
-                    <a16:creationId xmlns:a16="http://schemas.microsoft.com/office/drawing/2014/main" id="{B3A8CF8E-4F09-50BA-35F1-9DA66D45F485}"/>
-                  </a:ext>
-                </a:extLst>
-              </p:cNvPr>
-              <p:cNvGrpSpPr/>
-              <p:nvPr/>
-            </p:nvGrpSpPr>
-            <p:grpSpPr>
-              <a:xfrm>
-                <a:off x="9066256" y="1295718"/>
-                <a:ext cx="2704407" cy="1780427"/>
-                <a:chOff x="6044997" y="1189479"/>
-                <a:chExt cx="2704407" cy="1780427"/>
-              </a:xfrm>
-            </p:grpSpPr>
-            <p:cxnSp>
-              <p:nvCxnSpPr>
-                <p:cNvPr id="13" name="Straight Arrow Connector 12">
-                  <a:extLst>
-                    <a:ext uri="{FF2B5EF4-FFF2-40B4-BE49-F238E27FC236}">
-                      <a16:creationId xmlns:a16="http://schemas.microsoft.com/office/drawing/2014/main" id="{234D3C5B-0386-6577-8F3A-3B32318FCEAB}"/>
-                    </a:ext>
-                  </a:extLst>
-                </p:cNvPr>
-                <p:cNvCxnSpPr/>
-                <p:nvPr/>
-              </p:nvCxnSpPr>
-              <p:spPr>
-                <a:xfrm>
-                  <a:off x="6950958" y="1589768"/>
-                  <a:ext cx="0" cy="1350750"/>
-                </a:xfrm>
-                <a:prstGeom prst="straightConnector1">
-                  <a:avLst/>
-                </a:prstGeom>
-                <a:ln>
-                  <a:solidFill>
-                    <a:schemeClr val="tx1"/>
-                  </a:solidFill>
-                  <a:headEnd type="triangle"/>
-                  <a:tailEnd type="triangle"/>
-                </a:ln>
-              </p:spPr>
-              <p:style>
-                <a:lnRef idx="2">
-                  <a:schemeClr val="accent1"/>
-                </a:lnRef>
-                <a:fillRef idx="0">
-                  <a:schemeClr val="accent1"/>
-                </a:fillRef>
-                <a:effectRef idx="1">
-                  <a:schemeClr val="accent1"/>
-                </a:effectRef>
-                <a:fontRef idx="minor">
-                  <a:schemeClr val="tx1"/>
-                </a:fontRef>
-              </p:style>
-            </p:cxnSp>
-            <p:cxnSp>
-              <p:nvCxnSpPr>
-                <p:cNvPr id="15" name="Straight Arrow Connector 14">
-                  <a:extLst>
-                    <a:ext uri="{FF2B5EF4-FFF2-40B4-BE49-F238E27FC236}">
-                      <a16:creationId xmlns:a16="http://schemas.microsoft.com/office/drawing/2014/main" id="{5CD78934-FF51-6805-CC54-572EE0E2BE02}"/>
-                    </a:ext>
-                  </a:extLst>
-                </p:cNvPr>
-                <p:cNvCxnSpPr/>
-                <p:nvPr/>
-              </p:nvCxnSpPr>
-              <p:spPr>
-                <a:xfrm>
-                  <a:off x="6704335" y="2693878"/>
-                  <a:ext cx="2045069" cy="0"/>
-                </a:xfrm>
-                <a:prstGeom prst="straightConnector1">
-                  <a:avLst/>
-                </a:prstGeom>
-                <a:ln>
-                  <a:solidFill>
-                    <a:schemeClr val="tx1"/>
-                  </a:solidFill>
-                  <a:headEnd type="triangle"/>
-                  <a:tailEnd type="triangle"/>
-                </a:ln>
-              </p:spPr>
-              <p:style>
-                <a:lnRef idx="2">
-                  <a:schemeClr val="accent1"/>
-                </a:lnRef>
-                <a:fillRef idx="0">
-                  <a:schemeClr val="accent1"/>
-                </a:fillRef>
-                <a:effectRef idx="1">
-                  <a:schemeClr val="accent1"/>
-                </a:effectRef>
-                <a:fontRef idx="minor">
-                  <a:schemeClr val="tx1"/>
-                </a:fontRef>
-              </p:style>
-            </p:cxnSp>
-            <p:sp>
-              <p:nvSpPr>
-                <p:cNvPr id="21" name="Freeform 20">
-                  <a:extLst>
-                    <a:ext uri="{FF2B5EF4-FFF2-40B4-BE49-F238E27FC236}">
-                      <a16:creationId xmlns:a16="http://schemas.microsoft.com/office/drawing/2014/main" id="{EF02243E-BE04-CFA6-42FF-2D21A22E01CF}"/>
-                    </a:ext>
-                  </a:extLst>
-                </p:cNvPr>
-                <p:cNvSpPr/>
-                <p:nvPr/>
-              </p:nvSpPr>
-              <p:spPr>
-                <a:xfrm>
-                  <a:off x="7042025" y="1926200"/>
-                  <a:ext cx="1437984" cy="593999"/>
-                </a:xfrm>
-                <a:custGeom>
-                  <a:avLst/>
-                  <a:gdLst>
-                    <a:gd name="csX0" fmla="*/ 0 w 1593560"/>
-                    <a:gd name="csY0" fmla="*/ 588775 h 593999"/>
-                    <a:gd name="csX1" fmla="*/ 265593 w 1593560"/>
-                    <a:gd name="csY1" fmla="*/ 584981 h 593999"/>
-                    <a:gd name="csX2" fmla="*/ 538775 w 1593560"/>
-                    <a:gd name="csY2" fmla="*/ 505303 h 593999"/>
-                    <a:gd name="csX3" fmla="*/ 770221 w 1593560"/>
-                    <a:gd name="csY3" fmla="*/ 395272 h 593999"/>
-                    <a:gd name="csX4" fmla="*/ 982695 w 1593560"/>
-                    <a:gd name="csY4" fmla="*/ 239710 h 593999"/>
-                    <a:gd name="csX5" fmla="*/ 1130669 w 1593560"/>
-                    <a:gd name="csY5" fmla="*/ 122090 h 593999"/>
-                    <a:gd name="csX6" fmla="*/ 1305201 w 1593560"/>
-                    <a:gd name="csY6" fmla="*/ 676 h 593999"/>
-                    <a:gd name="csX7" fmla="*/ 1506294 w 1593560"/>
-                    <a:gd name="csY7" fmla="*/ 80354 h 593999"/>
-                    <a:gd name="csX8" fmla="*/ 1593560 w 1593560"/>
-                    <a:gd name="csY8" fmla="*/ 232121 h 593999"/>
-                  </a:gdLst>
-                  <a:ahLst/>
-                  <a:cxnLst>
-                    <a:cxn ang="0">
-                      <a:pos x="csX0" y="csY0"/>
-                    </a:cxn>
-                    <a:cxn ang="0">
-                      <a:pos x="csX1" y="csY1"/>
-                    </a:cxn>
-                    <a:cxn ang="0">
-                      <a:pos x="csX2" y="csY2"/>
-                    </a:cxn>
-                    <a:cxn ang="0">
-                      <a:pos x="csX3" y="csY3"/>
-                    </a:cxn>
-                    <a:cxn ang="0">
-                      <a:pos x="csX4" y="csY4"/>
-                    </a:cxn>
-                    <a:cxn ang="0">
-                      <a:pos x="csX5" y="csY5"/>
-                    </a:cxn>
-                    <a:cxn ang="0">
-                      <a:pos x="csX6" y="csY6"/>
-                    </a:cxn>
-                    <a:cxn ang="0">
-                      <a:pos x="csX7" y="csY7"/>
-                    </a:cxn>
-                    <a:cxn ang="0">
-                      <a:pos x="csX8" y="csY8"/>
-                    </a:cxn>
-                  </a:cxnLst>
-                  <a:rect l="l" t="t" r="r" b="b"/>
-                  <a:pathLst>
-                    <a:path w="1593560" h="593999">
-                      <a:moveTo>
-                        <a:pt x="0" y="588775"/>
-                      </a:moveTo>
-                      <a:cubicBezTo>
-                        <a:pt x="87898" y="593834"/>
-                        <a:pt x="175797" y="598893"/>
-                        <a:pt x="265593" y="584981"/>
-                      </a:cubicBezTo>
-                      <a:cubicBezTo>
-                        <a:pt x="355389" y="571069"/>
-                        <a:pt x="454670" y="536921"/>
-                        <a:pt x="538775" y="505303"/>
-                      </a:cubicBezTo>
-                      <a:cubicBezTo>
-                        <a:pt x="622880" y="473685"/>
-                        <a:pt x="696234" y="439537"/>
-                        <a:pt x="770221" y="395272"/>
-                      </a:cubicBezTo>
-                      <a:cubicBezTo>
-                        <a:pt x="844208" y="351007"/>
-                        <a:pt x="922620" y="285240"/>
-                        <a:pt x="982695" y="239710"/>
-                      </a:cubicBezTo>
-                      <a:cubicBezTo>
-                        <a:pt x="1042770" y="194180"/>
-                        <a:pt x="1076918" y="161929"/>
-                        <a:pt x="1130669" y="122090"/>
-                      </a:cubicBezTo>
-                      <a:cubicBezTo>
-                        <a:pt x="1184420" y="82251"/>
-                        <a:pt x="1242597" y="7632"/>
-                        <a:pt x="1305201" y="676"/>
-                      </a:cubicBezTo>
-                      <a:cubicBezTo>
-                        <a:pt x="1367805" y="-6280"/>
-                        <a:pt x="1458234" y="41780"/>
-                        <a:pt x="1506294" y="80354"/>
-                      </a:cubicBezTo>
-                      <a:cubicBezTo>
-                        <a:pt x="1554354" y="118928"/>
-                        <a:pt x="1573957" y="175524"/>
-                        <a:pt x="1593560" y="232121"/>
-                      </a:cubicBezTo>
-                    </a:path>
-                  </a:pathLst>
-                </a:custGeom>
-                <a:noFill/>
-                <a:ln>
-                  <a:solidFill>
-                    <a:srgbClr val="0432FF"/>
-                  </a:solidFill>
-                </a:ln>
-              </p:spPr>
-              <p:style>
-                <a:lnRef idx="2">
-                  <a:schemeClr val="accent1">
-                    <a:shade val="15000"/>
-                  </a:schemeClr>
-                </a:lnRef>
-                <a:fillRef idx="1">
-                  <a:schemeClr val="accent1"/>
-                </a:fillRef>
-                <a:effectRef idx="0">
-                  <a:schemeClr val="accent1"/>
-                </a:effectRef>
-                <a:fontRef idx="minor">
-                  <a:schemeClr val="lt1"/>
-                </a:fontRef>
-              </p:style>
-              <p:txBody>
-                <a:bodyPr rtlCol="0" anchor="ctr"/>
-                <a:lstStyle/>
-                <a:p>
-                  <a:pPr algn="ctr"/>
-                  <a:endParaRPr lang="en-US"/>
-                </a:p>
-              </p:txBody>
-            </p:sp>
-            <mc:AlternateContent xmlns:mc="http://schemas.openxmlformats.org/markup-compatibility/2006" xmlns:a14="http://schemas.microsoft.com/office/drawing/2010/main">
-              <mc:Choice Requires="a14">
-                <p:sp>
-                  <p:nvSpPr>
-                    <p:cNvPr id="22" name="TextBox 21">
-                      <a:extLst>
-                        <a:ext uri="{FF2B5EF4-FFF2-40B4-BE49-F238E27FC236}">
-                          <a16:creationId xmlns:a16="http://schemas.microsoft.com/office/drawing/2014/main" id="{E3E0712F-1D01-EB8E-7547-12BDDB329C60}"/>
-                        </a:ext>
-                      </a:extLst>
-                    </p:cNvPr>
-                    <p:cNvSpPr txBox="1"/>
-                    <p:nvPr/>
-                  </p:nvSpPr>
-                  <p:spPr>
-                    <a:xfrm>
-                      <a:off x="6044997" y="2080477"/>
-                      <a:ext cx="860428" cy="184666"/>
-                    </a:xfrm>
-                    <a:prstGeom prst="rect">
-                      <a:avLst/>
-                    </a:prstGeom>
-                    <a:noFill/>
-                  </p:spPr>
-                  <p:txBody>
-                    <a:bodyPr wrap="none" lIns="0" tIns="0" rIns="0" bIns="0" rtlCol="0">
-                      <a:spAutoFit/>
-                    </a:bodyPr>
-                    <a:lstStyle/>
-                    <a:p>
-                      <a:pPr/>
-                      <a14:m>
-                        <m:oMathPara xmlns:m="http://schemas.openxmlformats.org/officeDocument/2006/math">
-                          <m:oMathParaPr>
-                            <m:jc m:val="centerGroup"/>
-                          </m:oMathParaPr>
-                          <m:oMath xmlns:m="http://schemas.openxmlformats.org/officeDocument/2006/math">
-                            <m:r>
-                              <a:rPr lang="en-US" sz="1200" b="0" i="1" smtClean="0">
-                                <a:latin typeface="Cambria Math" panose="02040503050406030204" pitchFamily="18" charset="0"/>
-                              </a:rPr>
-                              <m:t>𝑃</m:t>
-                            </m:r>
-                            <m:r>
-                              <a:rPr lang="en-US" sz="1200" b="0" i="1" smtClean="0">
-                                <a:latin typeface="Cambria Math" panose="02040503050406030204" pitchFamily="18" charset="0"/>
-                              </a:rPr>
-                              <m:t>(</m:t>
-                            </m:r>
-                            <m:sSub>
-                              <m:sSubPr>
-                                <m:ctrlPr>
-                                  <a:rPr lang="en-US" sz="1200" b="0" i="1" smtClean="0">
-                                    <a:latin typeface="Cambria Math" panose="02040503050406030204" pitchFamily="18" charset="0"/>
-                                  </a:rPr>
-                                </m:ctrlPr>
-                              </m:sSubPr>
-                              <m:e>
-                                <m:r>
-                                  <a:rPr lang="en-US" sz="1200" b="0" i="1" smtClean="0">
-                                    <a:latin typeface="Cambria Math" panose="02040503050406030204" pitchFamily="18" charset="0"/>
-                                  </a:rPr>
-                                  <m:t>𝑌</m:t>
-                                </m:r>
-                              </m:e>
-                              <m:sub>
-                                <m:r>
-                                  <a:rPr lang="en-US" sz="1200" b="0" i="1" smtClean="0">
-                                    <a:latin typeface="Cambria Math" panose="02040503050406030204" pitchFamily="18" charset="0"/>
-                                  </a:rPr>
-                                  <m:t>𝑖</m:t>
-                                </m:r>
-                              </m:sub>
-                            </m:sSub>
-                            <m:r>
-                              <a:rPr lang="en-US" sz="1200" b="0" i="1" smtClean="0">
-                                <a:latin typeface="Cambria Math" panose="02040503050406030204" pitchFamily="18" charset="0"/>
-                              </a:rPr>
-                              <m:t>=1|</m:t>
-                            </m:r>
-                            <m:sSub>
-                              <m:sSubPr>
-                                <m:ctrlPr>
-                                  <a:rPr lang="en-US" sz="1200" b="0" i="1" smtClean="0">
-                                    <a:latin typeface="Cambria Math" panose="02040503050406030204" pitchFamily="18" charset="0"/>
-                                  </a:rPr>
-                                </m:ctrlPr>
-                              </m:sSubPr>
-                              <m:e>
-                                <m:r>
-                                  <a:rPr lang="en-US" sz="1200" b="0" i="1" smtClean="0">
-                                    <a:latin typeface="Cambria Math" panose="02040503050406030204" pitchFamily="18" charset="0"/>
-                                  </a:rPr>
-                                  <m:t>𝐴</m:t>
-                                </m:r>
-                              </m:e>
-                              <m:sub>
-                                <m:r>
-                                  <a:rPr lang="en-US" sz="1200" b="0" i="1" smtClean="0">
-                                    <a:latin typeface="Cambria Math" panose="02040503050406030204" pitchFamily="18" charset="0"/>
-                                  </a:rPr>
-                                  <m:t>𝑖</m:t>
-                                </m:r>
-                              </m:sub>
-                            </m:sSub>
-                            <m:r>
-                              <a:rPr lang="en-US" sz="1200" b="0" i="1" smtClean="0">
-                                <a:latin typeface="Cambria Math" panose="02040503050406030204" pitchFamily="18" charset="0"/>
-                              </a:rPr>
-                              <m:t>)</m:t>
-                            </m:r>
-                          </m:oMath>
-                        </m:oMathPara>
-                      </a14:m>
-                      <a:endParaRPr lang="en-US" sz="1200" dirty="0"/>
-                    </a:p>
-                  </p:txBody>
-                </p:sp>
-              </mc:Choice>
-              <mc:Fallback xmlns="">
-                <p:sp>
-                  <p:nvSpPr>
-                    <p:cNvPr id="22" name="TextBox 21">
-                      <a:extLst>
-                        <a:ext uri="{FF2B5EF4-FFF2-40B4-BE49-F238E27FC236}">
-                          <a16:creationId xmlns:a16="http://schemas.microsoft.com/office/drawing/2014/main" id="{E3E0712F-1D01-EB8E-7547-12BDDB329C60}"/>
-                        </a:ext>
-                      </a:extLst>
-                    </p:cNvPr>
-                    <p:cNvSpPr txBox="1">
-                      <a:spLocks noRot="1" noChangeAspect="1" noMove="1" noResize="1" noEditPoints="1" noAdjustHandles="1" noChangeArrowheads="1" noChangeShapeType="1" noTextEdit="1"/>
-                    </p:cNvSpPr>
-                    <p:nvPr/>
-                  </p:nvSpPr>
-                  <p:spPr>
-                    <a:xfrm>
-                      <a:off x="6044997" y="2080477"/>
-                      <a:ext cx="860428" cy="184666"/>
-                    </a:xfrm>
-                    <a:prstGeom prst="rect">
-                      <a:avLst/>
-                    </a:prstGeom>
-                    <a:blipFill>
-                      <a:blip r:embed="rId5"/>
-                      <a:stretch>
-                        <a:fillRect l="-4348" r="-5797" b="-31250"/>
-                      </a:stretch>
-                    </a:blipFill>
-                  </p:spPr>
-                  <p:txBody>
-                    <a:bodyPr/>
-                    <a:lstStyle/>
-                    <a:p>
-                      <a:r>
-                        <a:rPr lang="en-US">
-                          <a:noFill/>
-                        </a:rPr>
-                        <a:t> </a:t>
-                      </a:r>
-                    </a:p>
-                  </p:txBody>
-                </p:sp>
-              </mc:Fallback>
-            </mc:AlternateContent>
-            <mc:AlternateContent xmlns:mc="http://schemas.openxmlformats.org/markup-compatibility/2006" xmlns:a14="http://schemas.microsoft.com/office/drawing/2010/main">
-              <mc:Choice Requires="a14">
-                <p:sp>
-                  <p:nvSpPr>
-                    <p:cNvPr id="23" name="TextBox 22">
-                      <a:extLst>
-                        <a:ext uri="{FF2B5EF4-FFF2-40B4-BE49-F238E27FC236}">
-                          <a16:creationId xmlns:a16="http://schemas.microsoft.com/office/drawing/2014/main" id="{3FCE6E86-C6BA-9D19-0046-C043E90E37AE}"/>
-                        </a:ext>
-                      </a:extLst>
-                    </p:cNvPr>
-                    <p:cNvSpPr txBox="1"/>
-                    <p:nvPr/>
-                  </p:nvSpPr>
-                  <p:spPr>
-                    <a:xfrm>
-                      <a:off x="7423965" y="2785240"/>
-                      <a:ext cx="776110" cy="184666"/>
-                    </a:xfrm>
-                    <a:prstGeom prst="rect">
-                      <a:avLst/>
-                    </a:prstGeom>
-                    <a:noFill/>
-                  </p:spPr>
-                  <p:txBody>
-                    <a:bodyPr wrap="none" lIns="0" tIns="0" rIns="0" bIns="0" rtlCol="0">
-                      <a:spAutoFit/>
-                    </a:bodyPr>
-                    <a:lstStyle/>
-                    <a:p>
-                      <a:pPr/>
-                      <a14:m>
-                        <m:oMathPara xmlns:m="http://schemas.openxmlformats.org/officeDocument/2006/math">
-                          <m:oMathParaPr>
-                            <m:jc m:val="centerGroup"/>
-                          </m:oMathParaPr>
-                          <m:oMath xmlns:m="http://schemas.openxmlformats.org/officeDocument/2006/math">
-                            <m:r>
-                              <a:rPr lang="en-US" sz="1200" b="0" i="1" smtClean="0">
-                                <a:latin typeface="Cambria Math" panose="02040503050406030204" pitchFamily="18" charset="0"/>
-                              </a:rPr>
-                              <m:t>𝑃𝑜𝑜𝑙𝑄</m:t>
-                            </m:r>
-                            <m:r>
-                              <a:rPr lang="en-US" sz="1200" b="0" i="1" smtClean="0">
-                                <a:latin typeface="Cambria Math" panose="02040503050406030204" pitchFamily="18" charset="0"/>
-                              </a:rPr>
-                              <m:t> </m:t>
-                            </m:r>
-                            <m:r>
-                              <a:rPr lang="en-US" sz="1200" b="0" i="1" smtClean="0">
-                                <a:latin typeface="Cambria Math" panose="02040503050406030204" pitchFamily="18" charset="0"/>
-                              </a:rPr>
-                              <m:t>𝐿𝑂𝑂</m:t>
-                            </m:r>
-                          </m:oMath>
-                        </m:oMathPara>
-                      </a14:m>
-                      <a:endParaRPr lang="en-US" sz="1200" dirty="0"/>
-                    </a:p>
-                  </p:txBody>
-                </p:sp>
-              </mc:Choice>
-              <mc:Fallback xmlns="">
-                <p:sp>
-                  <p:nvSpPr>
-                    <p:cNvPr id="23" name="TextBox 22">
-                      <a:extLst>
-                        <a:ext uri="{FF2B5EF4-FFF2-40B4-BE49-F238E27FC236}">
-                          <a16:creationId xmlns:a16="http://schemas.microsoft.com/office/drawing/2014/main" id="{3FCE6E86-C6BA-9D19-0046-C043E90E37AE}"/>
-                        </a:ext>
-                      </a:extLst>
-                    </p:cNvPr>
-                    <p:cNvSpPr txBox="1">
-                      <a:spLocks noRot="1" noChangeAspect="1" noMove="1" noResize="1" noEditPoints="1" noAdjustHandles="1" noChangeArrowheads="1" noChangeShapeType="1" noTextEdit="1"/>
-                    </p:cNvSpPr>
-                    <p:nvPr/>
-                  </p:nvSpPr>
-                  <p:spPr>
-                    <a:xfrm>
-                      <a:off x="7423965" y="2785240"/>
-                      <a:ext cx="776110" cy="184666"/>
-                    </a:xfrm>
-                    <a:prstGeom prst="rect">
-                      <a:avLst/>
-                    </a:prstGeom>
-                    <a:blipFill>
-                      <a:blip r:embed="rId6"/>
-                      <a:stretch>
-                        <a:fillRect l="-6452" t="-6250" r="-3226" b="-37500"/>
-                      </a:stretch>
-                    </a:blipFill>
-                  </p:spPr>
-                  <p:txBody>
-                    <a:bodyPr/>
-                    <a:lstStyle/>
-                    <a:p>
-                      <a:r>
-                        <a:rPr lang="en-US">
-                          <a:noFill/>
-                        </a:rPr>
-                        <a:t> </a:t>
-                      </a:r>
-                    </a:p>
-                  </p:txBody>
-                </p:sp>
-              </mc:Fallback>
-            </mc:AlternateContent>
-            <p:sp>
-              <p:nvSpPr>
-                <p:cNvPr id="24" name="TextBox 23">
-                  <a:extLst>
-                    <a:ext uri="{FF2B5EF4-FFF2-40B4-BE49-F238E27FC236}">
-                      <a16:creationId xmlns:a16="http://schemas.microsoft.com/office/drawing/2014/main" id="{4AA5E550-27E9-1E5D-A47B-CC9894E5E972}"/>
-                    </a:ext>
-                  </a:extLst>
-                </p:cNvPr>
-                <p:cNvSpPr txBox="1"/>
-                <p:nvPr/>
-              </p:nvSpPr>
-              <p:spPr>
-                <a:xfrm>
-                  <a:off x="6044997" y="1189479"/>
-                  <a:ext cx="2704402" cy="369332"/>
-                </a:xfrm>
-                <a:prstGeom prst="rect">
-                  <a:avLst/>
-                </a:prstGeom>
-                <a:noFill/>
-              </p:spPr>
-              <p:txBody>
-                <a:bodyPr wrap="square" rtlCol="0">
-                  <a:spAutoFit/>
-                </a:bodyPr>
-                <a:lstStyle/>
-                <a:p>
-                  <a:pPr algn="ctr"/>
-                  <a:r>
-                    <a:rPr lang="en-US" i="1" dirty="0">
-                      <a:solidFill>
-                        <a:srgbClr val="0432FF"/>
-                      </a:solidFill>
-                    </a:rPr>
-                    <a:t>HERO (empirical)</a:t>
-                  </a:r>
-                </a:p>
-              </p:txBody>
-            </p:sp>
-          </p:grpSp>
-          <p:grpSp>
-            <p:nvGrpSpPr>
-              <p:cNvPr id="36" name="Group 35">
-                <a:extLst>
-                  <a:ext uri="{FF2B5EF4-FFF2-40B4-BE49-F238E27FC236}">
-                    <a16:creationId xmlns:a16="http://schemas.microsoft.com/office/drawing/2014/main" id="{F0DF007E-1F26-2C18-5B1C-DF72D9B46C99}"/>
-                  </a:ext>
-                </a:extLst>
-              </p:cNvPr>
-              <p:cNvGrpSpPr/>
-              <p:nvPr/>
-            </p:nvGrpSpPr>
-            <p:grpSpPr>
-              <a:xfrm>
-                <a:off x="6067372" y="1295718"/>
-                <a:ext cx="2704407" cy="1781817"/>
-                <a:chOff x="6096000" y="3557686"/>
-                <a:chExt cx="2704407" cy="1781817"/>
-              </a:xfrm>
-            </p:grpSpPr>
-            <p:cxnSp>
-              <p:nvCxnSpPr>
-                <p:cNvPr id="28" name="Straight Arrow Connector 27">
-                  <a:extLst>
-                    <a:ext uri="{FF2B5EF4-FFF2-40B4-BE49-F238E27FC236}">
-                      <a16:creationId xmlns:a16="http://schemas.microsoft.com/office/drawing/2014/main" id="{0DDE3970-1EB8-DEA9-2E55-380FCED9DD2D}"/>
-                    </a:ext>
-                  </a:extLst>
-                </p:cNvPr>
-                <p:cNvCxnSpPr/>
-                <p:nvPr/>
-              </p:nvCxnSpPr>
-              <p:spPr>
-                <a:xfrm>
-                  <a:off x="7001961" y="3957975"/>
-                  <a:ext cx="0" cy="1350750"/>
-                </a:xfrm>
-                <a:prstGeom prst="straightConnector1">
-                  <a:avLst/>
-                </a:prstGeom>
-                <a:ln>
-                  <a:solidFill>
-                    <a:schemeClr val="tx1"/>
-                  </a:solidFill>
-                  <a:headEnd type="triangle"/>
-                  <a:tailEnd type="triangle"/>
-                </a:ln>
-              </p:spPr>
-              <p:style>
-                <a:lnRef idx="2">
-                  <a:schemeClr val="accent1"/>
-                </a:lnRef>
-                <a:fillRef idx="0">
-                  <a:schemeClr val="accent1"/>
-                </a:fillRef>
-                <a:effectRef idx="1">
-                  <a:schemeClr val="accent1"/>
-                </a:effectRef>
-                <a:fontRef idx="minor">
-                  <a:schemeClr val="tx1"/>
-                </a:fontRef>
-              </p:style>
-            </p:cxnSp>
-            <p:cxnSp>
-              <p:nvCxnSpPr>
-                <p:cNvPr id="29" name="Straight Arrow Connector 28">
-                  <a:extLst>
-                    <a:ext uri="{FF2B5EF4-FFF2-40B4-BE49-F238E27FC236}">
-                      <a16:creationId xmlns:a16="http://schemas.microsoft.com/office/drawing/2014/main" id="{9D9BF748-506B-716F-EA2C-DDDB8DCABDBA}"/>
-                    </a:ext>
-                  </a:extLst>
-                </p:cNvPr>
-                <p:cNvCxnSpPr/>
-                <p:nvPr/>
-              </p:nvCxnSpPr>
-              <p:spPr>
-                <a:xfrm>
-                  <a:off x="6755338" y="5062085"/>
-                  <a:ext cx="2045069" cy="0"/>
-                </a:xfrm>
-                <a:prstGeom prst="straightConnector1">
-                  <a:avLst/>
-                </a:prstGeom>
-                <a:ln>
-                  <a:solidFill>
-                    <a:schemeClr val="tx1"/>
-                  </a:solidFill>
-                  <a:headEnd type="triangle"/>
-                  <a:tailEnd type="triangle"/>
-                </a:ln>
-              </p:spPr>
-              <p:style>
-                <a:lnRef idx="2">
-                  <a:schemeClr val="accent1"/>
-                </a:lnRef>
-                <a:fillRef idx="0">
-                  <a:schemeClr val="accent1"/>
-                </a:fillRef>
-                <a:effectRef idx="1">
-                  <a:schemeClr val="accent1"/>
-                </a:effectRef>
-                <a:fontRef idx="minor">
-                  <a:schemeClr val="tx1"/>
-                </a:fontRef>
-              </p:style>
-            </p:cxnSp>
-            <mc:AlternateContent xmlns:mc="http://schemas.openxmlformats.org/markup-compatibility/2006" xmlns:a14="http://schemas.microsoft.com/office/drawing/2010/main">
-              <mc:Choice Requires="a14">
-                <p:sp>
-                  <p:nvSpPr>
-                    <p:cNvPr id="31" name="TextBox 30">
-                      <a:extLst>
-                        <a:ext uri="{FF2B5EF4-FFF2-40B4-BE49-F238E27FC236}">
-                          <a16:creationId xmlns:a16="http://schemas.microsoft.com/office/drawing/2014/main" id="{2BE58BA4-22A1-ABB5-039D-E96A936D1027}"/>
-                        </a:ext>
-                      </a:extLst>
-                    </p:cNvPr>
-                    <p:cNvSpPr txBox="1"/>
-                    <p:nvPr/>
-                  </p:nvSpPr>
-                  <p:spPr>
-                    <a:xfrm>
-                      <a:off x="6096000" y="4448684"/>
-                      <a:ext cx="860428" cy="184666"/>
-                    </a:xfrm>
-                    <a:prstGeom prst="rect">
-                      <a:avLst/>
-                    </a:prstGeom>
-                    <a:noFill/>
-                  </p:spPr>
-                  <p:txBody>
-                    <a:bodyPr wrap="none" lIns="0" tIns="0" rIns="0" bIns="0" rtlCol="0">
-                      <a:spAutoFit/>
-                    </a:bodyPr>
-                    <a:lstStyle/>
-                    <a:p>
-                      <a:pPr/>
-                      <a14:m>
-                        <m:oMathPara xmlns:m="http://schemas.openxmlformats.org/officeDocument/2006/math">
-                          <m:oMathParaPr>
-                            <m:jc m:val="centerGroup"/>
-                          </m:oMathParaPr>
-                          <m:oMath xmlns:m="http://schemas.openxmlformats.org/officeDocument/2006/math">
-                            <m:r>
-                              <a:rPr lang="en-US" sz="1200" b="0" i="1" smtClean="0">
-                                <a:latin typeface="Cambria Math" panose="02040503050406030204" pitchFamily="18" charset="0"/>
-                              </a:rPr>
-                              <m:t>𝑃</m:t>
-                            </m:r>
-                            <m:r>
-                              <a:rPr lang="en-US" sz="1200" b="0" i="1" smtClean="0">
-                                <a:latin typeface="Cambria Math" panose="02040503050406030204" pitchFamily="18" charset="0"/>
-                              </a:rPr>
-                              <m:t>(</m:t>
-                            </m:r>
-                            <m:sSub>
-                              <m:sSubPr>
-                                <m:ctrlPr>
-                                  <a:rPr lang="en-US" sz="1200" b="0" i="1" smtClean="0">
-                                    <a:latin typeface="Cambria Math" panose="02040503050406030204" pitchFamily="18" charset="0"/>
-                                  </a:rPr>
-                                </m:ctrlPr>
-                              </m:sSubPr>
-                              <m:e>
-                                <m:r>
-                                  <a:rPr lang="en-US" sz="1200" b="0" i="1" smtClean="0">
-                                    <a:latin typeface="Cambria Math" panose="02040503050406030204" pitchFamily="18" charset="0"/>
-                                  </a:rPr>
-                                  <m:t>𝑌</m:t>
-                                </m:r>
-                              </m:e>
-                              <m:sub>
-                                <m:r>
-                                  <a:rPr lang="en-US" sz="1200" b="0" i="1" smtClean="0">
-                                    <a:latin typeface="Cambria Math" panose="02040503050406030204" pitchFamily="18" charset="0"/>
-                                  </a:rPr>
-                                  <m:t>𝑖</m:t>
-                                </m:r>
-                              </m:sub>
-                            </m:sSub>
-                            <m:r>
-                              <a:rPr lang="en-US" sz="1200" b="0" i="1" smtClean="0">
-                                <a:latin typeface="Cambria Math" panose="02040503050406030204" pitchFamily="18" charset="0"/>
-                              </a:rPr>
-                              <m:t>=1|</m:t>
-                            </m:r>
-                            <m:sSub>
-                              <m:sSubPr>
-                                <m:ctrlPr>
-                                  <a:rPr lang="en-US" sz="1200" b="0" i="1" smtClean="0">
-                                    <a:latin typeface="Cambria Math" panose="02040503050406030204" pitchFamily="18" charset="0"/>
-                                  </a:rPr>
-                                </m:ctrlPr>
-                              </m:sSubPr>
-                              <m:e>
-                                <m:r>
-                                  <a:rPr lang="en-US" sz="1200" b="0" i="1" smtClean="0">
-                                    <a:latin typeface="Cambria Math" panose="02040503050406030204" pitchFamily="18" charset="0"/>
-                                  </a:rPr>
-                                  <m:t>𝐴</m:t>
-                                </m:r>
-                              </m:e>
-                              <m:sub>
-                                <m:r>
-                                  <a:rPr lang="en-US" sz="1200" b="0" i="1" smtClean="0">
-                                    <a:latin typeface="Cambria Math" panose="02040503050406030204" pitchFamily="18" charset="0"/>
-                                  </a:rPr>
-                                  <m:t>𝑖</m:t>
-                                </m:r>
-                              </m:sub>
-                            </m:sSub>
-                            <m:r>
-                              <a:rPr lang="en-US" sz="1200" b="0" i="1" smtClean="0">
-                                <a:latin typeface="Cambria Math" panose="02040503050406030204" pitchFamily="18" charset="0"/>
-                              </a:rPr>
-                              <m:t>)</m:t>
-                            </m:r>
-                          </m:oMath>
-                        </m:oMathPara>
-                      </a14:m>
-                      <a:endParaRPr lang="en-US" sz="1200" dirty="0"/>
-                    </a:p>
-                  </p:txBody>
-                </p:sp>
-              </mc:Choice>
-              <mc:Fallback xmlns="">
-                <p:sp>
-                  <p:nvSpPr>
-                    <p:cNvPr id="31" name="TextBox 30">
-                      <a:extLst>
-                        <a:ext uri="{FF2B5EF4-FFF2-40B4-BE49-F238E27FC236}">
-                          <a16:creationId xmlns:a16="http://schemas.microsoft.com/office/drawing/2014/main" id="{2BE58BA4-22A1-ABB5-039D-E96A936D1027}"/>
-                        </a:ext>
-                      </a:extLst>
-                    </p:cNvPr>
-                    <p:cNvSpPr txBox="1">
-                      <a:spLocks noRot="1" noChangeAspect="1" noMove="1" noResize="1" noEditPoints="1" noAdjustHandles="1" noChangeArrowheads="1" noChangeShapeType="1" noTextEdit="1"/>
-                    </p:cNvSpPr>
-                    <p:nvPr/>
-                  </p:nvSpPr>
-                  <p:spPr>
-                    <a:xfrm>
-                      <a:off x="6096000" y="4448684"/>
-                      <a:ext cx="860428" cy="184666"/>
-                    </a:xfrm>
-                    <a:prstGeom prst="rect">
-                      <a:avLst/>
-                    </a:prstGeom>
-                    <a:blipFill>
-                      <a:blip r:embed="rId7"/>
-                      <a:stretch>
-                        <a:fillRect l="-4348" r="-5797" b="-31250"/>
-                      </a:stretch>
-                    </a:blipFill>
-                  </p:spPr>
-                  <p:txBody>
-                    <a:bodyPr/>
-                    <a:lstStyle/>
-                    <a:p>
-                      <a:r>
-                        <a:rPr lang="en-US">
-                          <a:noFill/>
-                        </a:rPr>
-                        <a:t> </a:t>
-                      </a:r>
-                    </a:p>
-                  </p:txBody>
-                </p:sp>
-              </mc:Fallback>
-            </mc:AlternateContent>
-            <mc:AlternateContent xmlns:mc="http://schemas.openxmlformats.org/markup-compatibility/2006" xmlns:a14="http://schemas.microsoft.com/office/drawing/2010/main">
-              <mc:Choice Requires="a14">
-                <p:sp>
-                  <p:nvSpPr>
-                    <p:cNvPr id="32" name="TextBox 31">
-                      <a:extLst>
-                        <a:ext uri="{FF2B5EF4-FFF2-40B4-BE49-F238E27FC236}">
-                          <a16:creationId xmlns:a16="http://schemas.microsoft.com/office/drawing/2014/main" id="{78092802-0200-04DA-853D-32FFCFD8E616}"/>
-                        </a:ext>
-                      </a:extLst>
-                    </p:cNvPr>
-                    <p:cNvSpPr txBox="1"/>
-                    <p:nvPr/>
-                  </p:nvSpPr>
-                  <p:spPr>
-                    <a:xfrm>
-                      <a:off x="7777872" y="5154837"/>
-                      <a:ext cx="180178" cy="184666"/>
-                    </a:xfrm>
-                    <a:prstGeom prst="rect">
-                      <a:avLst/>
-                    </a:prstGeom>
-                    <a:noFill/>
-                  </p:spPr>
-                  <p:txBody>
-                    <a:bodyPr wrap="none" lIns="0" tIns="0" rIns="0" bIns="0" rtlCol="0">
-                      <a:spAutoFit/>
-                    </a:bodyPr>
-                    <a:lstStyle/>
-                    <a:p>
-                      <a:pPr/>
-                      <a14:m>
-                        <m:oMathPara xmlns:m="http://schemas.openxmlformats.org/officeDocument/2006/math">
-                          <m:oMathParaPr>
-                            <m:jc m:val="centerGroup"/>
-                          </m:oMathParaPr>
-                          <m:oMath xmlns:m="http://schemas.openxmlformats.org/officeDocument/2006/math">
-                            <m:sSub>
-                              <m:sSubPr>
-                                <m:ctrlPr>
-                                  <a:rPr lang="en-US" sz="1200" b="0" i="1" smtClean="0">
-                                    <a:latin typeface="Cambria Math" panose="02040503050406030204" pitchFamily="18" charset="0"/>
-                                  </a:rPr>
-                                </m:ctrlPr>
-                              </m:sSubPr>
-                              <m:e>
-                                <m:r>
-                                  <a:rPr lang="en-US" sz="1200" b="0" i="1" smtClean="0">
-                                    <a:latin typeface="Cambria Math" panose="02040503050406030204" pitchFamily="18" charset="0"/>
-                                  </a:rPr>
-                                  <m:t>𝐴</m:t>
-                                </m:r>
-                              </m:e>
-                              <m:sub>
-                                <m:r>
-                                  <a:rPr lang="en-US" sz="1200" b="0" i="1" smtClean="0">
-                                    <a:latin typeface="Cambria Math" panose="02040503050406030204" pitchFamily="18" charset="0"/>
-                                  </a:rPr>
-                                  <m:t>𝑖</m:t>
-                                </m:r>
-                              </m:sub>
-                            </m:sSub>
-                          </m:oMath>
-                        </m:oMathPara>
-                      </a14:m>
-                      <a:endParaRPr lang="en-US" sz="1200" dirty="0"/>
-                    </a:p>
-                  </p:txBody>
-                </p:sp>
-              </mc:Choice>
-              <mc:Fallback xmlns="">
-                <p:sp>
-                  <p:nvSpPr>
-                    <p:cNvPr id="32" name="TextBox 31">
-                      <a:extLst>
-                        <a:ext uri="{FF2B5EF4-FFF2-40B4-BE49-F238E27FC236}">
-                          <a16:creationId xmlns:a16="http://schemas.microsoft.com/office/drawing/2014/main" id="{78092802-0200-04DA-853D-32FFCFD8E616}"/>
-                        </a:ext>
-                      </a:extLst>
-                    </p:cNvPr>
-                    <p:cNvSpPr txBox="1">
-                      <a:spLocks noRot="1" noChangeAspect="1" noMove="1" noResize="1" noEditPoints="1" noAdjustHandles="1" noChangeArrowheads="1" noChangeShapeType="1" noTextEdit="1"/>
-                    </p:cNvSpPr>
-                    <p:nvPr/>
-                  </p:nvSpPr>
-                  <p:spPr>
-                    <a:xfrm>
-                      <a:off x="7777872" y="5154837"/>
-                      <a:ext cx="180178" cy="184666"/>
-                    </a:xfrm>
-                    <a:prstGeom prst="rect">
-                      <a:avLst/>
-                    </a:prstGeom>
-                    <a:blipFill>
-                      <a:blip r:embed="rId8"/>
-                      <a:stretch>
-                        <a:fillRect l="-18750" r="-6250" b="-20000"/>
-                      </a:stretch>
-                    </a:blipFill>
-                  </p:spPr>
-                  <p:txBody>
-                    <a:bodyPr/>
-                    <a:lstStyle/>
-                    <a:p>
-                      <a:r>
-                        <a:rPr lang="en-US">
-                          <a:noFill/>
-                        </a:rPr>
-                        <a:t> </a:t>
-                      </a:r>
-                    </a:p>
-                  </p:txBody>
-                </p:sp>
-              </mc:Fallback>
-            </mc:AlternateContent>
-            <p:sp>
-              <p:nvSpPr>
-                <p:cNvPr id="33" name="TextBox 32">
-                  <a:extLst>
-                    <a:ext uri="{FF2B5EF4-FFF2-40B4-BE49-F238E27FC236}">
-                      <a16:creationId xmlns:a16="http://schemas.microsoft.com/office/drawing/2014/main" id="{4303886C-1548-5570-E17E-5BD0CF5AC674}"/>
-                    </a:ext>
-                  </a:extLst>
-                </p:cNvPr>
-                <p:cNvSpPr txBox="1"/>
-                <p:nvPr/>
-              </p:nvSpPr>
-              <p:spPr>
-                <a:xfrm>
-                  <a:off x="6096000" y="3557686"/>
-                  <a:ext cx="2704402" cy="369332"/>
-                </a:xfrm>
-                <a:prstGeom prst="rect">
-                  <a:avLst/>
-                </a:prstGeom>
-                <a:noFill/>
-              </p:spPr>
-              <p:txBody>
-                <a:bodyPr wrap="square" rtlCol="0">
-                  <a:spAutoFit/>
-                </a:bodyPr>
-                <a:lstStyle/>
-                <a:p>
-                  <a:pPr algn="ctr"/>
-                  <a:r>
-                    <a:rPr lang="en-US" i="1" dirty="0">
-                      <a:solidFill>
-                        <a:srgbClr val="0432FF"/>
-                      </a:solidFill>
-                    </a:rPr>
-                    <a:t>Naïve (empirical)</a:t>
-                  </a:r>
-                </a:p>
-              </p:txBody>
-            </p:sp>
-            <p:sp>
-              <p:nvSpPr>
-                <p:cNvPr id="35" name="Freeform 34">
-                  <a:extLst>
-                    <a:ext uri="{FF2B5EF4-FFF2-40B4-BE49-F238E27FC236}">
-                      <a16:creationId xmlns:a16="http://schemas.microsoft.com/office/drawing/2014/main" id="{A2F5A194-1ED3-EC75-8B0B-8728190CC44A}"/>
-                    </a:ext>
-                  </a:extLst>
-                </p:cNvPr>
-                <p:cNvSpPr/>
-                <p:nvPr/>
-              </p:nvSpPr>
-              <p:spPr>
-                <a:xfrm>
-                  <a:off x="7153725" y="4208390"/>
-                  <a:ext cx="1403850" cy="639327"/>
-                </a:xfrm>
-                <a:custGeom>
-                  <a:avLst/>
-                  <a:gdLst>
-                    <a:gd name="csX0" fmla="*/ 0 w 1403850"/>
-                    <a:gd name="csY0" fmla="*/ 409773 h 409773"/>
-                    <a:gd name="csX1" fmla="*/ 18971 w 1403850"/>
-                    <a:gd name="csY1" fmla="*/ 405979 h 409773"/>
-                    <a:gd name="csX2" fmla="*/ 34148 w 1403850"/>
-                    <a:gd name="csY2" fmla="*/ 402185 h 409773"/>
-                    <a:gd name="csX3" fmla="*/ 79678 w 1403850"/>
-                    <a:gd name="csY3" fmla="*/ 394596 h 409773"/>
-                    <a:gd name="csX4" fmla="*/ 91060 w 1403850"/>
-                    <a:gd name="csY4" fmla="*/ 387008 h 409773"/>
-                    <a:gd name="csX5" fmla="*/ 132797 w 1403850"/>
-                    <a:gd name="csY5" fmla="*/ 379419 h 409773"/>
-                    <a:gd name="csX6" fmla="*/ 170738 w 1403850"/>
-                    <a:gd name="csY6" fmla="*/ 368037 h 409773"/>
-                    <a:gd name="csX7" fmla="*/ 185915 w 1403850"/>
-                    <a:gd name="csY7" fmla="*/ 360448 h 409773"/>
-                    <a:gd name="csX8" fmla="*/ 220063 w 1403850"/>
-                    <a:gd name="csY8" fmla="*/ 371831 h 409773"/>
-                    <a:gd name="csX9" fmla="*/ 242828 w 1403850"/>
-                    <a:gd name="csY9" fmla="*/ 379419 h 409773"/>
-                    <a:gd name="csX10" fmla="*/ 254211 w 1403850"/>
-                    <a:gd name="csY10" fmla="*/ 383214 h 409773"/>
-                    <a:gd name="csX11" fmla="*/ 276976 w 1403850"/>
-                    <a:gd name="csY11" fmla="*/ 387008 h 409773"/>
-                    <a:gd name="csX12" fmla="*/ 303535 w 1403850"/>
-                    <a:gd name="csY12" fmla="*/ 383214 h 409773"/>
-                    <a:gd name="csX13" fmla="*/ 314918 w 1403850"/>
-                    <a:gd name="csY13" fmla="*/ 375625 h 409773"/>
-                    <a:gd name="csX14" fmla="*/ 333889 w 1403850"/>
-                    <a:gd name="csY14" fmla="*/ 364243 h 409773"/>
-                    <a:gd name="csX15" fmla="*/ 349065 w 1403850"/>
-                    <a:gd name="csY15" fmla="*/ 360448 h 409773"/>
-                    <a:gd name="csX16" fmla="*/ 364242 w 1403850"/>
-                    <a:gd name="csY16" fmla="*/ 352860 h 409773"/>
-                    <a:gd name="csX17" fmla="*/ 390801 w 1403850"/>
-                    <a:gd name="csY17" fmla="*/ 345272 h 409773"/>
-                    <a:gd name="csX18" fmla="*/ 405978 w 1403850"/>
-                    <a:gd name="csY18" fmla="*/ 337683 h 409773"/>
-                    <a:gd name="csX19" fmla="*/ 432538 w 1403850"/>
-                    <a:gd name="csY19" fmla="*/ 326301 h 409773"/>
-                    <a:gd name="csX20" fmla="*/ 455303 w 1403850"/>
-                    <a:gd name="csY20" fmla="*/ 307330 h 409773"/>
-                    <a:gd name="csX21" fmla="*/ 478068 w 1403850"/>
-                    <a:gd name="csY21" fmla="*/ 295947 h 409773"/>
-                    <a:gd name="csX22" fmla="*/ 489450 w 1403850"/>
-                    <a:gd name="csY22" fmla="*/ 288359 h 409773"/>
-                    <a:gd name="csX23" fmla="*/ 576717 w 1403850"/>
-                    <a:gd name="csY23" fmla="*/ 295947 h 409773"/>
-                    <a:gd name="csX24" fmla="*/ 614659 w 1403850"/>
-                    <a:gd name="csY24" fmla="*/ 292153 h 409773"/>
-                    <a:gd name="csX25" fmla="*/ 626041 w 1403850"/>
-                    <a:gd name="csY25" fmla="*/ 280770 h 409773"/>
-                    <a:gd name="csX26" fmla="*/ 641218 w 1403850"/>
-                    <a:gd name="csY26" fmla="*/ 254211 h 409773"/>
-                    <a:gd name="csX27" fmla="*/ 660189 w 1403850"/>
-                    <a:gd name="csY27" fmla="*/ 239034 h 409773"/>
-                    <a:gd name="csX28" fmla="*/ 675366 w 1403850"/>
-                    <a:gd name="csY28" fmla="*/ 235240 h 409773"/>
-                    <a:gd name="csX29" fmla="*/ 686748 w 1403850"/>
-                    <a:gd name="csY29" fmla="*/ 231446 h 409773"/>
-                    <a:gd name="csX30" fmla="*/ 709514 w 1403850"/>
-                    <a:gd name="csY30" fmla="*/ 235240 h 409773"/>
-                    <a:gd name="csX31" fmla="*/ 724690 w 1403850"/>
-                    <a:gd name="csY31" fmla="*/ 239034 h 409773"/>
-                    <a:gd name="csX32" fmla="*/ 743661 w 1403850"/>
-                    <a:gd name="csY32" fmla="*/ 235240 h 409773"/>
-                    <a:gd name="csX33" fmla="*/ 762632 w 1403850"/>
-                    <a:gd name="csY33" fmla="*/ 223858 h 409773"/>
-                    <a:gd name="csX34" fmla="*/ 777809 w 1403850"/>
-                    <a:gd name="csY34" fmla="*/ 216269 h 409773"/>
-                    <a:gd name="csX35" fmla="*/ 792986 w 1403850"/>
-                    <a:gd name="csY35" fmla="*/ 204887 h 409773"/>
-                    <a:gd name="csX36" fmla="*/ 830928 w 1403850"/>
-                    <a:gd name="csY36" fmla="*/ 182121 h 409773"/>
-                    <a:gd name="csX37" fmla="*/ 861281 w 1403850"/>
-                    <a:gd name="csY37" fmla="*/ 174533 h 409773"/>
-                    <a:gd name="csX38" fmla="*/ 887840 w 1403850"/>
-                    <a:gd name="csY38" fmla="*/ 166945 h 409773"/>
-                    <a:gd name="csX39" fmla="*/ 910606 w 1403850"/>
-                    <a:gd name="csY39" fmla="*/ 151768 h 409773"/>
-                    <a:gd name="csX40" fmla="*/ 940959 w 1403850"/>
-                    <a:gd name="csY40" fmla="*/ 125209 h 409773"/>
-                    <a:gd name="csX41" fmla="*/ 971313 w 1403850"/>
-                    <a:gd name="csY41" fmla="*/ 121414 h 409773"/>
-                    <a:gd name="csX42" fmla="*/ 994078 w 1403850"/>
-                    <a:gd name="csY42" fmla="*/ 129003 h 409773"/>
-                    <a:gd name="csX43" fmla="*/ 1039608 w 1403850"/>
-                    <a:gd name="csY43" fmla="*/ 121414 h 409773"/>
-                    <a:gd name="csX44" fmla="*/ 1077550 w 1403850"/>
-                    <a:gd name="csY44" fmla="*/ 117620 h 409773"/>
-                    <a:gd name="csX45" fmla="*/ 1142051 w 1403850"/>
-                    <a:gd name="csY45" fmla="*/ 110032 h 409773"/>
-                    <a:gd name="csX46" fmla="*/ 1157228 w 1403850"/>
-                    <a:gd name="csY46" fmla="*/ 102443 h 409773"/>
-                    <a:gd name="csX47" fmla="*/ 1176199 w 1403850"/>
-                    <a:gd name="csY47" fmla="*/ 94855 h 409773"/>
-                    <a:gd name="csX48" fmla="*/ 1206553 w 1403850"/>
-                    <a:gd name="csY48" fmla="*/ 68296 h 409773"/>
-                    <a:gd name="csX49" fmla="*/ 1217935 w 1403850"/>
-                    <a:gd name="csY49" fmla="*/ 60707 h 409773"/>
-                    <a:gd name="csX50" fmla="*/ 1236906 w 1403850"/>
-                    <a:gd name="csY50" fmla="*/ 45531 h 409773"/>
-                    <a:gd name="csX51" fmla="*/ 1255877 w 1403850"/>
-                    <a:gd name="csY51" fmla="*/ 30354 h 409773"/>
-                    <a:gd name="csX52" fmla="*/ 1290025 w 1403850"/>
-                    <a:gd name="csY52" fmla="*/ 18971 h 409773"/>
-                    <a:gd name="csX53" fmla="*/ 1301407 w 1403850"/>
-                    <a:gd name="csY53" fmla="*/ 11383 h 409773"/>
-                    <a:gd name="csX54" fmla="*/ 1316584 w 1403850"/>
-                    <a:gd name="csY54" fmla="*/ 7589 h 409773"/>
-                    <a:gd name="csX55" fmla="*/ 1346938 w 1403850"/>
-                    <a:gd name="csY55" fmla="*/ 0 h 409773"/>
-                    <a:gd name="csX56" fmla="*/ 1403850 w 1403850"/>
-                    <a:gd name="csY56" fmla="*/ 3795 h 409773"/>
-                  </a:gdLst>
-                  <a:ahLst/>
-                  <a:cxnLst>
-                    <a:cxn ang="0">
-                      <a:pos x="csX0" y="csY0"/>
-                    </a:cxn>
-                    <a:cxn ang="0">
-                      <a:pos x="csX1" y="csY1"/>
-                    </a:cxn>
-                    <a:cxn ang="0">
-                      <a:pos x="csX2" y="csY2"/>
-                    </a:cxn>
-                    <a:cxn ang="0">
-                      <a:pos x="csX3" y="csY3"/>
-                    </a:cxn>
-                    <a:cxn ang="0">
-                      <a:pos x="csX4" y="csY4"/>
-                    </a:cxn>
-                    <a:cxn ang="0">
-                      <a:pos x="csX5" y="csY5"/>
-                    </a:cxn>
-                    <a:cxn ang="0">
-                      <a:pos x="csX6" y="csY6"/>
-                    </a:cxn>
-                    <a:cxn ang="0">
-                      <a:pos x="csX7" y="csY7"/>
-                    </a:cxn>
-                    <a:cxn ang="0">
-                      <a:pos x="csX8" y="csY8"/>
-                    </a:cxn>
-                    <a:cxn ang="0">
-                      <a:pos x="csX9" y="csY9"/>
-                    </a:cxn>
-                    <a:cxn ang="0">
-                      <a:pos x="csX10" y="csY10"/>
-                    </a:cxn>
-                    <a:cxn ang="0">
-                      <a:pos x="csX11" y="csY11"/>
-                    </a:cxn>
-                    <a:cxn ang="0">
-                      <a:pos x="csX12" y="csY12"/>
-                    </a:cxn>
-                    <a:cxn ang="0">
-                      <a:pos x="csX13" y="csY13"/>
-                    </a:cxn>
-                    <a:cxn ang="0">
-                      <a:pos x="csX14" y="csY14"/>
-                    </a:cxn>
-                    <a:cxn ang="0">
-                      <a:pos x="csX15" y="csY15"/>
-                    </a:cxn>
-                    <a:cxn ang="0">
-                      <a:pos x="csX16" y="csY16"/>
-                    </a:cxn>
-                    <a:cxn ang="0">
-                      <a:pos x="csX17" y="csY17"/>
-                    </a:cxn>
-                    <a:cxn ang="0">
-                      <a:pos x="csX18" y="csY18"/>
-                    </a:cxn>
-                    <a:cxn ang="0">
-                      <a:pos x="csX19" y="csY19"/>
-                    </a:cxn>
-                    <a:cxn ang="0">
-                      <a:pos x="csX20" y="csY20"/>
-                    </a:cxn>
-                    <a:cxn ang="0">
-                      <a:pos x="csX21" y="csY21"/>
-                    </a:cxn>
-                    <a:cxn ang="0">
-                      <a:pos x="csX22" y="csY22"/>
-                    </a:cxn>
-                    <a:cxn ang="0">
-                      <a:pos x="csX23" y="csY23"/>
-                    </a:cxn>
-                    <a:cxn ang="0">
-                      <a:pos x="csX24" y="csY24"/>
-                    </a:cxn>
-                    <a:cxn ang="0">
-                      <a:pos x="csX25" y="csY25"/>
-                    </a:cxn>
-                    <a:cxn ang="0">
-                      <a:pos x="csX26" y="csY26"/>
-                    </a:cxn>
-                    <a:cxn ang="0">
-                      <a:pos x="csX27" y="csY27"/>
-                    </a:cxn>
-                    <a:cxn ang="0">
-                      <a:pos x="csX28" y="csY28"/>
-                    </a:cxn>
-                    <a:cxn ang="0">
-                      <a:pos x="csX29" y="csY29"/>
-                    </a:cxn>
-                    <a:cxn ang="0">
-                      <a:pos x="csX30" y="csY30"/>
-                    </a:cxn>
-                    <a:cxn ang="0">
-                      <a:pos x="csX31" y="csY31"/>
-                    </a:cxn>
-                    <a:cxn ang="0">
-                      <a:pos x="csX32" y="csY32"/>
-                    </a:cxn>
-                    <a:cxn ang="0">
-                      <a:pos x="csX33" y="csY33"/>
-                    </a:cxn>
-                    <a:cxn ang="0">
-                      <a:pos x="csX34" y="csY34"/>
-                    </a:cxn>
-                    <a:cxn ang="0">
-                      <a:pos x="csX35" y="csY35"/>
-                    </a:cxn>
-                    <a:cxn ang="0">
-                      <a:pos x="csX36" y="csY36"/>
-                    </a:cxn>
-                    <a:cxn ang="0">
-                      <a:pos x="csX37" y="csY37"/>
-                    </a:cxn>
-                    <a:cxn ang="0">
-                      <a:pos x="csX38" y="csY38"/>
-                    </a:cxn>
-                    <a:cxn ang="0">
-                      <a:pos x="csX39" y="csY39"/>
-                    </a:cxn>
-                    <a:cxn ang="0">
-                      <a:pos x="csX40" y="csY40"/>
-                    </a:cxn>
-                    <a:cxn ang="0">
-                      <a:pos x="csX41" y="csY41"/>
-                    </a:cxn>
-                    <a:cxn ang="0">
-                      <a:pos x="csX42" y="csY42"/>
-                    </a:cxn>
-                    <a:cxn ang="0">
-                      <a:pos x="csX43" y="csY43"/>
-                    </a:cxn>
-                    <a:cxn ang="0">
-                      <a:pos x="csX44" y="csY44"/>
-                    </a:cxn>
-                    <a:cxn ang="0">
-                      <a:pos x="csX45" y="csY45"/>
-                    </a:cxn>
-                    <a:cxn ang="0">
-                      <a:pos x="csX46" y="csY46"/>
-                    </a:cxn>
-                    <a:cxn ang="0">
-                      <a:pos x="csX47" y="csY47"/>
-                    </a:cxn>
-                    <a:cxn ang="0">
-                      <a:pos x="csX48" y="csY48"/>
-                    </a:cxn>
-                    <a:cxn ang="0">
-                      <a:pos x="csX49" y="csY49"/>
-                    </a:cxn>
-                    <a:cxn ang="0">
-                      <a:pos x="csX50" y="csY50"/>
-                    </a:cxn>
-                    <a:cxn ang="0">
-                      <a:pos x="csX51" y="csY51"/>
-                    </a:cxn>
-                    <a:cxn ang="0">
-                      <a:pos x="csX52" y="csY52"/>
-                    </a:cxn>
-                    <a:cxn ang="0">
-                      <a:pos x="csX53" y="csY53"/>
-                    </a:cxn>
-                    <a:cxn ang="0">
-                      <a:pos x="csX54" y="csY54"/>
-                    </a:cxn>
-                    <a:cxn ang="0">
-                      <a:pos x="csX55" y="csY55"/>
-                    </a:cxn>
-                    <a:cxn ang="0">
-                      <a:pos x="csX56" y="csY56"/>
-                    </a:cxn>
-                  </a:cxnLst>
-                  <a:rect l="l" t="t" r="r" b="b"/>
-                  <a:pathLst>
-                    <a:path w="1403850" h="409773">
-                      <a:moveTo>
-                        <a:pt x="0" y="409773"/>
-                      </a:moveTo>
-                      <a:cubicBezTo>
-                        <a:pt x="6324" y="408508"/>
-                        <a:pt x="12676" y="407378"/>
-                        <a:pt x="18971" y="405979"/>
-                      </a:cubicBezTo>
-                      <a:cubicBezTo>
-                        <a:pt x="24062" y="404848"/>
-                        <a:pt x="29023" y="403146"/>
-                        <a:pt x="34148" y="402185"/>
-                      </a:cubicBezTo>
-                      <a:cubicBezTo>
-                        <a:pt x="49270" y="399349"/>
-                        <a:pt x="79678" y="394596"/>
-                        <a:pt x="79678" y="394596"/>
-                      </a:cubicBezTo>
-                      <a:cubicBezTo>
-                        <a:pt x="83472" y="392067"/>
-                        <a:pt x="86790" y="388609"/>
-                        <a:pt x="91060" y="387008"/>
-                      </a:cubicBezTo>
-                      <a:cubicBezTo>
-                        <a:pt x="95705" y="385266"/>
-                        <a:pt x="129760" y="380026"/>
-                        <a:pt x="132797" y="379419"/>
-                      </a:cubicBezTo>
-                      <a:cubicBezTo>
-                        <a:pt x="141873" y="377604"/>
-                        <a:pt x="164287" y="371263"/>
-                        <a:pt x="170738" y="368037"/>
-                      </a:cubicBezTo>
-                      <a:lnTo>
-                        <a:pt x="185915" y="360448"/>
-                      </a:lnTo>
-                      <a:cubicBezTo>
-                        <a:pt x="222375" y="367742"/>
-                        <a:pt x="188643" y="359264"/>
-                        <a:pt x="220063" y="371831"/>
-                      </a:cubicBezTo>
-                      <a:cubicBezTo>
-                        <a:pt x="227490" y="374802"/>
-                        <a:pt x="235240" y="376890"/>
-                        <a:pt x="242828" y="379419"/>
-                      </a:cubicBezTo>
-                      <a:cubicBezTo>
-                        <a:pt x="246622" y="380684"/>
-                        <a:pt x="250266" y="382556"/>
-                        <a:pt x="254211" y="383214"/>
-                      </a:cubicBezTo>
-                      <a:lnTo>
-                        <a:pt x="276976" y="387008"/>
-                      </a:lnTo>
-                      <a:cubicBezTo>
-                        <a:pt x="285829" y="385743"/>
-                        <a:pt x="294969" y="385784"/>
-                        <a:pt x="303535" y="383214"/>
-                      </a:cubicBezTo>
-                      <a:cubicBezTo>
-                        <a:pt x="307903" y="381904"/>
-                        <a:pt x="311051" y="378042"/>
-                        <a:pt x="314918" y="375625"/>
-                      </a:cubicBezTo>
-                      <a:cubicBezTo>
-                        <a:pt x="321172" y="371717"/>
-                        <a:pt x="327150" y="367238"/>
-                        <a:pt x="333889" y="364243"/>
-                      </a:cubicBezTo>
-                      <a:cubicBezTo>
-                        <a:pt x="338654" y="362125"/>
-                        <a:pt x="344183" y="362279"/>
-                        <a:pt x="349065" y="360448"/>
-                      </a:cubicBezTo>
-                      <a:cubicBezTo>
-                        <a:pt x="354361" y="358462"/>
-                        <a:pt x="359043" y="355088"/>
-                        <a:pt x="364242" y="352860"/>
-                      </a:cubicBezTo>
-                      <a:cubicBezTo>
-                        <a:pt x="371861" y="349595"/>
-                        <a:pt x="383101" y="347197"/>
-                        <a:pt x="390801" y="345272"/>
-                      </a:cubicBezTo>
-                      <a:cubicBezTo>
-                        <a:pt x="395860" y="342742"/>
-                        <a:pt x="400779" y="339911"/>
-                        <a:pt x="405978" y="337683"/>
-                      </a:cubicBezTo>
-                      <a:cubicBezTo>
-                        <a:pt x="427261" y="328562"/>
-                        <a:pt x="407371" y="340682"/>
-                        <a:pt x="432538" y="326301"/>
-                      </a:cubicBezTo>
-                      <a:cubicBezTo>
-                        <a:pt x="450513" y="316029"/>
-                        <a:pt x="438191" y="321590"/>
-                        <a:pt x="455303" y="307330"/>
-                      </a:cubicBezTo>
-                      <a:cubicBezTo>
-                        <a:pt x="465112" y="299156"/>
-                        <a:pt x="466657" y="299750"/>
-                        <a:pt x="478068" y="295947"/>
-                      </a:cubicBezTo>
-                      <a:cubicBezTo>
-                        <a:pt x="481862" y="293418"/>
-                        <a:pt x="484899" y="288643"/>
-                        <a:pt x="489450" y="288359"/>
-                      </a:cubicBezTo>
-                      <a:cubicBezTo>
-                        <a:pt x="498255" y="287809"/>
-                        <a:pt x="563367" y="294612"/>
-                        <a:pt x="576717" y="295947"/>
-                      </a:cubicBezTo>
-                      <a:cubicBezTo>
-                        <a:pt x="589364" y="294682"/>
-                        <a:pt x="602511" y="295891"/>
-                        <a:pt x="614659" y="292153"/>
-                      </a:cubicBezTo>
-                      <a:cubicBezTo>
-                        <a:pt x="619787" y="290575"/>
-                        <a:pt x="622922" y="285136"/>
-                        <a:pt x="626041" y="280770"/>
-                      </a:cubicBezTo>
-                      <a:cubicBezTo>
-                        <a:pt x="633475" y="270363"/>
-                        <a:pt x="632262" y="263167"/>
-                        <a:pt x="641218" y="254211"/>
-                      </a:cubicBezTo>
-                      <a:cubicBezTo>
-                        <a:pt x="646944" y="248485"/>
-                        <a:pt x="653110" y="242967"/>
-                        <a:pt x="660189" y="239034"/>
-                      </a:cubicBezTo>
-                      <a:cubicBezTo>
-                        <a:pt x="664747" y="236502"/>
-                        <a:pt x="670352" y="236673"/>
-                        <a:pt x="675366" y="235240"/>
-                      </a:cubicBezTo>
-                      <a:cubicBezTo>
-                        <a:pt x="679211" y="234141"/>
-                        <a:pt x="682954" y="232711"/>
-                        <a:pt x="686748" y="231446"/>
-                      </a:cubicBezTo>
-                      <a:cubicBezTo>
-                        <a:pt x="694337" y="232711"/>
-                        <a:pt x="701970" y="233731"/>
-                        <a:pt x="709514" y="235240"/>
-                      </a:cubicBezTo>
-                      <a:cubicBezTo>
-                        <a:pt x="714627" y="236263"/>
-                        <a:pt x="719476" y="239034"/>
-                        <a:pt x="724690" y="239034"/>
-                      </a:cubicBezTo>
-                      <a:cubicBezTo>
-                        <a:pt x="731139" y="239034"/>
-                        <a:pt x="737337" y="236505"/>
-                        <a:pt x="743661" y="235240"/>
-                      </a:cubicBezTo>
-                      <a:cubicBezTo>
-                        <a:pt x="749985" y="231446"/>
-                        <a:pt x="756186" y="227439"/>
-                        <a:pt x="762632" y="223858"/>
-                      </a:cubicBezTo>
-                      <a:cubicBezTo>
-                        <a:pt x="767576" y="221111"/>
-                        <a:pt x="773013" y="219267"/>
-                        <a:pt x="777809" y="216269"/>
-                      </a:cubicBezTo>
-                      <a:cubicBezTo>
-                        <a:pt x="783171" y="212918"/>
-                        <a:pt x="787805" y="208513"/>
-                        <a:pt x="792986" y="204887"/>
-                      </a:cubicBezTo>
-                      <a:cubicBezTo>
-                        <a:pt x="800856" y="199378"/>
-                        <a:pt x="819750" y="185847"/>
-                        <a:pt x="830928" y="182121"/>
-                      </a:cubicBezTo>
-                      <a:cubicBezTo>
-                        <a:pt x="840822" y="178823"/>
-                        <a:pt x="851387" y="177831"/>
-                        <a:pt x="861281" y="174533"/>
-                      </a:cubicBezTo>
-                      <a:cubicBezTo>
-                        <a:pt x="877611" y="169090"/>
-                        <a:pt x="868784" y="171709"/>
-                        <a:pt x="887840" y="166945"/>
-                      </a:cubicBezTo>
-                      <a:cubicBezTo>
-                        <a:pt x="909751" y="134080"/>
-                        <a:pt x="877935" y="176271"/>
-                        <a:pt x="910606" y="151768"/>
-                      </a:cubicBezTo>
-                      <a:cubicBezTo>
-                        <a:pt x="966732" y="109673"/>
-                        <a:pt x="892405" y="149484"/>
-                        <a:pt x="940959" y="125209"/>
-                      </a:cubicBezTo>
-                      <a:cubicBezTo>
-                        <a:pt x="953172" y="112996"/>
-                        <a:pt x="946772" y="115279"/>
-                        <a:pt x="971313" y="121414"/>
-                      </a:cubicBezTo>
-                      <a:cubicBezTo>
-                        <a:pt x="979073" y="123354"/>
-                        <a:pt x="994078" y="129003"/>
-                        <a:pt x="994078" y="129003"/>
-                      </a:cubicBezTo>
-                      <a:cubicBezTo>
-                        <a:pt x="1009255" y="126473"/>
-                        <a:pt x="1024363" y="123493"/>
-                        <a:pt x="1039608" y="121414"/>
-                      </a:cubicBezTo>
-                      <a:cubicBezTo>
-                        <a:pt x="1052202" y="119697"/>
-                        <a:pt x="1064917" y="119024"/>
-                        <a:pt x="1077550" y="117620"/>
-                      </a:cubicBezTo>
-                      <a:lnTo>
-                        <a:pt x="1142051" y="110032"/>
-                      </a:lnTo>
-                      <a:cubicBezTo>
-                        <a:pt x="1147110" y="107502"/>
-                        <a:pt x="1152059" y="104740"/>
-                        <a:pt x="1157228" y="102443"/>
-                      </a:cubicBezTo>
-                      <a:cubicBezTo>
-                        <a:pt x="1163452" y="99677"/>
-                        <a:pt x="1170245" y="98162"/>
-                        <a:pt x="1176199" y="94855"/>
-                      </a:cubicBezTo>
-                      <a:cubicBezTo>
-                        <a:pt x="1212596" y="74636"/>
-                        <a:pt x="1169372" y="93086"/>
-                        <a:pt x="1206553" y="68296"/>
-                      </a:cubicBezTo>
-                      <a:lnTo>
-                        <a:pt x="1217935" y="60707"/>
-                      </a:lnTo>
-                      <a:cubicBezTo>
-                        <a:pt x="1233049" y="38036"/>
-                        <a:pt x="1216542" y="57750"/>
-                        <a:pt x="1236906" y="45531"/>
-                      </a:cubicBezTo>
-                      <a:cubicBezTo>
-                        <a:pt x="1255956" y="34100"/>
-                        <a:pt x="1231016" y="40713"/>
-                        <a:pt x="1255877" y="30354"/>
-                      </a:cubicBezTo>
-                      <a:cubicBezTo>
-                        <a:pt x="1266952" y="25739"/>
-                        <a:pt x="1280042" y="25627"/>
-                        <a:pt x="1290025" y="18971"/>
-                      </a:cubicBezTo>
-                      <a:cubicBezTo>
-                        <a:pt x="1293819" y="16442"/>
-                        <a:pt x="1297216" y="13179"/>
-                        <a:pt x="1301407" y="11383"/>
-                      </a:cubicBezTo>
-                      <a:cubicBezTo>
-                        <a:pt x="1306200" y="9329"/>
-                        <a:pt x="1311570" y="9021"/>
-                        <a:pt x="1316584" y="7589"/>
-                      </a:cubicBezTo>
-                      <a:cubicBezTo>
-                        <a:pt x="1343814" y="-190"/>
-                        <a:pt x="1308359" y="7717"/>
-                        <a:pt x="1346938" y="0"/>
-                      </a:cubicBezTo>
-                      <a:cubicBezTo>
-                        <a:pt x="1398784" y="3989"/>
-                        <a:pt x="1379772" y="3795"/>
-                        <a:pt x="1403850" y="3795"/>
-                      </a:cubicBezTo>
-                    </a:path>
-                  </a:pathLst>
-                </a:custGeom>
-                <a:noFill/>
-                <a:ln>
-                  <a:solidFill>
-                    <a:srgbClr val="0432FF"/>
-                  </a:solidFill>
-                </a:ln>
-              </p:spPr>
-              <p:style>
-                <a:lnRef idx="2">
-                  <a:schemeClr val="accent1">
-                    <a:shade val="15000"/>
-                  </a:schemeClr>
-                </a:lnRef>
-                <a:fillRef idx="1">
-                  <a:schemeClr val="accent1"/>
-                </a:fillRef>
-                <a:effectRef idx="0">
-                  <a:schemeClr val="accent1"/>
-                </a:effectRef>
-                <a:fontRef idx="minor">
-                  <a:schemeClr val="lt1"/>
-                </a:fontRef>
-              </p:style>
-              <p:txBody>
-                <a:bodyPr rtlCol="0" anchor="ctr"/>
-                <a:lstStyle/>
-                <a:p>
-                  <a:pPr algn="ctr"/>
-                  <a:endParaRPr lang="en-US" dirty="0"/>
-                </a:p>
-              </p:txBody>
-            </p:sp>
-          </p:grpSp>
-        </p:grpSp>
-        <p:sp>
-          <p:nvSpPr>
-            <p:cNvPr id="37" name="TextBox 36">
-              <a:extLst>
-                <a:ext uri="{FF2B5EF4-FFF2-40B4-BE49-F238E27FC236}">
-                  <a16:creationId xmlns:a16="http://schemas.microsoft.com/office/drawing/2014/main" id="{32F7F6AD-3FF6-6C6F-0329-C3D9E58FA597}"/>
-                </a:ext>
-              </a:extLst>
-            </p:cNvPr>
-            <p:cNvSpPr txBox="1"/>
-            <p:nvPr/>
-          </p:nvSpPr>
-          <p:spPr>
-            <a:xfrm>
-              <a:off x="7626772" y="708851"/>
-              <a:ext cx="2584490" cy="369332"/>
-            </a:xfrm>
-            <a:prstGeom prst="rect">
-              <a:avLst/>
-            </a:prstGeom>
-            <a:noFill/>
-          </p:spPr>
-          <p:txBody>
-            <a:bodyPr wrap="none" rtlCol="0">
-              <a:spAutoFit/>
-            </a:bodyPr>
-            <a:lstStyle/>
-            <a:p>
-              <a:r>
-                <a:rPr lang="en-US" dirty="0">
-                  <a:solidFill>
-                    <a:srgbClr val="0432FF"/>
-                  </a:solidFill>
-                  <a:latin typeface="Futura Medium" panose="020B0602020204020303" pitchFamily="34" charset="-79"/>
-                  <a:cs typeface="Futura Medium" panose="020B0602020204020303" pitchFamily="34" charset="-79"/>
-                </a:rPr>
-                <a:t>TALENT vs SELECTION</a:t>
-              </a:r>
-            </a:p>
-          </p:txBody>
-        </p:sp>
-      </p:grpSp>
-      <p:grpSp>
-        <p:nvGrpSpPr>
-          <p:cNvPr id="2" name="Group 1">
-            <a:extLst>
-              <a:ext uri="{FF2B5EF4-FFF2-40B4-BE49-F238E27FC236}">
-                <a16:creationId xmlns:a16="http://schemas.microsoft.com/office/drawing/2014/main" id="{53C924ED-CCFC-B8AB-125E-6F8147D3C084}"/>
-              </a:ext>
-            </a:extLst>
-          </p:cNvPr>
-          <p:cNvGrpSpPr/>
-          <p:nvPr/>
-        </p:nvGrpSpPr>
-        <p:grpSpPr>
-          <a:xfrm>
-            <a:off x="7321047" y="2985252"/>
-            <a:ext cx="3261912" cy="1135065"/>
-            <a:chOff x="6222694" y="1800137"/>
-            <a:chExt cx="3261912" cy="1661674"/>
-          </a:xfrm>
-        </p:grpSpPr>
-        <p:sp>
-          <p:nvSpPr>
-            <p:cNvPr id="3" name="TextBox 2">
-              <a:extLst>
-                <a:ext uri="{FF2B5EF4-FFF2-40B4-BE49-F238E27FC236}">
-                  <a16:creationId xmlns:a16="http://schemas.microsoft.com/office/drawing/2014/main" id="{580F20F0-942E-865E-0CF4-8CDD18DA42FD}"/>
-                </a:ext>
-              </a:extLst>
-            </p:cNvPr>
-            <p:cNvSpPr txBox="1"/>
-            <p:nvPr/>
-          </p:nvSpPr>
-          <p:spPr>
-            <a:xfrm>
-              <a:off x="6222694" y="1800137"/>
-              <a:ext cx="3261912" cy="307777"/>
-            </a:xfrm>
-            <a:prstGeom prst="rect">
-              <a:avLst/>
-            </a:prstGeom>
-            <a:noFill/>
-          </p:spPr>
-          <p:txBody>
-            <a:bodyPr wrap="square" rtlCol="0">
-              <a:spAutoFit/>
-            </a:bodyPr>
-            <a:lstStyle/>
-            <a:p>
-              <a:pPr algn="ctr"/>
-              <a:r>
-                <a:rPr lang="en-US" sz="1400" dirty="0">
-                  <a:solidFill>
-                    <a:srgbClr val="0432FF"/>
-                  </a:solidFill>
-                  <a:latin typeface="Futura Medium" panose="020B0602020204020303" pitchFamily="34" charset="-79"/>
-                  <a:cs typeface="Futura Medium" panose="020B0602020204020303" pitchFamily="34" charset="-79"/>
-                </a:rPr>
-                <a:t>Empirical (real panel)</a:t>
-              </a:r>
-              <a:endParaRPr lang="en-US" sz="1400" dirty="0">
+          <a:prstGeom prst="rect">
+            <a:avLst/>
+          </a:prstGeom>
+          <a:noFill/>
+        </p:spPr>
+        <p:txBody>
+          <a:bodyPr wrap="square" rtlCol="0">
+            <a:spAutoFit/>
+          </a:bodyPr>
+          <a:lstStyle/>
+          <a:p>
+            <a:r>
+              <a:rPr lang="en-US" sz="1400" dirty="0">
                 <a:solidFill>
                   <a:srgbClr val="0432FF"/>
                 </a:solidFill>
                 <a:latin typeface="Futura Medium" panose="020B0602020204020303" pitchFamily="34" charset="-79"/>
                 <a:cs typeface="Futura Medium" panose="020B0602020204020303" pitchFamily="34" charset="-79"/>
-              </a:endParaRPr>
-            </a:p>
-          </p:txBody>
-        </p:sp>
-        <mc:AlternateContent xmlns:mc="http://schemas.openxmlformats.org/markup-compatibility/2006">
-          <mc:Choice xmlns:a14="http://schemas.microsoft.com/office/drawing/2010/main" Requires="a14">
-            <p:sp>
-              <p:nvSpPr>
-                <p:cNvPr id="7" name="TextBox 6">
-                  <a:extLst>
-                    <a:ext uri="{FF2B5EF4-FFF2-40B4-BE49-F238E27FC236}">
-                      <a16:creationId xmlns:a16="http://schemas.microsoft.com/office/drawing/2014/main" id="{0B77B650-C396-DEF6-5A33-8DB93D5652B9}"/>
-                    </a:ext>
-                  </a:extLst>
-                </p:cNvPr>
-                <p:cNvSpPr txBox="1"/>
-                <p:nvPr/>
-              </p:nvSpPr>
-              <p:spPr>
-                <a:xfrm>
-                  <a:off x="6222694" y="2107914"/>
-                  <a:ext cx="3261912" cy="1353897"/>
-                </a:xfrm>
-                <a:prstGeom prst="rect">
-                  <a:avLst/>
-                </a:prstGeom>
-                <a:noFill/>
-              </p:spPr>
-              <p:txBody>
-                <a:bodyPr wrap="square" rtlCol="0">
-                  <a:spAutoFit/>
-                </a:bodyPr>
-                <a:lstStyle/>
-                <a:p>
-                  <a:pPr>
-                    <a:lnSpc>
-                      <a:spcPct val="150000"/>
-                    </a:lnSpc>
-                  </a:pPr>
-                  <a:r>
-                    <a:rPr lang="en-US" sz="1400" b="0" dirty="0"/>
-                    <a:t>Naïve: </a:t>
-                  </a:r>
-                  <a14:m>
+              </a:rPr>
+              <a:t>3. Selection</a:t>
+            </a:r>
+            <a:endParaRPr lang="en-US" sz="1400" dirty="0">
+              <a:solidFill>
+                <a:srgbClr val="0432FF"/>
+              </a:solidFill>
+            </a:endParaRPr>
+          </a:p>
+        </p:txBody>
+      </p:sp>
+      <mc:AlternateContent xmlns:mc="http://schemas.openxmlformats.org/markup-compatibility/2006">
+        <mc:Choice xmlns:a14="http://schemas.microsoft.com/office/drawing/2010/main" Requires="a14">
+          <p:sp>
+            <p:nvSpPr>
+              <p:cNvPr id="51" name="TextBox 50">
+                <a:extLst>
+                  <a:ext uri="{FF2B5EF4-FFF2-40B4-BE49-F238E27FC236}">
+                    <a16:creationId xmlns:a16="http://schemas.microsoft.com/office/drawing/2014/main" id="{2A497B29-CB0B-2225-3C2C-3BD04FF5EC04}"/>
+                  </a:ext>
+                </a:extLst>
+              </p:cNvPr>
+              <p:cNvSpPr txBox="1"/>
+              <p:nvPr/>
+            </p:nvSpPr>
+            <p:spPr>
+              <a:xfrm>
+                <a:off x="460513" y="2162594"/>
+                <a:ext cx="4536028" cy="1785552"/>
+              </a:xfrm>
+              <a:prstGeom prst="rect">
+                <a:avLst/>
+              </a:prstGeom>
+              <a:noFill/>
+            </p:spPr>
+            <p:txBody>
+              <a:bodyPr wrap="square" rtlCol="0">
+                <a:spAutoFit/>
+              </a:bodyPr>
+              <a:lstStyle/>
+              <a:p>
+                <a:pPr/>
+                <a14:m>
+                  <m:oMathPara xmlns:m="http://schemas.openxmlformats.org/officeDocument/2006/math">
+                    <m:oMathParaPr>
+                      <m:jc m:val="centerGroup"/>
+                    </m:oMathParaPr>
                     <m:oMath xmlns:m="http://schemas.openxmlformats.org/officeDocument/2006/math">
-                      <m:r>
-                        <a:rPr lang="en-US" sz="1400" b="0" i="1" dirty="0" smtClean="0">
-                          <a:latin typeface="Cambria Math" panose="02040503050406030204" pitchFamily="18" charset="0"/>
-                        </a:rPr>
-                        <m:t>𝑃</m:t>
-                      </m:r>
-                      <m:d>
-                        <m:dPr>
+                      <m:sSub>
+                        <m:sSubPr>
                           <m:ctrlPr>
-                            <a:rPr lang="en-US" sz="1400" b="0" i="1" dirty="0" smtClean="0">
+                            <a:rPr lang="en-US" sz="1600" b="0" i="1" smtClean="0">
+                              <a:solidFill>
+                                <a:srgbClr val="9437FF"/>
+                              </a:solidFill>
                               <a:latin typeface="Cambria Math" panose="02040503050406030204" pitchFamily="18" charset="0"/>
                             </a:rPr>
                           </m:ctrlPr>
-                        </m:dPr>
+                        </m:sSubPr>
                         <m:e>
-                          <m:sSub>
-                            <m:sSubPr>
+                          <m:r>
+                            <a:rPr lang="en-US" sz="1600" b="0" i="1" smtClean="0">
+                              <a:solidFill>
+                                <a:srgbClr val="9437FF"/>
+                              </a:solidFill>
+                              <a:latin typeface="Cambria Math" panose="02040503050406030204" pitchFamily="18" charset="0"/>
+                            </a:rPr>
+                            <m:t>𝜋</m:t>
+                          </m:r>
+                        </m:e>
+                        <m:sub>
+                          <m:r>
+                            <a:rPr lang="en-US" sz="1600" b="0" i="1" smtClean="0">
+                              <a:solidFill>
+                                <a:srgbClr val="9437FF"/>
+                              </a:solidFill>
+                              <a:latin typeface="Cambria Math" panose="02040503050406030204" pitchFamily="18" charset="0"/>
+                            </a:rPr>
+                            <m:t>𝑖𝑗</m:t>
+                          </m:r>
+                        </m:sub>
+                      </m:sSub>
+                      <m:r>
+                        <a:rPr lang="en-US" sz="1600" b="0" i="1" smtClean="0">
+                          <a:solidFill>
+                            <a:srgbClr val="9437FF"/>
+                          </a:solidFill>
+                          <a:latin typeface="Cambria Math" panose="02040503050406030204" pitchFamily="18" charset="0"/>
+                          <a:ea typeface="Cambria Math" panose="02040503050406030204" pitchFamily="18" charset="0"/>
+                        </a:rPr>
+                        <m:t>∝ </m:t>
+                      </m:r>
+                      <m:sSup>
+                        <m:sSupPr>
+                          <m:ctrlPr>
+                            <a:rPr lang="en-US" sz="1600" b="0" i="1" smtClean="0">
+                              <a:solidFill>
+                                <a:srgbClr val="9437FF"/>
+                              </a:solidFill>
+                              <a:latin typeface="Cambria Math" panose="02040503050406030204" pitchFamily="18" charset="0"/>
+                              <a:ea typeface="Cambria Math" panose="02040503050406030204" pitchFamily="18" charset="0"/>
+                            </a:rPr>
+                          </m:ctrlPr>
+                        </m:sSupPr>
+                        <m:e>
+                          <m:r>
+                            <a:rPr lang="en-US" sz="1600" b="0" i="1" smtClean="0">
+                              <a:solidFill>
+                                <a:srgbClr val="9437FF"/>
+                              </a:solidFill>
+                              <a:latin typeface="Cambria Math" panose="02040503050406030204" pitchFamily="18" charset="0"/>
+                              <a:ea typeface="Cambria Math" panose="02040503050406030204" pitchFamily="18" charset="0"/>
+                            </a:rPr>
+                            <m:t>𝑒</m:t>
+                          </m:r>
+                        </m:e>
+                        <m:sup>
+                          <m:d>
+                            <m:dPr>
                               <m:ctrlPr>
-                                <a:rPr lang="en-US" sz="1400" b="0" i="1" dirty="0" smtClean="0">
+                                <a:rPr lang="en-US" sz="1600" b="0" i="1" smtClean="0">
+                                  <a:solidFill>
+                                    <a:srgbClr val="9437FF"/>
+                                  </a:solidFill>
                                   <a:latin typeface="Cambria Math" panose="02040503050406030204" pitchFamily="18" charset="0"/>
+                                  <a:ea typeface="Cambria Math" panose="02040503050406030204" pitchFamily="18" charset="0"/>
                                 </a:rPr>
                               </m:ctrlPr>
-                            </m:sSubPr>
+                            </m:dPr>
                             <m:e>
                               <m:r>
-                                <a:rPr lang="en-US" sz="1400" b="0" i="1" dirty="0" smtClean="0">
+                                <a:rPr lang="en-US" sz="1600" b="0" i="1" smtClean="0">
+                                  <a:solidFill>
+                                    <a:srgbClr val="9437FF"/>
+                                  </a:solidFill>
                                   <a:latin typeface="Cambria Math" panose="02040503050406030204" pitchFamily="18" charset="0"/>
+                                  <a:ea typeface="Cambria Math" panose="02040503050406030204" pitchFamily="18" charset="0"/>
                                 </a:rPr>
-                                <m:t>𝑌</m:t>
+                                <m:t>−</m:t>
                               </m:r>
+                              <m:r>
+                                <a:rPr lang="en-US" sz="1600" b="0" i="1" smtClean="0">
+                                  <a:solidFill>
+                                    <a:srgbClr val="9437FF"/>
+                                  </a:solidFill>
+                                  <a:latin typeface="Cambria Math" panose="02040503050406030204" pitchFamily="18" charset="0"/>
+                                  <a:ea typeface="Cambria Math" panose="02040503050406030204" pitchFamily="18" charset="0"/>
+                                </a:rPr>
+                                <m:t>𝜌</m:t>
+                              </m:r>
+                              <m:r>
+                                <a:rPr lang="en-US" sz="1600" b="0" i="1" smtClean="0">
+                                  <a:solidFill>
+                                    <a:srgbClr val="9437FF"/>
+                                  </a:solidFill>
+                                  <a:latin typeface="Cambria Math" panose="02040503050406030204" pitchFamily="18" charset="0"/>
+                                  <a:ea typeface="Cambria Math" panose="02040503050406030204" pitchFamily="18" charset="0"/>
+                                </a:rPr>
+                                <m:t>∙</m:t>
+                              </m:r>
+                              <m:f>
+                                <m:fPr>
+                                  <m:ctrlPr>
+                                    <a:rPr lang="en-US" sz="1600" b="0" i="1" smtClean="0">
+                                      <a:solidFill>
+                                        <a:srgbClr val="9437FF"/>
+                                      </a:solidFill>
+                                      <a:latin typeface="Cambria Math" panose="02040503050406030204" pitchFamily="18" charset="0"/>
+                                      <a:ea typeface="Cambria Math" panose="02040503050406030204" pitchFamily="18" charset="0"/>
+                                    </a:rPr>
+                                  </m:ctrlPr>
+                                </m:fPr>
+                                <m:num>
+                                  <m:sSup>
+                                    <m:sSupPr>
+                                      <m:ctrlPr>
+                                        <a:rPr lang="en-US" sz="1600" b="0" i="1" smtClean="0">
+                                          <a:solidFill>
+                                            <a:srgbClr val="9437FF"/>
+                                          </a:solidFill>
+                                          <a:latin typeface="Cambria Math" panose="02040503050406030204" pitchFamily="18" charset="0"/>
+                                          <a:ea typeface="Cambria Math" panose="02040503050406030204" pitchFamily="18" charset="0"/>
+                                        </a:rPr>
+                                      </m:ctrlPr>
+                                    </m:sSupPr>
+                                    <m:e>
+                                      <m:d>
+                                        <m:dPr>
+                                          <m:ctrlPr>
+                                            <a:rPr lang="en-US" sz="1600" b="0" i="1" smtClean="0">
+                                              <a:solidFill>
+                                                <a:srgbClr val="9437FF"/>
+                                              </a:solidFill>
+                                              <a:latin typeface="Cambria Math" panose="02040503050406030204" pitchFamily="18" charset="0"/>
+                                              <a:ea typeface="Cambria Math" panose="02040503050406030204" pitchFamily="18" charset="0"/>
+                                            </a:rPr>
+                                          </m:ctrlPr>
+                                        </m:dPr>
+                                        <m:e>
+                                          <m:sSub>
+                                            <m:sSubPr>
+                                              <m:ctrlPr>
+                                                <a:rPr lang="en-US" sz="1600" b="0" i="1" smtClean="0">
+                                                  <a:solidFill>
+                                                    <a:srgbClr val="9437FF"/>
+                                                  </a:solidFill>
+                                                  <a:latin typeface="Cambria Math" panose="02040503050406030204" pitchFamily="18" charset="0"/>
+                                                  <a:ea typeface="Cambria Math" panose="02040503050406030204" pitchFamily="18" charset="0"/>
+                                                </a:rPr>
+                                              </m:ctrlPr>
+                                            </m:sSubPr>
+                                            <m:e>
+                                              <m:r>
+                                                <a:rPr lang="en-US" sz="1600" b="0" i="1" smtClean="0">
+                                                  <a:solidFill>
+                                                    <a:srgbClr val="9437FF"/>
+                                                  </a:solidFill>
+                                                  <a:latin typeface="Cambria Math" panose="02040503050406030204" pitchFamily="18" charset="0"/>
+                                                  <a:ea typeface="Cambria Math" panose="02040503050406030204" pitchFamily="18" charset="0"/>
+                                                </a:rPr>
+                                                <m:t>𝐴</m:t>
+                                              </m:r>
+                                            </m:e>
+                                            <m:sub>
+                                              <m:r>
+                                                <a:rPr lang="en-US" sz="1600" b="0" i="1" smtClean="0">
+                                                  <a:solidFill>
+                                                    <a:srgbClr val="9437FF"/>
+                                                  </a:solidFill>
+                                                  <a:latin typeface="Cambria Math" panose="02040503050406030204" pitchFamily="18" charset="0"/>
+                                                  <a:ea typeface="Cambria Math" panose="02040503050406030204" pitchFamily="18" charset="0"/>
+                                                </a:rPr>
+                                                <m:t>𝑖</m:t>
+                                              </m:r>
+                                            </m:sub>
+                                          </m:sSub>
+                                          <m:r>
+                                            <a:rPr lang="en-US" sz="1600" b="0" i="1" smtClean="0">
+                                              <a:solidFill>
+                                                <a:srgbClr val="9437FF"/>
+                                              </a:solidFill>
+                                              <a:latin typeface="Cambria Math" panose="02040503050406030204" pitchFamily="18" charset="0"/>
+                                              <a:ea typeface="Cambria Math" panose="02040503050406030204" pitchFamily="18" charset="0"/>
+                                            </a:rPr>
+                                            <m:t>−</m:t>
+                                          </m:r>
+                                          <m:sSub>
+                                            <m:sSubPr>
+                                              <m:ctrlPr>
+                                                <a:rPr lang="en-US" sz="1600" b="0" i="1" smtClean="0">
+                                                  <a:solidFill>
+                                                    <a:srgbClr val="9437FF"/>
+                                                  </a:solidFill>
+                                                  <a:latin typeface="Cambria Math" panose="02040503050406030204" pitchFamily="18" charset="0"/>
+                                                  <a:ea typeface="Cambria Math" panose="02040503050406030204" pitchFamily="18" charset="0"/>
+                                                </a:rPr>
+                                              </m:ctrlPr>
+                                            </m:sSubPr>
+                                            <m:e>
+                                              <m:r>
+                                                <a:rPr lang="en-US" sz="1600" b="0" i="1" smtClean="0">
+                                                  <a:solidFill>
+                                                    <a:srgbClr val="9437FF"/>
+                                                  </a:solidFill>
+                                                  <a:latin typeface="Cambria Math" panose="02040503050406030204" pitchFamily="18" charset="0"/>
+                                                  <a:ea typeface="Cambria Math" panose="02040503050406030204" pitchFamily="18" charset="0"/>
+                                                </a:rPr>
+                                                <m:t>𝑇</m:t>
+                                              </m:r>
+                                            </m:e>
+                                            <m:sub>
+                                              <m:r>
+                                                <a:rPr lang="en-US" sz="1600" b="0" i="1" smtClean="0">
+                                                  <a:solidFill>
+                                                    <a:srgbClr val="9437FF"/>
+                                                  </a:solidFill>
+                                                  <a:latin typeface="Cambria Math" panose="02040503050406030204" pitchFamily="18" charset="0"/>
+                                                  <a:ea typeface="Cambria Math" panose="02040503050406030204" pitchFamily="18" charset="0"/>
+                                                </a:rPr>
+                                                <m:t>𝑗</m:t>
+                                              </m:r>
+                                            </m:sub>
+                                          </m:sSub>
+                                        </m:e>
+                                      </m:d>
+                                    </m:e>
+                                    <m:sup>
+                                      <m:r>
+                                        <a:rPr lang="en-US" sz="1600" b="0" i="1" smtClean="0">
+                                          <a:solidFill>
+                                            <a:srgbClr val="9437FF"/>
+                                          </a:solidFill>
+                                          <a:latin typeface="Cambria Math" panose="02040503050406030204" pitchFamily="18" charset="0"/>
+                                          <a:ea typeface="Cambria Math" panose="02040503050406030204" pitchFamily="18" charset="0"/>
+                                        </a:rPr>
+                                        <m:t>2</m:t>
+                                      </m:r>
+                                    </m:sup>
+                                  </m:sSup>
+                                </m:num>
+                                <m:den>
+                                  <m:r>
+                                    <a:rPr lang="en-US" sz="1600" b="0" i="1" smtClean="0">
+                                      <a:solidFill>
+                                        <a:srgbClr val="9437FF"/>
+                                      </a:solidFill>
+                                      <a:latin typeface="Cambria Math" panose="02040503050406030204" pitchFamily="18" charset="0"/>
+                                      <a:ea typeface="Cambria Math" panose="02040503050406030204" pitchFamily="18" charset="0"/>
+                                    </a:rPr>
+                                    <m:t>2</m:t>
+                                  </m:r>
+                                  <m:sSup>
+                                    <m:sSupPr>
+                                      <m:ctrlPr>
+                                        <a:rPr lang="en-US" sz="1600" b="0" i="1" smtClean="0">
+                                          <a:solidFill>
+                                            <a:srgbClr val="9437FF"/>
+                                          </a:solidFill>
+                                          <a:latin typeface="Cambria Math" panose="02040503050406030204" pitchFamily="18" charset="0"/>
+                                          <a:ea typeface="Cambria Math" panose="02040503050406030204" pitchFamily="18" charset="0"/>
+                                        </a:rPr>
+                                      </m:ctrlPr>
+                                    </m:sSupPr>
+                                    <m:e>
+                                      <m:r>
+                                        <a:rPr lang="en-US" sz="1600" b="0" i="1" smtClean="0">
+                                          <a:solidFill>
+                                            <a:srgbClr val="9437FF"/>
+                                          </a:solidFill>
+                                          <a:latin typeface="Cambria Math" panose="02040503050406030204" pitchFamily="18" charset="0"/>
+                                          <a:ea typeface="Cambria Math" panose="02040503050406030204" pitchFamily="18" charset="0"/>
+                                        </a:rPr>
+                                        <m:t>𝜎</m:t>
+                                      </m:r>
+                                    </m:e>
+                                    <m:sup>
+                                      <m:r>
+                                        <a:rPr lang="en-US" sz="1600" b="0" i="1" smtClean="0">
+                                          <a:solidFill>
+                                            <a:srgbClr val="9437FF"/>
+                                          </a:solidFill>
+                                          <a:latin typeface="Cambria Math" panose="02040503050406030204" pitchFamily="18" charset="0"/>
+                                          <a:ea typeface="Cambria Math" panose="02040503050406030204" pitchFamily="18" charset="0"/>
+                                        </a:rPr>
+                                        <m:t>2</m:t>
+                                      </m:r>
+                                    </m:sup>
+                                  </m:sSup>
+                                </m:den>
+                              </m:f>
                             </m:e>
-                            <m:sub>
-                              <m:r>
-                                <a:rPr lang="en-US" sz="1400" b="0" i="1" dirty="0" smtClean="0">
-                                  <a:latin typeface="Cambria Math" panose="02040503050406030204" pitchFamily="18" charset="0"/>
-                                </a:rPr>
-                                <m:t>𝑖</m:t>
-                              </m:r>
-                            </m:sub>
-                          </m:sSub>
-                          <m:r>
-                            <a:rPr lang="en-US" sz="1400" b="0" i="1" dirty="0" smtClean="0">
-                              <a:latin typeface="Cambria Math" panose="02040503050406030204" pitchFamily="18" charset="0"/>
-                            </a:rPr>
-                            <m:t>=1|</m:t>
-                          </m:r>
-                          <m:sSub>
-                            <m:sSubPr>
-                              <m:ctrlPr>
-                                <a:rPr lang="en-US" sz="1400" b="0" i="1" dirty="0" smtClean="0">
-                                  <a:latin typeface="Cambria Math" panose="02040503050406030204" pitchFamily="18" charset="0"/>
-                                </a:rPr>
-                              </m:ctrlPr>
-                            </m:sSubPr>
-                            <m:e>
-                              <m:r>
-                                <a:rPr lang="en-US" sz="1400" b="0" i="1" dirty="0" smtClean="0">
-                                  <a:latin typeface="Cambria Math" panose="02040503050406030204" pitchFamily="18" charset="0"/>
-                                </a:rPr>
-                                <m:t>𝐴</m:t>
-                              </m:r>
-                            </m:e>
-                            <m:sub>
-                              <m:r>
-                                <a:rPr lang="en-US" sz="1400" b="0" i="1" dirty="0" smtClean="0">
-                                  <a:latin typeface="Cambria Math" panose="02040503050406030204" pitchFamily="18" charset="0"/>
-                                </a:rPr>
-                                <m:t>𝑖</m:t>
-                              </m:r>
-                            </m:sub>
-                          </m:sSub>
-                        </m:e>
-                      </m:d>
-                      <m:r>
-                        <a:rPr lang="en-US" sz="1400" b="0" i="1" dirty="0" smtClean="0">
-                          <a:latin typeface="Cambria Math" panose="02040503050406030204" pitchFamily="18" charset="0"/>
-                        </a:rPr>
-                        <m:t> → </m:t>
-                      </m:r>
+                          </m:d>
+                        </m:sup>
+                      </m:sSup>
                     </m:oMath>
-                  </a14:m>
-                  <a:r>
-                    <a:rPr lang="en-US" sz="1400" b="0" dirty="0"/>
-                    <a:t>   </a:t>
-                  </a:r>
-                  <a14:m>
-                    <m:oMath xmlns:m="http://schemas.openxmlformats.org/officeDocument/2006/math">
-                      <m:r>
-                        <a:rPr lang="en-US" sz="1400" b="0" dirty="0" smtClean="0">
-                          <a:latin typeface="Cambria Math" panose="02040503050406030204" pitchFamily="18" charset="0"/>
-                        </a:rPr>
-                        <m:t>≈</m:t>
-                      </m:r>
-                    </m:oMath>
-                  </a14:m>
-                  <a:r>
-                    <a:rPr lang="en-US" sz="1400" b="0" dirty="0"/>
-                    <a:t>  monotone</a:t>
-                  </a:r>
-                </a:p>
-                <a:p>
-                  <a:pPr>
-                    <a:lnSpc>
-                      <a:spcPct val="150000"/>
-                    </a:lnSpc>
-                  </a:pPr>
-                  <a:r>
-                    <a:rPr lang="en-US" sz="1400" b="0" dirty="0"/>
-                    <a:t>Hero:  </a:t>
-                  </a:r>
-                  <a14:m>
-                    <m:oMath xmlns:m="http://schemas.openxmlformats.org/officeDocument/2006/math">
-                      <m:r>
-                        <a:rPr lang="en-US" sz="1400" b="0" i="1" dirty="0" smtClean="0">
-                          <a:latin typeface="Cambria Math" panose="02040503050406030204" pitchFamily="18" charset="0"/>
-                        </a:rPr>
-                        <m:t>𝑃</m:t>
-                      </m:r>
-                      <m:d>
-                        <m:dPr>
-                          <m:ctrlPr>
-                            <a:rPr lang="en-US" sz="1400" b="0" i="1" dirty="0" smtClean="0">
-                              <a:latin typeface="Cambria Math" panose="02040503050406030204" pitchFamily="18" charset="0"/>
-                            </a:rPr>
-                          </m:ctrlPr>
-                        </m:dPr>
-                        <m:e>
-                          <m:sSub>
-                            <m:sSubPr>
-                              <m:ctrlPr>
-                                <a:rPr lang="en-US" sz="1400" b="0" i="1" dirty="0" smtClean="0">
-                                  <a:latin typeface="Cambria Math" panose="02040503050406030204" pitchFamily="18" charset="0"/>
-                                </a:rPr>
-                              </m:ctrlPr>
-                            </m:sSubPr>
-                            <m:e>
-                              <m:r>
-                                <a:rPr lang="en-US" sz="1400" b="0" i="1" dirty="0" smtClean="0">
-                                  <a:latin typeface="Cambria Math" panose="02040503050406030204" pitchFamily="18" charset="0"/>
-                                </a:rPr>
-                                <m:t>𝑌</m:t>
-                              </m:r>
-                            </m:e>
-                            <m:sub>
-                              <m:r>
-                                <a:rPr lang="en-US" sz="1400" b="0" i="1" dirty="0" smtClean="0">
-                                  <a:latin typeface="Cambria Math" panose="02040503050406030204" pitchFamily="18" charset="0"/>
-                                </a:rPr>
-                                <m:t>𝑖</m:t>
-                              </m:r>
-                            </m:sub>
-                          </m:sSub>
-                          <m:r>
-                            <a:rPr lang="en-US" sz="1400" b="0" i="0" dirty="0" smtClean="0">
-                              <a:latin typeface="Cambria Math" panose="02040503050406030204" pitchFamily="18" charset="0"/>
-                            </a:rPr>
-                            <m:t>=1|</m:t>
-                          </m:r>
-                          <m:r>
-                            <a:rPr lang="en-US" sz="1400" b="0" i="1" dirty="0" smtClean="0">
-                              <a:latin typeface="Cambria Math" panose="02040503050406030204" pitchFamily="18" charset="0"/>
-                            </a:rPr>
-                            <m:t>𝑃𝑜𝑜𝑙𝑄</m:t>
-                          </m:r>
-                          <m:r>
-                            <a:rPr lang="en-US" sz="1400" b="0" i="0" dirty="0" smtClean="0">
-                              <a:latin typeface="Cambria Math" panose="02040503050406030204" pitchFamily="18" charset="0"/>
-                            </a:rPr>
-                            <m:t>_</m:t>
-                          </m:r>
-                          <m:r>
-                            <a:rPr lang="en-US" sz="1400" b="0" i="1" dirty="0" smtClean="0">
-                              <a:latin typeface="Cambria Math" panose="02040503050406030204" pitchFamily="18" charset="0"/>
-                            </a:rPr>
-                            <m:t>𝐿𝑂𝑂</m:t>
-                          </m:r>
-                        </m:e>
-                      </m:d>
-                      <m:r>
-                        <a:rPr lang="en-US" sz="1400" b="0" i="1" dirty="0" smtClean="0">
-                          <a:latin typeface="Cambria Math" panose="02040503050406030204" pitchFamily="18" charset="0"/>
-                        </a:rPr>
-                        <m:t> → </m:t>
-                      </m:r>
-                    </m:oMath>
-                  </a14:m>
-                  <a:r>
-                    <a:rPr lang="en-US" sz="1400" b="0" dirty="0"/>
-                    <a:t>  tail dip</a:t>
-                  </a:r>
-                </a:p>
-              </p:txBody>
-            </p:sp>
-          </mc:Choice>
-          <mc:Fallback>
-            <p:sp>
-              <p:nvSpPr>
-                <p:cNvPr id="7" name="TextBox 6">
-                  <a:extLst>
-                    <a:ext uri="{FF2B5EF4-FFF2-40B4-BE49-F238E27FC236}">
-                      <a16:creationId xmlns:a16="http://schemas.microsoft.com/office/drawing/2014/main" id="{0B77B650-C396-DEF6-5A33-8DB93D5652B9}"/>
-                    </a:ext>
-                  </a:extLst>
-                </p:cNvPr>
-                <p:cNvSpPr txBox="1">
-                  <a:spLocks noRot="1" noChangeAspect="1" noMove="1" noResize="1" noEditPoints="1" noAdjustHandles="1" noChangeArrowheads="1" noChangeShapeType="1" noTextEdit="1"/>
-                </p:cNvSpPr>
-                <p:nvPr/>
-              </p:nvSpPr>
-              <p:spPr>
-                <a:xfrm>
-                  <a:off x="6222694" y="2107914"/>
-                  <a:ext cx="3261912" cy="1353897"/>
-                </a:xfrm>
-                <a:prstGeom prst="rect">
-                  <a:avLst/>
-                </a:prstGeom>
-                <a:blipFill>
-                  <a:blip r:embed="rId9"/>
-                  <a:stretch>
-                    <a:fillRect l="-388"/>
-                  </a:stretch>
-                </a:blipFill>
-              </p:spPr>
-              <p:txBody>
-                <a:bodyPr/>
-                <a:lstStyle/>
-                <a:p>
-                  <a:r>
-                    <a:rPr lang="en-US">
-                      <a:noFill/>
-                    </a:rPr>
-                    <a:t> </a:t>
-                  </a:r>
-                </a:p>
-              </p:txBody>
-            </p:sp>
-          </mc:Fallback>
-        </mc:AlternateContent>
-      </p:grpSp>
+                  </m:oMathPara>
+                </a14:m>
+                <a:endParaRPr lang="en-US" sz="1600" b="0" dirty="0">
+                  <a:solidFill>
+                    <a:srgbClr val="9437FF"/>
+                  </a:solidFill>
+                  <a:ea typeface="Cambria Math" panose="02040503050406030204" pitchFamily="18" charset="0"/>
+                </a:endParaRPr>
+              </a:p>
+              <a:p>
+                <a14:m>
+                  <m:oMath xmlns:m="http://schemas.openxmlformats.org/officeDocument/2006/math">
+                    <m:sSub>
+                      <m:sSubPr>
+                        <m:ctrlPr>
+                          <a:rPr lang="en-US" sz="1200" i="1" dirty="0" smtClean="0">
+                            <a:latin typeface="Cambria Math" panose="02040503050406030204" pitchFamily="18" charset="0"/>
+                          </a:rPr>
+                        </m:ctrlPr>
+                      </m:sSubPr>
+                      <m:e>
+                        <m:r>
+                          <a:rPr lang="en-US" sz="1200" i="1" dirty="0" smtClean="0">
+                            <a:latin typeface="Cambria Math" panose="02040503050406030204" pitchFamily="18" charset="0"/>
+                          </a:rPr>
+                          <m:t>𝜋</m:t>
+                        </m:r>
+                      </m:e>
+                      <m:sub>
+                        <m:r>
+                          <a:rPr lang="en-US" sz="1200" i="1" dirty="0" err="1" smtClean="0">
+                            <a:latin typeface="Cambria Math" panose="02040503050406030204" pitchFamily="18" charset="0"/>
+                          </a:rPr>
+                          <m:t>𝑖𝑗</m:t>
+                        </m:r>
+                      </m:sub>
+                    </m:sSub>
+                    <m:r>
+                      <a:rPr lang="en-US" sz="1200" i="1" dirty="0" smtClean="0">
+                        <a:latin typeface="Cambria Math" panose="02040503050406030204" pitchFamily="18" charset="0"/>
+                      </a:rPr>
+                      <m:t>→</m:t>
+                    </m:r>
+                    <m:r>
+                      <a:rPr lang="en-US" sz="1200" i="1" dirty="0">
+                        <a:latin typeface="Cambria Math" panose="02040503050406030204" pitchFamily="18" charset="0"/>
+                      </a:rPr>
+                      <m:t> </m:t>
+                    </m:r>
+                  </m:oMath>
+                </a14:m>
+                <a:r>
+                  <a:rPr lang="en-US" sz="1200" dirty="0"/>
+                  <a:t> Soft preference of player </a:t>
+                </a:r>
+                <a14:m>
+                  <m:oMath xmlns:m="http://schemas.openxmlformats.org/officeDocument/2006/math">
+                    <m:r>
+                      <a:rPr lang="en-US" sz="1200" i="1" dirty="0" smtClean="0">
+                        <a:latin typeface="Cambria Math" panose="02040503050406030204" pitchFamily="18" charset="0"/>
+                      </a:rPr>
+                      <m:t>𝑖</m:t>
+                    </m:r>
+                  </m:oMath>
+                </a14:m>
+                <a:r>
+                  <a:rPr lang="en-US" sz="1200" dirty="0"/>
+                  <a:t> for team </a:t>
+                </a:r>
+                <a14:m>
+                  <m:oMath xmlns:m="http://schemas.openxmlformats.org/officeDocument/2006/math">
+                    <m:r>
+                      <a:rPr lang="en-US" sz="1200" i="1" dirty="0" smtClean="0">
+                        <a:latin typeface="Cambria Math" panose="02040503050406030204" pitchFamily="18" charset="0"/>
+                      </a:rPr>
+                      <m:t>𝑗</m:t>
+                    </m:r>
+                  </m:oMath>
+                </a14:m>
+                <a:r>
+                  <a:rPr lang="en-US" sz="1200" dirty="0"/>
+                  <a:t> before we normalize to probabilities and fill seats</a:t>
+                </a:r>
+              </a:p>
+              <a:p>
+                <a14:m>
+                  <m:oMath xmlns:m="http://schemas.openxmlformats.org/officeDocument/2006/math">
+                    <m:sSub>
+                      <m:sSubPr>
+                        <m:ctrlPr>
+                          <a:rPr lang="en-US" sz="1200" i="1" dirty="0" smtClean="0">
+                            <a:latin typeface="Cambria Math" panose="02040503050406030204" pitchFamily="18" charset="0"/>
+                          </a:rPr>
+                        </m:ctrlPr>
+                      </m:sSubPr>
+                      <m:e>
+                        <m:r>
+                          <a:rPr lang="en-US" sz="1200" i="1" dirty="0" smtClean="0">
+                            <a:latin typeface="Cambria Math" panose="02040503050406030204" pitchFamily="18" charset="0"/>
+                          </a:rPr>
+                          <m:t>𝑇</m:t>
+                        </m:r>
+                      </m:e>
+                      <m:sub>
+                        <m:r>
+                          <a:rPr lang="en-US" sz="1200" i="1" dirty="0" smtClean="0">
+                            <a:latin typeface="Cambria Math" panose="02040503050406030204" pitchFamily="18" charset="0"/>
+                          </a:rPr>
+                          <m:t>𝑗</m:t>
+                        </m:r>
+                      </m:sub>
+                    </m:sSub>
+                    <m:r>
+                      <a:rPr lang="en-US" sz="1200" i="1" dirty="0" smtClean="0">
+                        <a:latin typeface="Cambria Math" panose="02040503050406030204" pitchFamily="18" charset="0"/>
+                      </a:rPr>
+                      <m:t>→</m:t>
+                    </m:r>
+                  </m:oMath>
+                </a14:m>
+                <a:r>
+                  <a:rPr lang="en-US" sz="1200" dirty="0"/>
+                  <a:t> Team target PoolQ,  \rho  -&gt;. Assortativity knob</a:t>
+                </a:r>
+              </a:p>
+              <a:p>
+                <a14:m>
+                  <m:oMath xmlns:m="http://schemas.openxmlformats.org/officeDocument/2006/math">
+                    <m:r>
+                      <a:rPr lang="en-US" sz="1200" i="1" dirty="0" smtClean="0">
+                        <a:latin typeface="Cambria Math" panose="02040503050406030204" pitchFamily="18" charset="0"/>
+                      </a:rPr>
+                      <m:t>𝜎</m:t>
+                    </m:r>
+                    <m:r>
+                      <a:rPr lang="en-US" sz="1200" i="1" dirty="0">
+                        <a:latin typeface="Cambria Math" panose="02040503050406030204" pitchFamily="18" charset="0"/>
+                      </a:rPr>
+                      <m:t> </m:t>
+                    </m:r>
+                    <m:r>
+                      <a:rPr lang="en-US" sz="1200" i="1" dirty="0" smtClean="0">
+                        <a:latin typeface="Cambria Math" panose="02040503050406030204" pitchFamily="18" charset="0"/>
+                      </a:rPr>
+                      <m:t>→</m:t>
+                    </m:r>
+                  </m:oMath>
+                </a14:m>
+                <a:r>
+                  <a:rPr lang="en-US" sz="1200" dirty="0"/>
+                  <a:t> Fixed length-scale in ability units (default</a:t>
+                </a:r>
+                <a14:m>
+                  <m:oMath xmlns:m="http://schemas.openxmlformats.org/officeDocument/2006/math">
+                    <m:r>
+                      <a:rPr lang="en-US" sz="1200" i="1" dirty="0" smtClean="0">
+                        <a:latin typeface="Cambria Math" panose="02040503050406030204" pitchFamily="18" charset="0"/>
+                      </a:rPr>
+                      <m:t>~0.65</m:t>
+                    </m:r>
+                  </m:oMath>
+                </a14:m>
+                <a:r>
+                  <a:rPr lang="en-US" sz="1200" dirty="0"/>
+                  <a:t>)</a:t>
+                </a:r>
+              </a:p>
+              <a:p>
+                <a:endParaRPr lang="en-US" sz="1200" dirty="0"/>
+              </a:p>
+              <a:p>
+                <a:pPr/>
+                <a:endParaRPr lang="en-US" sz="1200" dirty="0"/>
+              </a:p>
+            </p:txBody>
+          </p:sp>
+        </mc:Choice>
+        <mc:Fallback>
+          <p:sp>
+            <p:nvSpPr>
+              <p:cNvPr id="51" name="TextBox 50">
+                <a:extLst>
+                  <a:ext uri="{FF2B5EF4-FFF2-40B4-BE49-F238E27FC236}">
+                    <a16:creationId xmlns:a16="http://schemas.microsoft.com/office/drawing/2014/main" id="{2A497B29-CB0B-2225-3C2C-3BD04FF5EC04}"/>
+                  </a:ext>
+                </a:extLst>
+              </p:cNvPr>
+              <p:cNvSpPr txBox="1">
+                <a:spLocks noRot="1" noChangeAspect="1" noMove="1" noResize="1" noEditPoints="1" noAdjustHandles="1" noChangeArrowheads="1" noChangeShapeType="1" noTextEdit="1"/>
+              </p:cNvSpPr>
+              <p:nvPr/>
+            </p:nvSpPr>
+            <p:spPr>
+              <a:xfrm>
+                <a:off x="460513" y="2162594"/>
+                <a:ext cx="4536028" cy="1785552"/>
+              </a:xfrm>
+              <a:prstGeom prst="rect">
+                <a:avLst/>
+              </a:prstGeom>
+              <a:blipFill>
+                <a:blip r:embed="rId10"/>
+                <a:stretch>
+                  <a:fillRect/>
+                </a:stretch>
+              </a:blipFill>
+            </p:spPr>
+            <p:txBody>
+              <a:bodyPr/>
+              <a:lstStyle/>
+              <a:p>
+                <a:r>
+                  <a:rPr lang="en-US">
+                    <a:noFill/>
+                  </a:rPr>
+                  <a:t> </a:t>
+                </a:r>
+              </a:p>
+            </p:txBody>
+          </p:sp>
+        </mc:Fallback>
+      </mc:AlternateContent>
+      <mc:AlternateContent xmlns:mc="http://schemas.openxmlformats.org/markup-compatibility/2006">
+        <mc:Choice xmlns:a14="http://schemas.microsoft.com/office/drawing/2010/main" Requires="a14">
+          <p:sp>
+            <p:nvSpPr>
+              <p:cNvPr id="52" name="TextBox 51">
+                <a:extLst>
+                  <a:ext uri="{FF2B5EF4-FFF2-40B4-BE49-F238E27FC236}">
+                    <a16:creationId xmlns:a16="http://schemas.microsoft.com/office/drawing/2014/main" id="{67E5036B-5655-642A-64B3-0642C6A39E43}"/>
+                  </a:ext>
+                </a:extLst>
+              </p:cNvPr>
+              <p:cNvSpPr txBox="1"/>
+              <p:nvPr/>
+            </p:nvSpPr>
+            <p:spPr>
+              <a:xfrm>
+                <a:off x="5796854" y="2377885"/>
+                <a:ext cx="4536027" cy="461665"/>
+              </a:xfrm>
+              <a:prstGeom prst="rect">
+                <a:avLst/>
+              </a:prstGeom>
+              <a:noFill/>
+            </p:spPr>
+            <p:txBody>
+              <a:bodyPr wrap="square" rtlCol="0">
+                <a:spAutoFit/>
+              </a:bodyPr>
+              <a:lstStyle/>
+              <a:p>
+                <a:r>
+                  <a:rPr lang="en-US" sz="1200" dirty="0"/>
+                  <a:t>The current trivial method is just to choose the top </a:t>
+                </a:r>
+                <a14:m>
+                  <m:oMath xmlns:m="http://schemas.openxmlformats.org/officeDocument/2006/math">
+                    <m:r>
+                      <a:rPr lang="en-US" sz="1200" i="1" dirty="0" smtClean="0">
+                        <a:latin typeface="Cambria Math" panose="02040503050406030204" pitchFamily="18" charset="0"/>
+                      </a:rPr>
+                      <m:t>𝐾</m:t>
+                    </m:r>
+                  </m:oMath>
+                </a14:m>
+                <a:r>
+                  <a:rPr lang="en-US" sz="1200" dirty="0"/>
+                  <a:t> players by </a:t>
+                </a:r>
+                <a14:m>
+                  <m:oMath xmlns:m="http://schemas.openxmlformats.org/officeDocument/2006/math">
+                    <m:sSub>
+                      <m:sSubPr>
+                        <m:ctrlPr>
+                          <a:rPr lang="en-US" sz="1200" i="1" dirty="0" smtClean="0">
+                            <a:latin typeface="Cambria Math" panose="02040503050406030204" pitchFamily="18" charset="0"/>
+                          </a:rPr>
+                        </m:ctrlPr>
+                      </m:sSubPr>
+                      <m:e>
+                        <m:r>
+                          <a:rPr lang="en-US" sz="1200" i="1" dirty="0" smtClean="0">
+                            <a:latin typeface="Cambria Math" panose="02040503050406030204" pitchFamily="18" charset="0"/>
+                          </a:rPr>
+                          <m:t>𝑆</m:t>
+                        </m:r>
+                      </m:e>
+                      <m:sub>
+                        <m:r>
+                          <a:rPr lang="en-US" sz="1200" i="1" dirty="0" smtClean="0">
+                            <a:latin typeface="Cambria Math" panose="02040503050406030204" pitchFamily="18" charset="0"/>
+                          </a:rPr>
+                          <m:t>𝑖</m:t>
+                        </m:r>
+                      </m:sub>
+                    </m:sSub>
+                  </m:oMath>
+                </a14:m>
+                <a:endParaRPr lang="en-US" sz="1200" dirty="0"/>
+              </a:p>
+              <a:p>
+                <a:r>
+                  <a:rPr lang="en-US" sz="1200" dirty="0"/>
+                  <a:t>Future methods could introduce stochastic noise </a:t>
+                </a:r>
+                <a14:m>
+                  <m:oMath xmlns:m="http://schemas.openxmlformats.org/officeDocument/2006/math">
+                    <m:sSub>
+                      <m:sSubPr>
+                        <m:ctrlPr>
+                          <a:rPr lang="en-US" sz="1200" i="1" dirty="0" smtClean="0">
+                            <a:latin typeface="Cambria Math" panose="02040503050406030204" pitchFamily="18" charset="0"/>
+                          </a:rPr>
+                        </m:ctrlPr>
+                      </m:sSubPr>
+                      <m:e>
+                        <m:r>
+                          <a:rPr lang="en-US" sz="1200" i="1" dirty="0" smtClean="0">
+                            <a:latin typeface="Cambria Math" panose="02040503050406030204" pitchFamily="18" charset="0"/>
+                          </a:rPr>
+                          <m:t>𝑆</m:t>
+                        </m:r>
+                      </m:e>
+                      <m:sub>
+                        <m:r>
+                          <a:rPr lang="en-US" sz="1200" i="1" dirty="0" smtClean="0">
+                            <a:latin typeface="Cambria Math" panose="02040503050406030204" pitchFamily="18" charset="0"/>
+                          </a:rPr>
+                          <m:t>𝑖</m:t>
+                        </m:r>
+                      </m:sub>
+                    </m:sSub>
+                    <m:r>
+                      <a:rPr lang="en-US" sz="1200" i="1" dirty="0" smtClean="0">
+                        <a:latin typeface="Cambria Math" panose="02040503050406030204" pitchFamily="18" charset="0"/>
+                      </a:rPr>
+                      <m:t>+ </m:t>
+                    </m:r>
+                    <m:r>
+                      <a:rPr lang="en-US" sz="1200" i="1" dirty="0" smtClean="0">
+                        <a:latin typeface="Cambria Math" panose="02040503050406030204" pitchFamily="18" charset="0"/>
+                      </a:rPr>
+                      <m:t>𝛿</m:t>
+                    </m:r>
+                  </m:oMath>
+                </a14:m>
+                <a:endParaRPr lang="en-US" sz="1200" dirty="0"/>
+              </a:p>
+            </p:txBody>
+          </p:sp>
+        </mc:Choice>
+        <mc:Fallback>
+          <p:sp>
+            <p:nvSpPr>
+              <p:cNvPr id="52" name="TextBox 51">
+                <a:extLst>
+                  <a:ext uri="{FF2B5EF4-FFF2-40B4-BE49-F238E27FC236}">
+                    <a16:creationId xmlns:a16="http://schemas.microsoft.com/office/drawing/2014/main" id="{67E5036B-5655-642A-64B3-0642C6A39E43}"/>
+                  </a:ext>
+                </a:extLst>
+              </p:cNvPr>
+              <p:cNvSpPr txBox="1">
+                <a:spLocks noRot="1" noChangeAspect="1" noMove="1" noResize="1" noEditPoints="1" noAdjustHandles="1" noChangeArrowheads="1" noChangeShapeType="1" noTextEdit="1"/>
+              </p:cNvSpPr>
+              <p:nvPr/>
+            </p:nvSpPr>
+            <p:spPr>
+              <a:xfrm>
+                <a:off x="5796854" y="2377885"/>
+                <a:ext cx="4536027" cy="461665"/>
+              </a:xfrm>
+              <a:prstGeom prst="rect">
+                <a:avLst/>
+              </a:prstGeom>
+              <a:blipFill>
+                <a:blip r:embed="rId11"/>
+                <a:stretch>
+                  <a:fillRect b="-10811"/>
+                </a:stretch>
+              </a:blipFill>
+            </p:spPr>
+            <p:txBody>
+              <a:bodyPr/>
+              <a:lstStyle/>
+              <a:p>
+                <a:r>
+                  <a:rPr lang="en-US">
+                    <a:noFill/>
+                  </a:rPr>
+                  <a:t> </a:t>
+                </a:r>
+              </a:p>
+            </p:txBody>
+          </p:sp>
+        </mc:Fallback>
+      </mc:AlternateContent>
     </p:spTree>
     <p:extLst>
       <p:ext uri="{BB962C8B-B14F-4D97-AF65-F5344CB8AC3E}">
